--- a/2024/2024-03-29-AI-Updates.pptx
+++ b/2024/2024-03-29-AI-Updates.pptx
@@ -981,7 +981,7 @@
   <p:cSld>
     <p:spTree>
       <p:nvGrpSpPr>
-        <p:cNvPr id="1" name="Shape 136"/>
+        <p:cNvPr id="1" name="Shape 138"/>
         <p:cNvGrpSpPr/>
         <p:nvPr/>
       </p:nvGrpSpPr>
@@ -995,7 +995,7 @@
       </p:grpSpPr>
       <p:sp>
         <p:nvSpPr>
-          <p:cNvPr id="137" name="Google Shape;137;p9:notes"/>
+          <p:cNvPr id="139" name="Google Shape;139;p10:notes"/>
           <p:cNvSpPr>
             <a:spLocks noGrp="1" noRot="1" noChangeAspect="1"/>
           </p:cNvSpPr>
@@ -1046,7 +1046,7 @@
       </p:sp>
       <p:sp>
         <p:nvSpPr>
-          <p:cNvPr id="138" name="Google Shape;138;p9:notes"/>
+          <p:cNvPr id="140" name="Google Shape;140;p10:notes"/>
           <p:cNvSpPr txBox="1">
             <a:spLocks noGrp="1"/>
           </p:cNvSpPr>
@@ -1103,7 +1103,7 @@
   <p:cSld>
     <p:spTree>
       <p:nvGrpSpPr>
-        <p:cNvPr id="1" name="Shape 151"/>
+        <p:cNvPr id="1" name="Shape 153"/>
         <p:cNvGrpSpPr/>
         <p:nvPr/>
       </p:nvGrpSpPr>
@@ -1117,7 +1117,7 @@
       </p:grpSpPr>
       <p:sp>
         <p:nvSpPr>
-          <p:cNvPr id="152" name="Google Shape;152;p10:notes"/>
+          <p:cNvPr id="154" name="Google Shape;154;p11:notes"/>
           <p:cNvSpPr>
             <a:spLocks noGrp="1" noRot="1" noChangeAspect="1"/>
           </p:cNvSpPr>
@@ -1168,7 +1168,7 @@
       </p:sp>
       <p:sp>
         <p:nvSpPr>
-          <p:cNvPr id="153" name="Google Shape;153;p10:notes"/>
+          <p:cNvPr id="155" name="Google Shape;155;p11:notes"/>
           <p:cNvSpPr txBox="1">
             <a:spLocks noGrp="1"/>
           </p:cNvSpPr>
@@ -1225,7 +1225,7 @@
   <p:cSld>
     <p:spTree>
       <p:nvGrpSpPr>
-        <p:cNvPr id="1" name="Shape 158"/>
+        <p:cNvPr id="1" name="Shape 160"/>
         <p:cNvGrpSpPr/>
         <p:nvPr/>
       </p:nvGrpSpPr>
@@ -1239,7 +1239,7 @@
       </p:grpSpPr>
       <p:sp>
         <p:nvSpPr>
-          <p:cNvPr id="159" name="Google Shape;159;p11:notes"/>
+          <p:cNvPr id="161" name="Google Shape;161;p12:notes"/>
           <p:cNvSpPr>
             <a:spLocks noGrp="1" noRot="1" noChangeAspect="1"/>
           </p:cNvSpPr>
@@ -1290,7 +1290,7 @@
       </p:sp>
       <p:sp>
         <p:nvSpPr>
-          <p:cNvPr id="160" name="Google Shape;160;p11:notes"/>
+          <p:cNvPr id="162" name="Google Shape;162;p12:notes"/>
           <p:cNvSpPr txBox="1">
             <a:spLocks noGrp="1"/>
           </p:cNvSpPr>
@@ -1347,7 +1347,7 @@
   <p:cSld>
     <p:spTree>
       <p:nvGrpSpPr>
-        <p:cNvPr id="1" name="Shape 164"/>
+        <p:cNvPr id="1" name="Shape 166"/>
         <p:cNvGrpSpPr/>
         <p:nvPr/>
       </p:nvGrpSpPr>
@@ -1361,7 +1361,7 @@
       </p:grpSpPr>
       <p:sp>
         <p:nvSpPr>
-          <p:cNvPr id="165" name="Google Shape;165;p12:notes"/>
+          <p:cNvPr id="167" name="Google Shape;167;p13:notes"/>
           <p:cNvSpPr>
             <a:spLocks noGrp="1" noRot="1" noChangeAspect="1"/>
           </p:cNvSpPr>
@@ -1412,7 +1412,7 @@
       </p:sp>
       <p:sp>
         <p:nvSpPr>
-          <p:cNvPr id="166" name="Google Shape;166;p12:notes"/>
+          <p:cNvPr id="168" name="Google Shape;168;p13:notes"/>
           <p:cNvSpPr txBox="1">
             <a:spLocks noGrp="1"/>
           </p:cNvSpPr>
@@ -1469,7 +1469,7 @@
   <p:cSld>
     <p:spTree>
       <p:nvGrpSpPr>
-        <p:cNvPr id="1" name="Shape 171"/>
+        <p:cNvPr id="1" name="Shape 173"/>
         <p:cNvGrpSpPr/>
         <p:nvPr/>
       </p:nvGrpSpPr>
@@ -1483,7 +1483,7 @@
       </p:grpSpPr>
       <p:sp>
         <p:nvSpPr>
-          <p:cNvPr id="172" name="Google Shape;172;p13:notes"/>
+          <p:cNvPr id="174" name="Google Shape;174;p14:notes"/>
           <p:cNvSpPr>
             <a:spLocks noGrp="1" noRot="1" noChangeAspect="1"/>
           </p:cNvSpPr>
@@ -1534,7 +1534,7 @@
       </p:sp>
       <p:sp>
         <p:nvSpPr>
-          <p:cNvPr id="173" name="Google Shape;173;p13:notes"/>
+          <p:cNvPr id="175" name="Google Shape;175;p14:notes"/>
           <p:cNvSpPr txBox="1">
             <a:spLocks noGrp="1"/>
           </p:cNvSpPr>
@@ -1591,7 +1591,7 @@
   <p:cSld>
     <p:spTree>
       <p:nvGrpSpPr>
-        <p:cNvPr id="1" name="Shape 179"/>
+        <p:cNvPr id="1" name="Shape 181"/>
         <p:cNvGrpSpPr/>
         <p:nvPr/>
       </p:nvGrpSpPr>
@@ -1605,7 +1605,7 @@
       </p:grpSpPr>
       <p:sp>
         <p:nvSpPr>
-          <p:cNvPr id="180" name="Google Shape;180;p14:notes"/>
+          <p:cNvPr id="182" name="Google Shape;182;p15:notes"/>
           <p:cNvSpPr>
             <a:spLocks noGrp="1" noRot="1" noChangeAspect="1"/>
           </p:cNvSpPr>
@@ -1656,7 +1656,7 @@
       </p:sp>
       <p:sp>
         <p:nvSpPr>
-          <p:cNvPr id="181" name="Google Shape;181;p14:notes"/>
+          <p:cNvPr id="183" name="Google Shape;183;p15:notes"/>
           <p:cNvSpPr txBox="1">
             <a:spLocks noGrp="1"/>
           </p:cNvSpPr>
@@ -1713,7 +1713,7 @@
   <p:cSld>
     <p:spTree>
       <p:nvGrpSpPr>
-        <p:cNvPr id="1" name="Shape 185"/>
+        <p:cNvPr id="1" name="Shape 187"/>
         <p:cNvGrpSpPr/>
         <p:nvPr/>
       </p:nvGrpSpPr>
@@ -1727,7 +1727,7 @@
       </p:grpSpPr>
       <p:sp>
         <p:nvSpPr>
-          <p:cNvPr id="186" name="Google Shape;186;p15:notes"/>
+          <p:cNvPr id="188" name="Google Shape;188;p16:notes"/>
           <p:cNvSpPr>
             <a:spLocks noGrp="1" noRot="1" noChangeAspect="1"/>
           </p:cNvSpPr>
@@ -1778,7 +1778,7 @@
       </p:sp>
       <p:sp>
         <p:nvSpPr>
-          <p:cNvPr id="187" name="Google Shape;187;p15:notes"/>
+          <p:cNvPr id="189" name="Google Shape;189;p16:notes"/>
           <p:cNvSpPr txBox="1">
             <a:spLocks noGrp="1"/>
           </p:cNvSpPr>
@@ -1835,7 +1835,7 @@
   <p:cSld>
     <p:spTree>
       <p:nvGrpSpPr>
-        <p:cNvPr id="1" name="Shape 195"/>
+        <p:cNvPr id="1" name="Shape 197"/>
         <p:cNvGrpSpPr/>
         <p:nvPr/>
       </p:nvGrpSpPr>
@@ -1849,7 +1849,7 @@
       </p:grpSpPr>
       <p:sp>
         <p:nvSpPr>
-          <p:cNvPr id="196" name="Google Shape;196;g2c792c30ee4_0_3:notes"/>
+          <p:cNvPr id="198" name="Google Shape;198;p17:notes"/>
           <p:cNvSpPr>
             <a:spLocks noGrp="1" noRot="1" noChangeAspect="1"/>
           </p:cNvSpPr>
@@ -1900,7 +1900,7 @@
       </p:sp>
       <p:sp>
         <p:nvSpPr>
-          <p:cNvPr id="197" name="Google Shape;197;g2c792c30ee4_0_3:notes"/>
+          <p:cNvPr id="199" name="Google Shape;199;p17:notes"/>
           <p:cNvSpPr txBox="1">
             <a:spLocks noGrp="1"/>
           </p:cNvSpPr>
@@ -1957,7 +1957,7 @@
   <p:cSld>
     <p:spTree>
       <p:nvGrpSpPr>
-        <p:cNvPr id="1" name="Shape 204"/>
+        <p:cNvPr id="1" name="Shape 206"/>
         <p:cNvGrpSpPr/>
         <p:nvPr/>
       </p:nvGrpSpPr>
@@ -1971,7 +1971,7 @@
       </p:grpSpPr>
       <p:sp>
         <p:nvSpPr>
-          <p:cNvPr id="205" name="Google Shape;205;p16:notes"/>
+          <p:cNvPr id="207" name="Google Shape;207;p18:notes"/>
           <p:cNvSpPr>
             <a:spLocks noGrp="1" noRot="1" noChangeAspect="1"/>
           </p:cNvSpPr>
@@ -2022,7 +2022,7 @@
       </p:sp>
       <p:sp>
         <p:nvSpPr>
-          <p:cNvPr id="206" name="Google Shape;206;p16:notes"/>
+          <p:cNvPr id="208" name="Google Shape;208;p18:notes"/>
           <p:cNvSpPr txBox="1">
             <a:spLocks noGrp="1"/>
           </p:cNvSpPr>
@@ -2079,7 +2079,7 @@
   <p:cSld>
     <p:spTree>
       <p:nvGrpSpPr>
-        <p:cNvPr id="1" name="Shape 212"/>
+        <p:cNvPr id="1" name="Shape 214"/>
         <p:cNvGrpSpPr/>
         <p:nvPr/>
       </p:nvGrpSpPr>
@@ -2093,7 +2093,7 @@
       </p:grpSpPr>
       <p:sp>
         <p:nvSpPr>
-          <p:cNvPr id="213" name="Google Shape;213;g2c792c30ee4_1_0:notes"/>
+          <p:cNvPr id="215" name="Google Shape;215;p19:notes"/>
           <p:cNvSpPr>
             <a:spLocks noGrp="1" noRot="1" noChangeAspect="1"/>
           </p:cNvSpPr>
@@ -2144,7 +2144,7 @@
       </p:sp>
       <p:sp>
         <p:nvSpPr>
-          <p:cNvPr id="214" name="Google Shape;214;g2c792c30ee4_1_0:notes"/>
+          <p:cNvPr id="216" name="Google Shape;216;p19:notes"/>
           <p:cNvSpPr txBox="1">
             <a:spLocks noGrp="1"/>
           </p:cNvSpPr>
@@ -2201,7 +2201,7 @@
   <p:cSld>
     <p:spTree>
       <p:nvGrpSpPr>
-        <p:cNvPr id="1" name="Shape 57"/>
+        <p:cNvPr id="1" name="Shape 59"/>
         <p:cNvGrpSpPr/>
         <p:nvPr/>
       </p:nvGrpSpPr>
@@ -2215,7 +2215,7 @@
       </p:grpSpPr>
       <p:sp>
         <p:nvSpPr>
-          <p:cNvPr id="58" name="Google Shape;58;p2:notes"/>
+          <p:cNvPr id="60" name="Google Shape;60;p2:notes"/>
           <p:cNvSpPr>
             <a:spLocks noGrp="1" noRot="1" noChangeAspect="1"/>
           </p:cNvSpPr>
@@ -2266,7 +2266,7 @@
       </p:sp>
       <p:sp>
         <p:nvSpPr>
-          <p:cNvPr id="59" name="Google Shape;59;p2:notes"/>
+          <p:cNvPr id="61" name="Google Shape;61;p2:notes"/>
           <p:cNvSpPr txBox="1">
             <a:spLocks noGrp="1"/>
           </p:cNvSpPr>
@@ -2323,7 +2323,7 @@
   <p:cSld>
     <p:spTree>
       <p:nvGrpSpPr>
-        <p:cNvPr id="1" name="Shape 219"/>
+        <p:cNvPr id="1" name="Shape 221"/>
         <p:cNvGrpSpPr/>
         <p:nvPr/>
       </p:nvGrpSpPr>
@@ -2337,7 +2337,7 @@
       </p:grpSpPr>
       <p:sp>
         <p:nvSpPr>
-          <p:cNvPr id="220" name="Google Shape;220;p17:notes"/>
+          <p:cNvPr id="222" name="Google Shape;222;p20:notes"/>
           <p:cNvSpPr>
             <a:spLocks noGrp="1" noRot="1" noChangeAspect="1"/>
           </p:cNvSpPr>
@@ -2388,7 +2388,7 @@
       </p:sp>
       <p:sp>
         <p:nvSpPr>
-          <p:cNvPr id="221" name="Google Shape;221;p17:notes"/>
+          <p:cNvPr id="223" name="Google Shape;223;p20:notes"/>
           <p:cNvSpPr txBox="1">
             <a:spLocks noGrp="1"/>
           </p:cNvSpPr>
@@ -2445,7 +2445,7 @@
   <p:cSld>
     <p:spTree>
       <p:nvGrpSpPr>
-        <p:cNvPr id="1" name="Shape 232"/>
+        <p:cNvPr id="1" name="Shape 234"/>
         <p:cNvGrpSpPr/>
         <p:nvPr/>
       </p:nvGrpSpPr>
@@ -2459,7 +2459,7 @@
       </p:grpSpPr>
       <p:sp>
         <p:nvSpPr>
-          <p:cNvPr id="233" name="Google Shape;233;p18:notes"/>
+          <p:cNvPr id="235" name="Google Shape;235;p21:notes"/>
           <p:cNvSpPr>
             <a:spLocks noGrp="1" noRot="1" noChangeAspect="1"/>
           </p:cNvSpPr>
@@ -2510,7 +2510,7 @@
       </p:sp>
       <p:sp>
         <p:nvSpPr>
-          <p:cNvPr id="234" name="Google Shape;234;p18:notes"/>
+          <p:cNvPr id="236" name="Google Shape;236;p21:notes"/>
           <p:cNvSpPr txBox="1">
             <a:spLocks noGrp="1"/>
           </p:cNvSpPr>
@@ -2567,7 +2567,7 @@
   <p:cSld>
     <p:spTree>
       <p:nvGrpSpPr>
-        <p:cNvPr id="1" name="Shape 240"/>
+        <p:cNvPr id="1" name="Shape 242"/>
         <p:cNvGrpSpPr/>
         <p:nvPr/>
       </p:nvGrpSpPr>
@@ -2581,7 +2581,7 @@
       </p:grpSpPr>
       <p:sp>
         <p:nvSpPr>
-          <p:cNvPr id="241" name="Google Shape;241;p19:notes"/>
+          <p:cNvPr id="243" name="Google Shape;243;p22:notes"/>
           <p:cNvSpPr>
             <a:spLocks noGrp="1" noRot="1" noChangeAspect="1"/>
           </p:cNvSpPr>
@@ -2632,7 +2632,7 @@
       </p:sp>
       <p:sp>
         <p:nvSpPr>
-          <p:cNvPr id="242" name="Google Shape;242;p19:notes"/>
+          <p:cNvPr id="244" name="Google Shape;244;p22:notes"/>
           <p:cNvSpPr txBox="1">
             <a:spLocks noGrp="1"/>
           </p:cNvSpPr>
@@ -2689,7 +2689,7 @@
   <p:cSld>
     <p:spTree>
       <p:nvGrpSpPr>
-        <p:cNvPr id="1" name="Shape 250"/>
+        <p:cNvPr id="1" name="Shape 252"/>
         <p:cNvGrpSpPr/>
         <p:nvPr/>
       </p:nvGrpSpPr>
@@ -2703,7 +2703,7 @@
       </p:grpSpPr>
       <p:sp>
         <p:nvSpPr>
-          <p:cNvPr id="251" name="Google Shape;251;p20:notes"/>
+          <p:cNvPr id="253" name="Google Shape;253;p23:notes"/>
           <p:cNvSpPr>
             <a:spLocks noGrp="1" noRot="1" noChangeAspect="1"/>
           </p:cNvSpPr>
@@ -2754,7 +2754,7 @@
       </p:sp>
       <p:sp>
         <p:nvSpPr>
-          <p:cNvPr id="252" name="Google Shape;252;p20:notes"/>
+          <p:cNvPr id="254" name="Google Shape;254;p23:notes"/>
           <p:cNvSpPr txBox="1">
             <a:spLocks noGrp="1"/>
           </p:cNvSpPr>
@@ -2811,7 +2811,7 @@
   <p:cSld>
     <p:spTree>
       <p:nvGrpSpPr>
-        <p:cNvPr id="1" name="Shape 68"/>
+        <p:cNvPr id="1" name="Shape 70"/>
         <p:cNvGrpSpPr/>
         <p:nvPr/>
       </p:nvGrpSpPr>
@@ -2825,7 +2825,7 @@
       </p:grpSpPr>
       <p:sp>
         <p:nvSpPr>
-          <p:cNvPr id="69" name="Google Shape;69;p3:notes"/>
+          <p:cNvPr id="71" name="Google Shape;71;p3:notes"/>
           <p:cNvSpPr>
             <a:spLocks noGrp="1" noRot="1" noChangeAspect="1"/>
           </p:cNvSpPr>
@@ -2876,7 +2876,7 @@
       </p:sp>
       <p:sp>
         <p:nvSpPr>
-          <p:cNvPr id="70" name="Google Shape;70;p3:notes"/>
+          <p:cNvPr id="72" name="Google Shape;72;p3:notes"/>
           <p:cNvSpPr txBox="1">
             <a:spLocks noGrp="1"/>
           </p:cNvSpPr>
@@ -2933,7 +2933,7 @@
   <p:cSld>
     <p:spTree>
       <p:nvGrpSpPr>
-        <p:cNvPr id="1" name="Shape 77"/>
+        <p:cNvPr id="1" name="Shape 79"/>
         <p:cNvGrpSpPr/>
         <p:nvPr/>
       </p:nvGrpSpPr>
@@ -2947,7 +2947,7 @@
       </p:grpSpPr>
       <p:sp>
         <p:nvSpPr>
-          <p:cNvPr id="78" name="Google Shape;78;p4:notes"/>
+          <p:cNvPr id="80" name="Google Shape;80;p4:notes"/>
           <p:cNvSpPr>
             <a:spLocks noGrp="1" noRot="1" noChangeAspect="1"/>
           </p:cNvSpPr>
@@ -2998,7 +2998,7 @@
       </p:sp>
       <p:sp>
         <p:nvSpPr>
-          <p:cNvPr id="79" name="Google Shape;79;p4:notes"/>
+          <p:cNvPr id="81" name="Google Shape;81;p4:notes"/>
           <p:cNvSpPr txBox="1">
             <a:spLocks noGrp="1"/>
           </p:cNvSpPr>
@@ -3055,7 +3055,7 @@
   <p:cSld>
     <p:spTree>
       <p:nvGrpSpPr>
-        <p:cNvPr id="1" name="Shape 90"/>
+        <p:cNvPr id="1" name="Shape 92"/>
         <p:cNvGrpSpPr/>
         <p:nvPr/>
       </p:nvGrpSpPr>
@@ -3069,7 +3069,7 @@
       </p:grpSpPr>
       <p:sp>
         <p:nvSpPr>
-          <p:cNvPr id="91" name="Google Shape;91;p5:notes"/>
+          <p:cNvPr id="93" name="Google Shape;93;p5:notes"/>
           <p:cNvSpPr>
             <a:spLocks noGrp="1" noRot="1" noChangeAspect="1"/>
           </p:cNvSpPr>
@@ -3120,7 +3120,7 @@
       </p:sp>
       <p:sp>
         <p:nvSpPr>
-          <p:cNvPr id="92" name="Google Shape;92;p5:notes"/>
+          <p:cNvPr id="94" name="Google Shape;94;p5:notes"/>
           <p:cNvSpPr txBox="1">
             <a:spLocks noGrp="1"/>
           </p:cNvSpPr>
@@ -3177,7 +3177,7 @@
   <p:cSld>
     <p:spTree>
       <p:nvGrpSpPr>
-        <p:cNvPr id="1" name="Shape 99"/>
+        <p:cNvPr id="1" name="Shape 101"/>
         <p:cNvGrpSpPr/>
         <p:nvPr/>
       </p:nvGrpSpPr>
@@ -3191,7 +3191,7 @@
       </p:grpSpPr>
       <p:sp>
         <p:nvSpPr>
-          <p:cNvPr id="100" name="Google Shape;100;p6:notes"/>
+          <p:cNvPr id="102" name="Google Shape;102;p6:notes"/>
           <p:cNvSpPr>
             <a:spLocks noGrp="1" noRot="1" noChangeAspect="1"/>
           </p:cNvSpPr>
@@ -3242,7 +3242,7 @@
       </p:sp>
       <p:sp>
         <p:nvSpPr>
-          <p:cNvPr id="101" name="Google Shape;101;p6:notes"/>
+          <p:cNvPr id="103" name="Google Shape;103;p6:notes"/>
           <p:cNvSpPr txBox="1">
             <a:spLocks noGrp="1"/>
           </p:cNvSpPr>
@@ -3299,7 +3299,7 @@
   <p:cSld>
     <p:spTree>
       <p:nvGrpSpPr>
-        <p:cNvPr id="1" name="Shape 109"/>
+        <p:cNvPr id="1" name="Shape 111"/>
         <p:cNvGrpSpPr/>
         <p:nvPr/>
       </p:nvGrpSpPr>
@@ -3313,7 +3313,7 @@
       </p:grpSpPr>
       <p:sp>
         <p:nvSpPr>
-          <p:cNvPr id="110" name="Google Shape;110;p7:notes"/>
+          <p:cNvPr id="112" name="Google Shape;112;p7:notes"/>
           <p:cNvSpPr>
             <a:spLocks noGrp="1" noRot="1" noChangeAspect="1"/>
           </p:cNvSpPr>
@@ -3364,7 +3364,7 @@
       </p:sp>
       <p:sp>
         <p:nvSpPr>
-          <p:cNvPr id="111" name="Google Shape;111;p7:notes"/>
+          <p:cNvPr id="113" name="Google Shape;113;p7:notes"/>
           <p:cNvSpPr txBox="1">
             <a:spLocks noGrp="1"/>
           </p:cNvSpPr>
@@ -3421,7 +3421,7 @@
   <p:cSld>
     <p:spTree>
       <p:nvGrpSpPr>
-        <p:cNvPr id="1" name="Shape 117"/>
+        <p:cNvPr id="1" name="Shape 119"/>
         <p:cNvGrpSpPr/>
         <p:nvPr/>
       </p:nvGrpSpPr>
@@ -3435,7 +3435,7 @@
       </p:grpSpPr>
       <p:sp>
         <p:nvSpPr>
-          <p:cNvPr id="118" name="Google Shape;118;p8:notes"/>
+          <p:cNvPr id="120" name="Google Shape;120;p8:notes"/>
           <p:cNvSpPr>
             <a:spLocks noGrp="1" noRot="1" noChangeAspect="1"/>
           </p:cNvSpPr>
@@ -3486,7 +3486,7 @@
       </p:sp>
       <p:sp>
         <p:nvSpPr>
-          <p:cNvPr id="119" name="Google Shape;119;p8:notes"/>
+          <p:cNvPr id="121" name="Google Shape;121;p8:notes"/>
           <p:cNvSpPr txBox="1">
             <a:spLocks noGrp="1"/>
           </p:cNvSpPr>
@@ -3543,7 +3543,7 @@
   <p:cSld>
     <p:spTree>
       <p:nvGrpSpPr>
-        <p:cNvPr id="1" name="Shape 129"/>
+        <p:cNvPr id="1" name="Shape 131"/>
         <p:cNvGrpSpPr/>
         <p:nvPr/>
       </p:nvGrpSpPr>
@@ -3557,7 +3557,7 @@
       </p:grpSpPr>
       <p:sp>
         <p:nvSpPr>
-          <p:cNvPr id="130" name="Google Shape;130;g2c780f2d62a_0_13:notes"/>
+          <p:cNvPr id="132" name="Google Shape;132;p9:notes"/>
           <p:cNvSpPr>
             <a:spLocks noGrp="1" noRot="1" noChangeAspect="1"/>
           </p:cNvSpPr>
@@ -3608,7 +3608,7 @@
       </p:sp>
       <p:sp>
         <p:nvSpPr>
-          <p:cNvPr id="131" name="Google Shape;131;g2c780f2d62a_0_13:notes"/>
+          <p:cNvPr id="133" name="Google Shape;133;p9:notes"/>
           <p:cNvSpPr txBox="1">
             <a:spLocks noGrp="1"/>
           </p:cNvSpPr>
@@ -11428,8 +11428,8 @@
         </p:nvSpPr>
         <p:spPr>
           <a:xfrm>
-            <a:off x="86325" y="1127825"/>
-            <a:ext cx="4420200" cy="3648000"/>
+            <a:off x="86325" y="1661225"/>
+            <a:ext cx="4420200" cy="3186300"/>
           </a:xfrm>
           <a:prstGeom prst="rect">
             <a:avLst/>
@@ -11465,7 +11465,7 @@
                 <a:srgbClr val="3C78D8"/>
               </a:buClr>
               <a:buSzPts val="1500"/>
-              <a:buFont typeface="Arial"/>
+              <a:buFont typeface="Calibri"/>
               <a:buChar char="●"/>
             </a:pPr>
             <a:r>
@@ -11473,10 +11473,10 @@
                 <a:solidFill>
                   <a:srgbClr val="3C78D8"/>
                 </a:solidFill>
-                <a:latin typeface="Arial"/>
-                <a:ea typeface="Arial"/>
-                <a:cs typeface="Arial"/>
-                <a:sym typeface="Arial"/>
+                <a:latin typeface="Calibri"/>
+                <a:ea typeface="Calibri"/>
+                <a:cs typeface="Calibri"/>
+                <a:sym typeface="Calibri"/>
               </a:rPr>
               <a:t>Groq - fast inference hardware &amp; API</a:t>
             </a:r>
@@ -11484,10 +11484,10 @@
               <a:solidFill>
                 <a:srgbClr val="3C78D8"/>
               </a:solidFill>
-              <a:latin typeface="Arial"/>
-              <a:ea typeface="Arial"/>
-              <a:cs typeface="Arial"/>
-              <a:sym typeface="Arial"/>
+              <a:latin typeface="Calibri"/>
+              <a:ea typeface="Calibri"/>
+              <a:cs typeface="Calibri"/>
+              <a:sym typeface="Calibri"/>
             </a:endParaRPr>
           </a:p>
           <a:p>
@@ -11505,7 +11505,7 @@
                 <a:srgbClr val="3C78D8"/>
               </a:buClr>
               <a:buSzPts val="1500"/>
-              <a:buFont typeface="Arial"/>
+              <a:buFont typeface="Calibri"/>
               <a:buChar char="●"/>
             </a:pPr>
             <a:r>
@@ -11513,10 +11513,10 @@
                 <a:solidFill>
                   <a:srgbClr val="3C78D8"/>
                 </a:solidFill>
-                <a:latin typeface="Arial"/>
-                <a:ea typeface="Arial"/>
-                <a:cs typeface="Arial"/>
-                <a:sym typeface="Arial"/>
+                <a:latin typeface="Calibri"/>
+                <a:ea typeface="Calibri"/>
+                <a:cs typeface="Calibri"/>
+                <a:sym typeface="Calibri"/>
               </a:rPr>
               <a:t>AI Consumption Growth, Consulting $</a:t>
             </a:r>
@@ -11524,10 +11524,10 @@
               <a:solidFill>
                 <a:srgbClr val="3C78D8"/>
               </a:solidFill>
-              <a:latin typeface="Arial"/>
-              <a:ea typeface="Arial"/>
-              <a:cs typeface="Arial"/>
-              <a:sym typeface="Arial"/>
+              <a:latin typeface="Calibri"/>
+              <a:ea typeface="Calibri"/>
+              <a:cs typeface="Calibri"/>
+              <a:sym typeface="Calibri"/>
             </a:endParaRPr>
           </a:p>
           <a:p>
@@ -11545,7 +11545,7 @@
                 <a:srgbClr val="3C78D8"/>
               </a:buClr>
               <a:buSzPts val="1500"/>
-              <a:buFont typeface="Arial"/>
+              <a:buFont typeface="Calibri"/>
               <a:buChar char="●"/>
             </a:pPr>
             <a:r>
@@ -11553,10 +11553,10 @@
                 <a:solidFill>
                   <a:srgbClr val="3C78D8"/>
                 </a:solidFill>
-                <a:latin typeface="Arial"/>
-                <a:ea typeface="Arial"/>
-                <a:cs typeface="Arial"/>
-                <a:sym typeface="Arial"/>
+                <a:latin typeface="Calibri"/>
+                <a:ea typeface="Calibri"/>
+                <a:cs typeface="Calibri"/>
+                <a:sym typeface="Calibri"/>
               </a:rPr>
               <a:t>Emad Mostaque Has Left Stability.AI</a:t>
             </a:r>
@@ -11564,10 +11564,10 @@
               <a:solidFill>
                 <a:srgbClr val="3C78D8"/>
               </a:solidFill>
-              <a:latin typeface="Arial"/>
-              <a:ea typeface="Arial"/>
-              <a:cs typeface="Arial"/>
-              <a:sym typeface="Arial"/>
+              <a:latin typeface="Calibri"/>
+              <a:ea typeface="Calibri"/>
+              <a:cs typeface="Calibri"/>
+              <a:sym typeface="Calibri"/>
             </a:endParaRPr>
           </a:p>
           <a:p>
@@ -11585,7 +11585,7 @@
                 <a:srgbClr val="3C78D8"/>
               </a:buClr>
               <a:buSzPts val="1500"/>
-              <a:buFont typeface="Arial"/>
+              <a:buFont typeface="Calibri"/>
               <a:buChar char="●"/>
             </a:pPr>
             <a:r>
@@ -11593,10 +11593,10 @@
                 <a:solidFill>
                   <a:srgbClr val="3C78D8"/>
                 </a:solidFill>
-                <a:latin typeface="Arial"/>
-                <a:ea typeface="Arial"/>
-                <a:cs typeface="Arial"/>
-                <a:sym typeface="Arial"/>
+                <a:latin typeface="Calibri"/>
+                <a:ea typeface="Calibri"/>
+                <a:cs typeface="Calibri"/>
+                <a:sym typeface="Calibri"/>
               </a:rPr>
               <a:t>Mistral 7b v0.2</a:t>
             </a:r>
@@ -11604,10 +11604,10 @@
               <a:solidFill>
                 <a:srgbClr val="3C78D8"/>
               </a:solidFill>
-              <a:latin typeface="Arial"/>
-              <a:ea typeface="Arial"/>
-              <a:cs typeface="Arial"/>
-              <a:sym typeface="Arial"/>
+              <a:latin typeface="Calibri"/>
+              <a:ea typeface="Calibri"/>
+              <a:cs typeface="Calibri"/>
+              <a:sym typeface="Calibri"/>
             </a:endParaRPr>
           </a:p>
           <a:p>
@@ -11625,7 +11625,7 @@
                 <a:srgbClr val="3C78D8"/>
               </a:buClr>
               <a:buSzPts val="1500"/>
-              <a:buFont typeface="Arial"/>
+              <a:buFont typeface="Calibri"/>
               <a:buChar char="●"/>
             </a:pPr>
             <a:r>
@@ -11633,10 +11633,10 @@
                 <a:solidFill>
                   <a:srgbClr val="3C78D8"/>
                 </a:solidFill>
-                <a:latin typeface="Arial"/>
-                <a:ea typeface="Arial"/>
-                <a:cs typeface="Arial"/>
-                <a:sym typeface="Arial"/>
+                <a:latin typeface="Calibri"/>
+                <a:ea typeface="Calibri"/>
+                <a:cs typeface="Calibri"/>
+                <a:sym typeface="Calibri"/>
               </a:rPr>
               <a:t>Agentic Workflows - Andrew Ng</a:t>
             </a:r>
@@ -11644,10 +11644,10 @@
               <a:solidFill>
                 <a:srgbClr val="3C78D8"/>
               </a:solidFill>
-              <a:latin typeface="Arial"/>
-              <a:ea typeface="Arial"/>
-              <a:cs typeface="Arial"/>
-              <a:sym typeface="Arial"/>
+              <a:latin typeface="Calibri"/>
+              <a:ea typeface="Calibri"/>
+              <a:cs typeface="Calibri"/>
+              <a:sym typeface="Calibri"/>
             </a:endParaRPr>
           </a:p>
           <a:p>
@@ -11665,7 +11665,7 @@
                 <a:srgbClr val="3C78D8"/>
               </a:buClr>
               <a:buSzPts val="1500"/>
-              <a:buFont typeface="Arial"/>
+              <a:buFont typeface="Calibri"/>
               <a:buChar char="●"/>
             </a:pPr>
             <a:r>
@@ -11673,10 +11673,10 @@
                 <a:solidFill>
                   <a:srgbClr val="3C78D8"/>
                 </a:solidFill>
-                <a:latin typeface="Arial"/>
-                <a:ea typeface="Arial"/>
-                <a:cs typeface="Arial"/>
-                <a:sym typeface="Arial"/>
+                <a:latin typeface="Calibri"/>
+                <a:ea typeface="Calibri"/>
+                <a:cs typeface="Calibri"/>
+                <a:sym typeface="Calibri"/>
               </a:rPr>
               <a:t>Databricks DBRX</a:t>
             </a:r>
@@ -11684,10 +11684,10 @@
               <a:solidFill>
                 <a:srgbClr val="3C78D8"/>
               </a:solidFill>
-              <a:latin typeface="Arial"/>
-              <a:ea typeface="Arial"/>
-              <a:cs typeface="Arial"/>
-              <a:sym typeface="Arial"/>
+              <a:latin typeface="Calibri"/>
+              <a:ea typeface="Calibri"/>
+              <a:cs typeface="Calibri"/>
+              <a:sym typeface="Calibri"/>
             </a:endParaRPr>
           </a:p>
           <a:p>
@@ -11705,7 +11705,7 @@
                 <a:srgbClr val="3C78D8"/>
               </a:buClr>
               <a:buSzPts val="1500"/>
-              <a:buFont typeface="Arial"/>
+              <a:buFont typeface="Calibri"/>
               <a:buChar char="●"/>
             </a:pPr>
             <a:r>
@@ -11713,88 +11713,21 @@
                 <a:solidFill>
                   <a:srgbClr val="3C78D8"/>
                 </a:solidFill>
-                <a:latin typeface="Arial"/>
-                <a:ea typeface="Arial"/>
-                <a:cs typeface="Arial"/>
-                <a:sym typeface="Arial"/>
+                <a:latin typeface="Calibri"/>
+                <a:ea typeface="Calibri"/>
+                <a:cs typeface="Calibri"/>
+                <a:sym typeface="Calibri"/>
               </a:rPr>
               <a:t>Jamba from AI21 Labs</a:t>
-            </a:r>
-            <a:endParaRPr sz="1500" b="1">
-              <a:solidFill>
-                <a:srgbClr val="3C78D8"/>
-              </a:solidFill>
-            </a:endParaRPr>
-          </a:p>
-          <a:p>
-            <a:pPr marL="228600" marR="0" lvl="0" indent="-209550" algn="l" rtl="0">
-              <a:lnSpc>
-                <a:spcPct val="100000"/>
-              </a:lnSpc>
-              <a:spcBef>
-                <a:spcPts val="0"/>
-              </a:spcBef>
-              <a:spcAft>
-                <a:spcPts val="0"/>
-              </a:spcAft>
-              <a:buClr>
-                <a:srgbClr val="3C78D8"/>
-              </a:buClr>
-              <a:buSzPts val="1500"/>
-              <a:buChar char="●"/>
-            </a:pPr>
-            <a:r>
-              <a:rPr lang="en" sz="1500" b="1">
-                <a:solidFill>
-                  <a:srgbClr val="3C78D8"/>
-                </a:solidFill>
-              </a:rPr>
-              <a:t>Simba from Microsoft</a:t>
-            </a:r>
-            <a:endParaRPr sz="1500" b="1">
-              <a:solidFill>
-                <a:srgbClr val="3C78D8"/>
-              </a:solidFill>
-            </a:endParaRPr>
-          </a:p>
-          <a:p>
-            <a:pPr marL="228600" marR="0" lvl="0" indent="-209550" algn="l" rtl="0">
-              <a:lnSpc>
-                <a:spcPct val="100000"/>
-              </a:lnSpc>
-              <a:spcBef>
-                <a:spcPts val="0"/>
-              </a:spcBef>
-              <a:spcAft>
-                <a:spcPts val="0"/>
-              </a:spcAft>
-              <a:buClr>
-                <a:srgbClr val="3C78D8"/>
-              </a:buClr>
-              <a:buSzPts val="1500"/>
-              <a:buFont typeface="Arial"/>
-              <a:buChar char="●"/>
-            </a:pPr>
-            <a:r>
-              <a:rPr lang="en" sz="1500" b="1" i="0" u="none" strike="noStrike" cap="none">
-                <a:solidFill>
-                  <a:srgbClr val="3C78D8"/>
-                </a:solidFill>
-                <a:latin typeface="Arial"/>
-                <a:ea typeface="Arial"/>
-                <a:cs typeface="Arial"/>
-                <a:sym typeface="Arial"/>
-              </a:rPr>
-              <a:t>Context Length / Output Length</a:t>
             </a:r>
             <a:endParaRPr sz="1500" b="1" i="0" u="none" strike="noStrike" cap="none">
               <a:solidFill>
                 <a:srgbClr val="3C78D8"/>
               </a:solidFill>
-              <a:latin typeface="Arial"/>
-              <a:ea typeface="Arial"/>
-              <a:cs typeface="Arial"/>
-              <a:sym typeface="Arial"/>
+              <a:latin typeface="Calibri"/>
+              <a:ea typeface="Calibri"/>
+              <a:cs typeface="Calibri"/>
+              <a:sym typeface="Calibri"/>
             </a:endParaRPr>
           </a:p>
           <a:p>
@@ -11812,7 +11745,7 @@
                 <a:srgbClr val="3C78D8"/>
               </a:buClr>
               <a:buSzPts val="1500"/>
-              <a:buFont typeface="Arial"/>
+              <a:buFont typeface="Calibri"/>
               <a:buChar char="●"/>
             </a:pPr>
             <a:r>
@@ -11820,21 +11753,21 @@
                 <a:solidFill>
                   <a:srgbClr val="3C78D8"/>
                 </a:solidFill>
-                <a:latin typeface="Arial"/>
-                <a:ea typeface="Arial"/>
-                <a:cs typeface="Arial"/>
-                <a:sym typeface="Arial"/>
-              </a:rPr>
-              <a:t>Open Interpreter 01 Light</a:t>
+                <a:latin typeface="Calibri"/>
+                <a:ea typeface="Calibri"/>
+                <a:cs typeface="Calibri"/>
+                <a:sym typeface="Calibri"/>
+              </a:rPr>
+              <a:t>Simba from Microsoft</a:t>
             </a:r>
             <a:endParaRPr sz="1500" b="1" i="0" u="none" strike="noStrike" cap="none">
               <a:solidFill>
                 <a:srgbClr val="3C78D8"/>
               </a:solidFill>
-              <a:latin typeface="Arial"/>
-              <a:ea typeface="Arial"/>
-              <a:cs typeface="Arial"/>
-              <a:sym typeface="Arial"/>
+              <a:latin typeface="Calibri"/>
+              <a:ea typeface="Calibri"/>
+              <a:cs typeface="Calibri"/>
+              <a:sym typeface="Calibri"/>
             </a:endParaRPr>
           </a:p>
           <a:p>
@@ -11852,7 +11785,7 @@
                 <a:srgbClr val="3C78D8"/>
               </a:buClr>
               <a:buSzPts val="1500"/>
-              <a:buFont typeface="Arial"/>
+              <a:buFont typeface="Calibri"/>
               <a:buChar char="●"/>
             </a:pPr>
             <a:r>
@@ -11860,21 +11793,21 @@
                 <a:solidFill>
                   <a:srgbClr val="3C78D8"/>
                 </a:solidFill>
-                <a:latin typeface="Arial"/>
-                <a:ea typeface="Arial"/>
-                <a:cs typeface="Arial"/>
-                <a:sym typeface="Arial"/>
-              </a:rPr>
-              <a:t>OpenAI Sora and Hollywood</a:t>
+                <a:latin typeface="Calibri"/>
+                <a:ea typeface="Calibri"/>
+                <a:cs typeface="Calibri"/>
+                <a:sym typeface="Calibri"/>
+              </a:rPr>
+              <a:t>Context Length / Output Length</a:t>
             </a:r>
             <a:endParaRPr sz="1500" b="1" i="0" u="none" strike="noStrike" cap="none">
               <a:solidFill>
                 <a:srgbClr val="3C78D8"/>
               </a:solidFill>
-              <a:latin typeface="Arial"/>
-              <a:ea typeface="Arial"/>
-              <a:cs typeface="Arial"/>
-              <a:sym typeface="Arial"/>
+              <a:latin typeface="Calibri"/>
+              <a:ea typeface="Calibri"/>
+              <a:cs typeface="Calibri"/>
+              <a:sym typeface="Calibri"/>
             </a:endParaRPr>
           </a:p>
           <a:p>
@@ -11892,7 +11825,7 @@
                 <a:srgbClr val="3C78D8"/>
               </a:buClr>
               <a:buSzPts val="1500"/>
-              <a:buFont typeface="Arial"/>
+              <a:buFont typeface="Calibri"/>
               <a:buChar char="●"/>
             </a:pPr>
             <a:r>
@@ -11900,21 +11833,21 @@
                 <a:solidFill>
                   <a:srgbClr val="3C78D8"/>
                 </a:solidFill>
-                <a:latin typeface="Arial"/>
-                <a:ea typeface="Arial"/>
-                <a:cs typeface="Arial"/>
-                <a:sym typeface="Arial"/>
-              </a:rPr>
-              <a:t>Elon Musk - AGI in 1-2-3 years</a:t>
+                <a:latin typeface="Calibri"/>
+                <a:ea typeface="Calibri"/>
+                <a:cs typeface="Calibri"/>
+                <a:sym typeface="Calibri"/>
+              </a:rPr>
+              <a:t>Open Interpreter 01 Light</a:t>
             </a:r>
             <a:endParaRPr sz="1500" b="1" i="0" u="none" strike="noStrike" cap="none">
               <a:solidFill>
                 <a:srgbClr val="3C78D8"/>
               </a:solidFill>
-              <a:latin typeface="Arial"/>
-              <a:ea typeface="Arial"/>
-              <a:cs typeface="Arial"/>
-              <a:sym typeface="Arial"/>
+              <a:latin typeface="Calibri"/>
+              <a:ea typeface="Calibri"/>
+              <a:cs typeface="Calibri"/>
+              <a:sym typeface="Calibri"/>
             </a:endParaRPr>
           </a:p>
           <a:p>
@@ -11932,60 +11865,29 @@
                 <a:srgbClr val="3C78D8"/>
               </a:buClr>
               <a:buSzPts val="1500"/>
+              <a:buFont typeface="Calibri"/>
               <a:buChar char="●"/>
             </a:pPr>
             <a:r>
-              <a:rPr lang="en" sz="1500" b="1">
+              <a:rPr lang="en" sz="1500" b="1" i="0" u="none" strike="noStrike" cap="none">
                 <a:solidFill>
                   <a:srgbClr val="3C78D8"/>
                 </a:solidFill>
-              </a:rPr>
-              <a:t>h2o-wizardlm - turn docs into Q:A pairs</a:t>
-            </a:r>
-            <a:endParaRPr sz="1500" b="1">
-              <a:solidFill>
-                <a:srgbClr val="3C78D8"/>
-              </a:solidFill>
-            </a:endParaRPr>
-          </a:p>
-          <a:p>
-            <a:pPr marL="228600" marR="0" lvl="0" indent="-209550" algn="l" rtl="0">
-              <a:lnSpc>
-                <a:spcPct val="100000"/>
-              </a:lnSpc>
-              <a:spcBef>
-                <a:spcPts val="0"/>
-              </a:spcBef>
-              <a:spcAft>
-                <a:spcPts val="0"/>
-              </a:spcAft>
-              <a:buClr>
-                <a:srgbClr val="3C78D8"/>
-              </a:buClr>
-              <a:buSzPts val="1500"/>
-              <a:buFont typeface="Arial"/>
-              <a:buChar char="●"/>
-            </a:pPr>
-            <a:r>
-              <a:rPr lang="en" sz="1500" b="1" i="0" u="none" strike="noStrike" cap="none">
-                <a:solidFill>
-                  <a:srgbClr val="3C78D8"/>
-                </a:solidFill>
-                <a:latin typeface="Arial"/>
-                <a:ea typeface="Arial"/>
-                <a:cs typeface="Arial"/>
-                <a:sym typeface="Arial"/>
-              </a:rPr>
-              <a:t>Microchips are the new oil</a:t>
+                <a:latin typeface="Calibri"/>
+                <a:ea typeface="Calibri"/>
+                <a:cs typeface="Calibri"/>
+                <a:sym typeface="Calibri"/>
+              </a:rPr>
+              <a:t>OpenAI Sora and Hollywood</a:t>
             </a:r>
             <a:endParaRPr sz="1500" b="1" i="0" u="none" strike="noStrike" cap="none">
               <a:solidFill>
                 <a:srgbClr val="3C78D8"/>
               </a:solidFill>
-              <a:latin typeface="Arial"/>
-              <a:ea typeface="Arial"/>
-              <a:cs typeface="Arial"/>
-              <a:sym typeface="Arial"/>
+              <a:latin typeface="Calibri"/>
+              <a:ea typeface="Calibri"/>
+              <a:cs typeface="Calibri"/>
+              <a:sym typeface="Calibri"/>
             </a:endParaRPr>
           </a:p>
           <a:p>
@@ -12003,7 +11905,7 @@
                 <a:srgbClr val="3C78D8"/>
               </a:buClr>
               <a:buSzPts val="1500"/>
-              <a:buFont typeface="Arial"/>
+              <a:buFont typeface="Calibri"/>
               <a:buChar char="●"/>
             </a:pPr>
             <a:r>
@@ -12011,21 +11913,61 @@
                 <a:solidFill>
                   <a:srgbClr val="3C78D8"/>
                 </a:solidFill>
-                <a:latin typeface="Arial"/>
-                <a:ea typeface="Arial"/>
-                <a:cs typeface="Arial"/>
-                <a:sym typeface="Arial"/>
-              </a:rPr>
-              <a:t>How Google let OpenAI take the lead?</a:t>
+                <a:latin typeface="Calibri"/>
+                <a:ea typeface="Calibri"/>
+                <a:cs typeface="Calibri"/>
+                <a:sym typeface="Calibri"/>
+              </a:rPr>
+              <a:t>Elon Musk - AGI in 1-2-3 years</a:t>
             </a:r>
             <a:endParaRPr sz="1500" b="1" i="0" u="none" strike="noStrike" cap="none">
               <a:solidFill>
                 <a:srgbClr val="3C78D8"/>
               </a:solidFill>
-              <a:latin typeface="Arial"/>
-              <a:ea typeface="Arial"/>
-              <a:cs typeface="Arial"/>
-              <a:sym typeface="Arial"/>
+              <a:latin typeface="Calibri"/>
+              <a:ea typeface="Calibri"/>
+              <a:cs typeface="Calibri"/>
+              <a:sym typeface="Calibri"/>
+            </a:endParaRPr>
+          </a:p>
+          <a:p>
+            <a:pPr marL="228600" marR="0" lvl="0" indent="-209550" algn="l" rtl="0">
+              <a:lnSpc>
+                <a:spcPct val="100000"/>
+              </a:lnSpc>
+              <a:spcBef>
+                <a:spcPts val="0"/>
+              </a:spcBef>
+              <a:spcAft>
+                <a:spcPts val="0"/>
+              </a:spcAft>
+              <a:buClr>
+                <a:srgbClr val="3C78D8"/>
+              </a:buClr>
+              <a:buSzPts val="1500"/>
+              <a:buFont typeface="Calibri"/>
+              <a:buChar char="●"/>
+            </a:pPr>
+            <a:r>
+              <a:rPr lang="en" sz="1500" b="1" i="0" u="none" strike="noStrike" cap="none">
+                <a:solidFill>
+                  <a:srgbClr val="3C78D8"/>
+                </a:solidFill>
+                <a:latin typeface="Calibri"/>
+                <a:ea typeface="Calibri"/>
+                <a:cs typeface="Calibri"/>
+                <a:sym typeface="Calibri"/>
+              </a:rPr>
+              <a:t>h2o-wizardlm - turn docs into Q:A pairs</a:t>
+            </a:r>
+            <a:endParaRPr sz="1500" b="1" i="0" u="none" strike="noStrike" cap="none">
+              <a:solidFill>
+                <a:srgbClr val="3C78D8"/>
+              </a:solidFill>
+              <a:latin typeface="Calibri"/>
+              <a:ea typeface="Calibri"/>
+              <a:cs typeface="Calibri"/>
+              <a:sym typeface="Calibri"/>
             </a:endParaRPr>
           </a:p>
         </p:txBody>
@@ -12038,8 +11980,8 @@
         </p:nvSpPr>
         <p:spPr>
           <a:xfrm>
-            <a:off x="4627375" y="1127825"/>
-            <a:ext cx="4420200" cy="2262600"/>
+            <a:off x="4644025" y="2123225"/>
+            <a:ext cx="4420200" cy="2724300"/>
           </a:xfrm>
           <a:prstGeom prst="rect">
             <a:avLst/>
@@ -12075,7 +12017,7 @@
                 <a:srgbClr val="3C78D8"/>
               </a:buClr>
               <a:buSzPts val="1500"/>
-              <a:buFont typeface="Arial"/>
+              <a:buFont typeface="Calibri"/>
               <a:buChar char="●"/>
             </a:pPr>
             <a:r>
@@ -12083,13 +12025,21 @@
                 <a:solidFill>
                   <a:srgbClr val="3C78D8"/>
                 </a:solidFill>
-              </a:rPr>
-              <a:t>Simple RAG on AWS</a:t>
+                <a:latin typeface="Calibri"/>
+                <a:ea typeface="Calibri"/>
+                <a:cs typeface="Calibri"/>
+                <a:sym typeface="Calibri"/>
+              </a:rPr>
+              <a:t>Microchips are the new oil</a:t>
             </a:r>
             <a:endParaRPr sz="1500" b="1">
               <a:solidFill>
                 <a:srgbClr val="3C78D8"/>
               </a:solidFill>
+              <a:latin typeface="Calibri"/>
+              <a:ea typeface="Calibri"/>
+              <a:cs typeface="Calibri"/>
+              <a:sym typeface="Calibri"/>
             </a:endParaRPr>
           </a:p>
           <a:p>
@@ -12107,7 +12057,7 @@
                 <a:srgbClr val="3C78D8"/>
               </a:buClr>
               <a:buSzPts val="1500"/>
-              <a:buFont typeface="Arial"/>
+              <a:buFont typeface="Calibri"/>
               <a:buChar char="●"/>
             </a:pPr>
             <a:r>
@@ -12115,13 +12065,21 @@
                 <a:solidFill>
                   <a:srgbClr val="3C78D8"/>
                 </a:solidFill>
-              </a:rPr>
-              <a:t>Multi-Agent RAG Systems</a:t>
+                <a:latin typeface="Calibri"/>
+                <a:ea typeface="Calibri"/>
+                <a:cs typeface="Calibri"/>
+                <a:sym typeface="Calibri"/>
+              </a:rPr>
+              <a:t>How Google let OpenAI take the lead?</a:t>
             </a:r>
             <a:endParaRPr sz="1500" b="1">
               <a:solidFill>
                 <a:srgbClr val="3C78D8"/>
               </a:solidFill>
+              <a:latin typeface="Calibri"/>
+              <a:ea typeface="Calibri"/>
+              <a:cs typeface="Calibri"/>
+              <a:sym typeface="Calibri"/>
             </a:endParaRPr>
           </a:p>
           <a:p>
@@ -12139,61 +12097,29 @@
                 <a:srgbClr val="3C78D8"/>
               </a:buClr>
               <a:buSzPts val="1500"/>
-              <a:buFont typeface="Arial"/>
+              <a:buFont typeface="Calibri"/>
               <a:buChar char="●"/>
             </a:pPr>
             <a:r>
-              <a:rPr lang="en" sz="1500" b="1">
+              <a:rPr lang="en" sz="1500" b="1" i="0" u="none" strike="noStrike" cap="none">
                 <a:solidFill>
                   <a:srgbClr val="3C78D8"/>
                 </a:solidFill>
-              </a:rPr>
-              <a:t>RAG - Evaluate and Improve</a:t>
-            </a:r>
-            <a:endParaRPr sz="1500" b="1">
-              <a:solidFill>
-                <a:srgbClr val="3C78D8"/>
-              </a:solidFill>
-            </a:endParaRPr>
-          </a:p>
-          <a:p>
-            <a:pPr marL="228600" marR="0" lvl="0" indent="-209550" algn="l" rtl="0">
-              <a:lnSpc>
-                <a:spcPct val="100000"/>
-              </a:lnSpc>
-              <a:spcBef>
-                <a:spcPts val="0"/>
-              </a:spcBef>
-              <a:spcAft>
-                <a:spcPts val="0"/>
-              </a:spcAft>
-              <a:buClr>
-                <a:srgbClr val="3C78D8"/>
-              </a:buClr>
-              <a:buSzPts val="1500"/>
-              <a:buFont typeface="Arial"/>
-              <a:buChar char="●"/>
-            </a:pPr>
-            <a:r>
-              <a:rPr lang="en" sz="1500" b="1" i="0" u="none" strike="noStrike" cap="none">
-                <a:solidFill>
-                  <a:srgbClr val="3C78D8"/>
-                </a:solidFill>
-                <a:latin typeface="Arial"/>
-                <a:ea typeface="Arial"/>
-                <a:cs typeface="Arial"/>
-                <a:sym typeface="Arial"/>
-              </a:rPr>
-              <a:t>RAG - Advanced</a:t>
+                <a:latin typeface="Calibri"/>
+                <a:ea typeface="Calibri"/>
+                <a:cs typeface="Calibri"/>
+                <a:sym typeface="Calibri"/>
+              </a:rPr>
+              <a:t>Simple RAG on AWS</a:t>
             </a:r>
             <a:endParaRPr sz="1500" b="1" i="0" u="none" strike="noStrike" cap="none">
               <a:solidFill>
                 <a:srgbClr val="3C78D8"/>
               </a:solidFill>
-              <a:latin typeface="Arial"/>
-              <a:ea typeface="Arial"/>
-              <a:cs typeface="Arial"/>
-              <a:sym typeface="Arial"/>
+              <a:latin typeface="Calibri"/>
+              <a:ea typeface="Calibri"/>
+              <a:cs typeface="Calibri"/>
+              <a:sym typeface="Calibri"/>
             </a:endParaRPr>
           </a:p>
           <a:p>
@@ -12211,7 +12137,7 @@
                 <a:srgbClr val="3C78D8"/>
               </a:buClr>
               <a:buSzPts val="1500"/>
-              <a:buFont typeface="Arial"/>
+              <a:buFont typeface="Calibri"/>
               <a:buChar char="●"/>
             </a:pPr>
             <a:r>
@@ -12219,21 +12145,21 @@
                 <a:solidFill>
                   <a:srgbClr val="3C78D8"/>
                 </a:solidFill>
-                <a:latin typeface="Arial"/>
-                <a:ea typeface="Arial"/>
-                <a:cs typeface="Arial"/>
-                <a:sym typeface="Arial"/>
-              </a:rPr>
-              <a:t>RAG - activeloop.ai, Deep Lake</a:t>
+                <a:latin typeface="Calibri"/>
+                <a:ea typeface="Calibri"/>
+                <a:cs typeface="Calibri"/>
+                <a:sym typeface="Calibri"/>
+              </a:rPr>
+              <a:t>Multi-Agent RAG Systems</a:t>
             </a:r>
             <a:endParaRPr sz="1500" b="1" i="0" u="none" strike="noStrike" cap="none">
               <a:solidFill>
                 <a:srgbClr val="3C78D8"/>
               </a:solidFill>
-              <a:latin typeface="Arial"/>
-              <a:ea typeface="Arial"/>
-              <a:cs typeface="Arial"/>
-              <a:sym typeface="Arial"/>
+              <a:latin typeface="Calibri"/>
+              <a:ea typeface="Calibri"/>
+              <a:cs typeface="Calibri"/>
+              <a:sym typeface="Calibri"/>
             </a:endParaRPr>
           </a:p>
           <a:p>
@@ -12251,7 +12177,7 @@
                 <a:srgbClr val="3C78D8"/>
               </a:buClr>
               <a:buSzPts val="1500"/>
-              <a:buFont typeface="Arial"/>
+              <a:buFont typeface="Calibri"/>
               <a:buChar char="●"/>
             </a:pPr>
             <a:r>
@@ -12259,21 +12185,21 @@
                 <a:solidFill>
                   <a:srgbClr val="3C78D8"/>
                 </a:solidFill>
-                <a:latin typeface="Arial"/>
-                <a:ea typeface="Arial"/>
-                <a:cs typeface="Arial"/>
-                <a:sym typeface="Arial"/>
-              </a:rPr>
-              <a:t>GraphRAG</a:t>
+                <a:latin typeface="Calibri"/>
+                <a:ea typeface="Calibri"/>
+                <a:cs typeface="Calibri"/>
+                <a:sym typeface="Calibri"/>
+              </a:rPr>
+              <a:t>RAG - Evaluate and Improve</a:t>
             </a:r>
             <a:endParaRPr sz="1500" b="1" i="0" u="none" strike="noStrike" cap="none">
               <a:solidFill>
                 <a:srgbClr val="3C78D8"/>
               </a:solidFill>
-              <a:latin typeface="Arial"/>
-              <a:ea typeface="Arial"/>
-              <a:cs typeface="Arial"/>
-              <a:sym typeface="Arial"/>
+              <a:latin typeface="Calibri"/>
+              <a:ea typeface="Calibri"/>
+              <a:cs typeface="Calibri"/>
+              <a:sym typeface="Calibri"/>
             </a:endParaRPr>
           </a:p>
           <a:p>
@@ -12291,7 +12217,7 @@
                 <a:srgbClr val="3C78D8"/>
               </a:buClr>
               <a:buSzPts val="1500"/>
-              <a:buFont typeface="Arial"/>
+              <a:buFont typeface="Calibri"/>
               <a:buChar char="●"/>
             </a:pPr>
             <a:r>
@@ -12299,57 +12225,21 @@
                 <a:solidFill>
                   <a:srgbClr val="3C78D8"/>
                 </a:solidFill>
-                <a:latin typeface="Arial"/>
-                <a:ea typeface="Arial"/>
-                <a:cs typeface="Arial"/>
-                <a:sym typeface="Arial"/>
-              </a:rPr>
-              <a:t>Quantize to 1-2 bit</a:t>
-            </a:r>
-            <a:endParaRPr sz="1500" b="1">
-              <a:solidFill>
-                <a:srgbClr val="3C78D8"/>
-              </a:solidFill>
-            </a:endParaRPr>
-          </a:p>
-          <a:p>
-            <a:pPr marL="228600" marR="0" lvl="0" indent="-209550" algn="l" rtl="0">
-              <a:lnSpc>
-                <a:spcPct val="100000"/>
-              </a:lnSpc>
-              <a:spcBef>
-                <a:spcPts val="0"/>
-              </a:spcBef>
-              <a:spcAft>
-                <a:spcPts val="0"/>
-              </a:spcAft>
-              <a:buClr>
-                <a:srgbClr val="3C78D8"/>
-              </a:buClr>
-              <a:buSzPts val="1500"/>
-              <a:buFont typeface="Arial"/>
-              <a:buChar char="●"/>
-            </a:pPr>
-            <a:r>
-              <a:rPr lang="en" sz="1500" b="1" i="0" u="none" strike="noStrike" cap="none">
-                <a:solidFill>
-                  <a:srgbClr val="3C78D8"/>
-                </a:solidFill>
-                <a:latin typeface="Arial"/>
-                <a:ea typeface="Arial"/>
-                <a:cs typeface="Arial"/>
-                <a:sym typeface="Arial"/>
-              </a:rPr>
-              <a:t>Crowd-sourced "Arena" Leaderboard</a:t>
+                <a:latin typeface="Calibri"/>
+                <a:ea typeface="Calibri"/>
+                <a:cs typeface="Calibri"/>
+                <a:sym typeface="Calibri"/>
+              </a:rPr>
+              <a:t>RAG - Advanced</a:t>
             </a:r>
             <a:endParaRPr sz="1500" b="1" i="0" u="none" strike="noStrike" cap="none">
               <a:solidFill>
                 <a:srgbClr val="3C78D8"/>
               </a:solidFill>
-              <a:latin typeface="Arial"/>
-              <a:ea typeface="Arial"/>
-              <a:cs typeface="Arial"/>
-              <a:sym typeface="Arial"/>
+              <a:latin typeface="Calibri"/>
+              <a:ea typeface="Calibri"/>
+              <a:cs typeface="Calibri"/>
+              <a:sym typeface="Calibri"/>
             </a:endParaRPr>
           </a:p>
           <a:p>
@@ -12367,7 +12257,7 @@
                 <a:srgbClr val="3C78D8"/>
               </a:buClr>
               <a:buSzPts val="1500"/>
-              <a:buFont typeface="Arial"/>
+              <a:buFont typeface="Calibri"/>
               <a:buChar char="●"/>
             </a:pPr>
             <a:r>
@@ -12375,21 +12265,181 @@
                 <a:solidFill>
                   <a:srgbClr val="3C78D8"/>
                 </a:solidFill>
-                <a:latin typeface="Arial"/>
-                <a:ea typeface="Arial"/>
-                <a:cs typeface="Arial"/>
-                <a:sym typeface="Arial"/>
-              </a:rPr>
-              <a:t>Tech Layoffs is lower this year</a:t>
+                <a:latin typeface="Calibri"/>
+                <a:ea typeface="Calibri"/>
+                <a:cs typeface="Calibri"/>
+                <a:sym typeface="Calibri"/>
+              </a:rPr>
+              <a:t>RAG - activeloop.ai, Deep Lake</a:t>
             </a:r>
             <a:endParaRPr sz="1500" b="1" i="0" u="none" strike="noStrike" cap="none">
               <a:solidFill>
                 <a:srgbClr val="3C78D8"/>
               </a:solidFill>
-              <a:latin typeface="Arial"/>
-              <a:ea typeface="Arial"/>
-              <a:cs typeface="Arial"/>
-              <a:sym typeface="Arial"/>
+              <a:latin typeface="Calibri"/>
+              <a:ea typeface="Calibri"/>
+              <a:cs typeface="Calibri"/>
+              <a:sym typeface="Calibri"/>
+            </a:endParaRPr>
+          </a:p>
+          <a:p>
+            <a:pPr marL="228600" marR="0" lvl="0" indent="-209550" algn="l" rtl="0">
+              <a:lnSpc>
+                <a:spcPct val="100000"/>
+              </a:lnSpc>
+              <a:spcBef>
+                <a:spcPts val="0"/>
+              </a:spcBef>
+              <a:spcAft>
+                <a:spcPts val="0"/>
+              </a:spcAft>
+              <a:buClr>
+                <a:srgbClr val="3C78D8"/>
+              </a:buClr>
+              <a:buSzPts val="1500"/>
+              <a:buFont typeface="Calibri"/>
+              <a:buChar char="●"/>
+            </a:pPr>
+            <a:r>
+              <a:rPr lang="en" sz="1500" b="1" i="0" u="none" strike="noStrike" cap="none">
+                <a:solidFill>
+                  <a:srgbClr val="3C78D8"/>
+                </a:solidFill>
+                <a:latin typeface="Calibri"/>
+                <a:ea typeface="Calibri"/>
+                <a:cs typeface="Calibri"/>
+                <a:sym typeface="Calibri"/>
+              </a:rPr>
+              <a:t>GraphRAG</a:t>
+            </a:r>
+            <a:endParaRPr sz="1500" b="1" i="0" u="none" strike="noStrike" cap="none">
+              <a:solidFill>
+                <a:srgbClr val="3C78D8"/>
+              </a:solidFill>
+              <a:latin typeface="Calibri"/>
+              <a:ea typeface="Calibri"/>
+              <a:cs typeface="Calibri"/>
+              <a:sym typeface="Calibri"/>
+            </a:endParaRPr>
+          </a:p>
+          <a:p>
+            <a:pPr marL="228600" marR="0" lvl="0" indent="-209550" algn="l" rtl="0">
+              <a:lnSpc>
+                <a:spcPct val="100000"/>
+              </a:lnSpc>
+              <a:spcBef>
+                <a:spcPts val="0"/>
+              </a:spcBef>
+              <a:spcAft>
+                <a:spcPts val="0"/>
+              </a:spcAft>
+              <a:buClr>
+                <a:srgbClr val="3C78D8"/>
+              </a:buClr>
+              <a:buSzPts val="1500"/>
+              <a:buFont typeface="Calibri"/>
+              <a:buChar char="●"/>
+            </a:pPr>
+            <a:r>
+              <a:rPr lang="en" sz="1500" b="1" i="0" u="none" strike="noStrike" cap="none">
+                <a:solidFill>
+                  <a:srgbClr val="3C78D8"/>
+                </a:solidFill>
+                <a:latin typeface="Calibri"/>
+                <a:ea typeface="Calibri"/>
+                <a:cs typeface="Calibri"/>
+                <a:sym typeface="Calibri"/>
+              </a:rPr>
+              <a:t>Quantize to 1-2 bit</a:t>
+            </a:r>
+            <a:endParaRPr sz="1500" b="1" i="0" u="none" strike="noStrike" cap="none">
+              <a:solidFill>
+                <a:srgbClr val="3C78D8"/>
+              </a:solidFill>
+              <a:latin typeface="Calibri"/>
+              <a:ea typeface="Calibri"/>
+              <a:cs typeface="Calibri"/>
+              <a:sym typeface="Calibri"/>
+            </a:endParaRPr>
+          </a:p>
+          <a:p>
+            <a:pPr marL="228600" marR="0" lvl="0" indent="-209550" algn="l" rtl="0">
+              <a:lnSpc>
+                <a:spcPct val="100000"/>
+              </a:lnSpc>
+              <a:spcBef>
+                <a:spcPts val="0"/>
+              </a:spcBef>
+              <a:spcAft>
+                <a:spcPts val="0"/>
+              </a:spcAft>
+              <a:buClr>
+                <a:srgbClr val="3C78D8"/>
+              </a:buClr>
+              <a:buSzPts val="1500"/>
+              <a:buFont typeface="Calibri"/>
+              <a:buChar char="●"/>
+            </a:pPr>
+            <a:r>
+              <a:rPr lang="en" sz="1500" b="1" i="0" u="none" strike="noStrike" cap="none">
+                <a:solidFill>
+                  <a:srgbClr val="3C78D8"/>
+                </a:solidFill>
+                <a:latin typeface="Calibri"/>
+                <a:ea typeface="Calibri"/>
+                <a:cs typeface="Calibri"/>
+                <a:sym typeface="Calibri"/>
+              </a:rPr>
+              <a:t>Crowd-sourced "Arena" Leaderboard</a:t>
+            </a:r>
+            <a:endParaRPr sz="1500" b="1" i="0" u="none" strike="noStrike" cap="none">
+              <a:solidFill>
+                <a:srgbClr val="3C78D8"/>
+              </a:solidFill>
+              <a:latin typeface="Calibri"/>
+              <a:ea typeface="Calibri"/>
+              <a:cs typeface="Calibri"/>
+              <a:sym typeface="Calibri"/>
+            </a:endParaRPr>
+          </a:p>
+          <a:p>
+            <a:pPr marL="228600" marR="0" lvl="0" indent="-209550" algn="l" rtl="0">
+              <a:lnSpc>
+                <a:spcPct val="100000"/>
+              </a:lnSpc>
+              <a:spcBef>
+                <a:spcPts val="0"/>
+              </a:spcBef>
+              <a:spcAft>
+                <a:spcPts val="0"/>
+              </a:spcAft>
+              <a:buClr>
+                <a:srgbClr val="3C78D8"/>
+              </a:buClr>
+              <a:buSzPts val="1500"/>
+              <a:buFont typeface="Calibri"/>
+              <a:buChar char="●"/>
+            </a:pPr>
+            <a:r>
+              <a:rPr lang="en" sz="1500" b="1" i="0" u="none" strike="noStrike" cap="none">
+                <a:solidFill>
+                  <a:srgbClr val="3C78D8"/>
+                </a:solidFill>
+                <a:latin typeface="Calibri"/>
+                <a:ea typeface="Calibri"/>
+                <a:cs typeface="Calibri"/>
+                <a:sym typeface="Calibri"/>
+              </a:rPr>
+              <a:t>Tech Layoffs is lower this year</a:t>
+            </a:r>
+            <a:endParaRPr sz="1500" b="1" i="0" u="none" strike="noStrike" cap="none">
+              <a:solidFill>
+                <a:srgbClr val="3C78D8"/>
+              </a:solidFill>
+              <a:latin typeface="Calibri"/>
+              <a:ea typeface="Calibri"/>
+              <a:cs typeface="Calibri"/>
+              <a:sym typeface="Calibri"/>
             </a:endParaRPr>
           </a:p>
         </p:txBody>
@@ -12402,7 +12452,7 @@
         </p:nvSpPr>
         <p:spPr>
           <a:xfrm>
-            <a:off x="3027550" y="75775"/>
+            <a:off x="412600" y="175700"/>
             <a:ext cx="3192600" cy="942000"/>
           </a:xfrm>
           <a:prstGeom prst="rect">
@@ -12441,10 +12491,10 @@
                 <a:solidFill>
                   <a:srgbClr val="3C78D8"/>
                 </a:solidFill>
-                <a:latin typeface="Arial"/>
-                <a:ea typeface="Arial"/>
-                <a:cs typeface="Arial"/>
-                <a:sym typeface="Arial"/>
+                <a:latin typeface="Calibri"/>
+                <a:ea typeface="Calibri"/>
+                <a:cs typeface="Calibri"/>
+                <a:sym typeface="Calibri"/>
               </a:rPr>
               <a:t>AI Updates </a:t>
             </a:r>
@@ -12452,10 +12502,10 @@
               <a:solidFill>
                 <a:srgbClr val="3C78D8"/>
               </a:solidFill>
-              <a:latin typeface="Arial"/>
-              <a:ea typeface="Arial"/>
-              <a:cs typeface="Arial"/>
-              <a:sym typeface="Arial"/>
+              <a:latin typeface="Calibri"/>
+              <a:ea typeface="Calibri"/>
+              <a:cs typeface="Calibri"/>
+              <a:sym typeface="Calibri"/>
             </a:endParaRPr>
           </a:p>
           <a:p>
@@ -12481,10 +12531,10 @@
                 <a:solidFill>
                   <a:srgbClr val="3C78D8"/>
                 </a:solidFill>
-                <a:latin typeface="Arial"/>
-                <a:ea typeface="Arial"/>
-                <a:cs typeface="Arial"/>
-                <a:sym typeface="Arial"/>
+                <a:latin typeface="Calibri"/>
+                <a:ea typeface="Calibri"/>
+                <a:cs typeface="Calibri"/>
+                <a:sym typeface="Calibri"/>
               </a:rPr>
               <a:t>March 29, 2024</a:t>
             </a:r>
@@ -12492,10 +12542,149 @@
               <a:solidFill>
                 <a:srgbClr val="3C78D8"/>
               </a:solidFill>
-              <a:latin typeface="Arial"/>
-              <a:ea typeface="Arial"/>
-              <a:cs typeface="Arial"/>
-              <a:sym typeface="Arial"/>
+              <a:latin typeface="Calibri"/>
+              <a:ea typeface="Calibri"/>
+              <a:cs typeface="Calibri"/>
+              <a:sym typeface="Calibri"/>
+            </a:endParaRPr>
+          </a:p>
+        </p:txBody>
+      </p:sp>
+      <p:pic>
+        <p:nvPicPr>
+          <p:cNvPr id="57" name="Google Shape;57;p13"/>
+          <p:cNvPicPr preferRelativeResize="0"/>
+          <p:nvPr/>
+        </p:nvPicPr>
+        <p:blipFill>
+          <a:blip r:embed="rId3" cstate="email">
+            <a:alphaModFix/>
+            <a:extLst>
+              <a:ext uri="{28A0092B-C50C-407E-A947-70E740481C1C}">
+                <a14:useLocalDpi xmlns:a14="http://schemas.microsoft.com/office/drawing/2010/main"/>
+              </a:ext>
+            </a:extLst>
+          </a:blip>
+          <a:stretch>
+            <a:fillRect/>
+          </a:stretch>
+        </p:blipFill>
+        <p:spPr>
+          <a:xfrm>
+            <a:off x="5871625" y="99500"/>
+            <a:ext cx="3192600" cy="1343558"/>
+          </a:xfrm>
+          <a:prstGeom prst="rect">
+            <a:avLst/>
+          </a:prstGeom>
+          <a:noFill/>
+          <a:ln>
+            <a:noFill/>
+          </a:ln>
+        </p:spPr>
+      </p:pic>
+      <p:sp>
+        <p:nvSpPr>
+          <p:cNvPr id="58" name="Google Shape;58;p13"/>
+          <p:cNvSpPr txBox="1"/>
+          <p:nvPr/>
+        </p:nvSpPr>
+        <p:spPr>
+          <a:xfrm>
+            <a:off x="5871625" y="1450750"/>
+            <a:ext cx="3192600" cy="449400"/>
+          </a:xfrm>
+          <a:prstGeom prst="rect">
+            <a:avLst/>
+          </a:prstGeom>
+          <a:noFill/>
+          <a:ln>
+            <a:noFill/>
+          </a:ln>
+        </p:spPr>
+        <p:txBody>
+          <a:bodyPr spcFirstLastPara="1" wrap="square" lIns="9125" tIns="9125" rIns="9125" bIns="9125" anchor="t" anchorCtr="0">
+            <a:spAutoFit/>
+          </a:bodyPr>
+          <a:lstStyle/>
+          <a:p>
+            <a:pPr marL="0" marR="0" lvl="0" indent="0" algn="ctr" rtl="0">
+              <a:lnSpc>
+                <a:spcPct val="100000"/>
+              </a:lnSpc>
+              <a:spcBef>
+                <a:spcPts val="0"/>
+              </a:spcBef>
+              <a:spcAft>
+                <a:spcPts val="0"/>
+              </a:spcAft>
+              <a:buClr>
+                <a:srgbClr val="000000"/>
+              </a:buClr>
+              <a:buSzPts val="2400"/>
+              <a:buFont typeface="Arial"/>
+              <a:buNone/>
+            </a:pPr>
+            <a:r>
+              <a:rPr lang="en" b="1">
+                <a:solidFill>
+                  <a:srgbClr val="6AA84F"/>
+                </a:solidFill>
+                <a:latin typeface="Calibri"/>
+                <a:ea typeface="Calibri"/>
+                <a:cs typeface="Calibri"/>
+                <a:sym typeface="Calibri"/>
+              </a:rPr>
+              <a:t>Today we celebrate and enjoy </a:t>
+            </a:r>
+            <a:endParaRPr b="1">
+              <a:solidFill>
+                <a:srgbClr val="6AA84F"/>
+              </a:solidFill>
+              <a:latin typeface="Calibri"/>
+              <a:ea typeface="Calibri"/>
+              <a:cs typeface="Calibri"/>
+              <a:sym typeface="Calibri"/>
+            </a:endParaRPr>
+          </a:p>
+          <a:p>
+            <a:pPr marL="0" marR="0" lvl="0" indent="0" algn="ctr" rtl="0">
+              <a:lnSpc>
+                <a:spcPct val="100000"/>
+              </a:lnSpc>
+              <a:spcBef>
+                <a:spcPts val="0"/>
+              </a:spcBef>
+              <a:spcAft>
+                <a:spcPts val="0"/>
+              </a:spcAft>
+              <a:buClr>
+                <a:srgbClr val="000000"/>
+              </a:buClr>
+              <a:buSzPts val="2400"/>
+              <a:buFont typeface="Arial"/>
+              <a:buNone/>
+            </a:pPr>
+            <a:r>
+              <a:rPr lang="en" b="1">
+                <a:solidFill>
+                  <a:srgbClr val="6AA84F"/>
+                </a:solidFill>
+                <a:latin typeface="Calibri"/>
+                <a:ea typeface="Calibri"/>
+                <a:cs typeface="Calibri"/>
+                <a:sym typeface="Calibri"/>
+              </a:rPr>
+              <a:t>the lemon variety of the chiffon cake</a:t>
+            </a:r>
+            <a:endParaRPr b="1" i="0" u="none" strike="noStrike" cap="none">
+              <a:solidFill>
+                <a:srgbClr val="6AA84F"/>
+              </a:solidFill>
+              <a:latin typeface="Calibri"/>
+              <a:ea typeface="Calibri"/>
+              <a:cs typeface="Calibri"/>
+              <a:sym typeface="Calibri"/>
             </a:endParaRPr>
           </a:p>
         </p:txBody>
@@ -12513,7 +12702,7 @@
   <p:cSld>
     <p:spTree>
       <p:nvGrpSpPr>
-        <p:cNvPr id="1" name="Shape 139"/>
+        <p:cNvPr id="1" name="Shape 141"/>
         <p:cNvGrpSpPr/>
         <p:nvPr/>
       </p:nvGrpSpPr>
@@ -12527,7 +12716,7 @@
       </p:grpSpPr>
       <p:sp>
         <p:nvSpPr>
-          <p:cNvPr id="140" name="Google Shape;140;p22"/>
+          <p:cNvPr id="142" name="Google Shape;142;p22"/>
           <p:cNvSpPr txBox="1"/>
           <p:nvPr/>
         </p:nvSpPr>
@@ -12593,7 +12782,7 @@
       </p:sp>
       <p:sp>
         <p:nvSpPr>
-          <p:cNvPr id="141" name="Google Shape;141;p22"/>
+          <p:cNvPr id="143" name="Google Shape;143;p22"/>
           <p:cNvSpPr txBox="1"/>
           <p:nvPr/>
         </p:nvSpPr>
@@ -13010,7 +13199,7 @@
       </p:sp>
       <p:sp>
         <p:nvSpPr>
-          <p:cNvPr id="142" name="Google Shape;142;p22"/>
+          <p:cNvPr id="144" name="Google Shape;144;p22"/>
           <p:cNvSpPr txBox="1"/>
           <p:nvPr/>
         </p:nvSpPr>
@@ -13059,6 +13248,18 @@
               <a:buNone/>
             </a:pPr>
             <a:r>
+              <a:rPr lang="en" sz="1300" b="1" i="0" u="none" strike="noStrike" cap="none">
+                <a:solidFill>
+                  <a:srgbClr val="FF0000"/>
+                </a:solidFill>
+                <a:latin typeface="Calibri"/>
+                <a:ea typeface="Calibri"/>
+                <a:cs typeface="Calibri"/>
+                <a:sym typeface="Calibri"/>
+              </a:rPr>
+              <a:t>Stable Code Instruct 3B</a:t>
+            </a:r>
+            <a:r>
               <a:rPr lang="en" sz="1300" b="0" i="0" u="none" strike="noStrike" cap="none">
                 <a:solidFill>
                   <a:srgbClr val="000000"/>
@@ -13068,7 +13269,7 @@
                 <a:cs typeface="Calibri"/>
                 <a:sym typeface="Calibri"/>
               </a:rPr>
-              <a:t>Stable Code Instruct 3B from Stability.ai</a:t>
+              <a:t> from Stability.ai</a:t>
             </a:r>
             <a:endParaRPr sz="1300" b="0" i="0" u="none" strike="noStrike" cap="none">
               <a:solidFill>
@@ -13084,14 +13285,14 @@
       </p:sp>
       <p:sp>
         <p:nvSpPr>
-          <p:cNvPr id="143" name="Google Shape;143;p22"/>
+          <p:cNvPr id="145" name="Google Shape;145;p22"/>
           <p:cNvSpPr txBox="1"/>
           <p:nvPr/>
         </p:nvSpPr>
         <p:spPr>
           <a:xfrm>
             <a:off x="112300" y="2975850"/>
-            <a:ext cx="4341000" cy="1363800"/>
+            <a:ext cx="4341000" cy="1163700"/>
           </a:xfrm>
           <a:prstGeom prst="rect">
             <a:avLst/>
@@ -13166,11 +13367,23 @@
                 <a:cs typeface="Calibri"/>
                 <a:sym typeface="Calibri"/>
               </a:rPr>
-              <a:t> is an open-source hardware device that enables users to control any computer through natural language commands.</a:t>
-            </a:r>
-            <a:endParaRPr sz="1300" b="0" i="0" u="none" strike="noStrike" cap="none">
+              <a:t> is an open-source hardware device: </a:t>
+            </a:r>
+            <a:r>
+              <a:rPr lang="en" sz="1300" b="1" i="0" u="none" strike="noStrike" cap="none">
+                <a:solidFill>
+                  <a:srgbClr val="FF0000"/>
+                </a:solidFill>
+                <a:latin typeface="Calibri"/>
+                <a:ea typeface="Calibri"/>
+                <a:cs typeface="Calibri"/>
+                <a:sym typeface="Calibri"/>
+              </a:rPr>
+              <a:t>talk to it to control computer!</a:t>
+            </a:r>
+            <a:endParaRPr sz="1300" b="1" i="0" u="none" strike="noStrike" cap="none">
               <a:solidFill>
-                <a:srgbClr val="000000"/>
+                <a:srgbClr val="FF0000"/>
               </a:solidFill>
               <a:latin typeface="Calibri"/>
               <a:ea typeface="Calibri"/>
@@ -13316,25 +13529,20 @@
       </p:sp>
       <p:pic>
         <p:nvPicPr>
-          <p:cNvPr id="144" name="Google Shape;144;p22"/>
+          <p:cNvPr id="146" name="Google Shape;146;p22"/>
           <p:cNvPicPr preferRelativeResize="0"/>
           <p:nvPr/>
         </p:nvPicPr>
         <p:blipFill rotWithShape="1">
-          <a:blip r:embed="rId5" cstate="email">
+          <a:blip r:embed="rId5">
             <a:alphaModFix/>
-            <a:extLst>
-              <a:ext uri="{28A0092B-C50C-407E-A947-70E740481C1C}">
-                <a14:useLocalDpi xmlns:a14="http://schemas.microsoft.com/office/drawing/2010/main"/>
-              </a:ext>
-            </a:extLst>
           </a:blip>
           <a:srcRect/>
           <a:stretch/>
         </p:blipFill>
         <p:spPr>
           <a:xfrm>
-            <a:off x="2807275" y="4150775"/>
+            <a:off x="2765636" y="4226975"/>
             <a:ext cx="1692300" cy="821400"/>
           </a:xfrm>
           <a:prstGeom prst="rect">
@@ -13348,7 +13556,7 @@
       </p:pic>
       <p:sp>
         <p:nvSpPr>
-          <p:cNvPr id="145" name="Google Shape;145;p22"/>
+          <p:cNvPr id="147" name="Google Shape;147;p22"/>
           <p:cNvSpPr txBox="1"/>
           <p:nvPr/>
         </p:nvSpPr>
@@ -13406,11 +13614,23 @@
                 <a:cs typeface="Calibri"/>
                 <a:sym typeface="Calibri"/>
               </a:rPr>
-              <a:t>OpenAI is pitching Sora to Hollywood</a:t>
-            </a:r>
-            <a:endParaRPr sz="1300" b="0" i="0" u="none" strike="noStrike" cap="none">
+              <a:t>OpenAI is pitching </a:t>
+            </a:r>
+            <a:r>
+              <a:rPr lang="en" sz="1300" b="1" i="0" u="none" strike="noStrike" cap="none">
+                <a:solidFill>
+                  <a:srgbClr val="FF0000"/>
+                </a:solidFill>
+                <a:latin typeface="Calibri"/>
+                <a:ea typeface="Calibri"/>
+                <a:cs typeface="Calibri"/>
+                <a:sym typeface="Calibri"/>
+              </a:rPr>
+              <a:t>Sora to Hollywood</a:t>
+            </a:r>
+            <a:endParaRPr sz="1300" b="1" i="0" u="none" strike="noStrike" cap="none">
               <a:solidFill>
-                <a:srgbClr val="000000"/>
+                <a:srgbClr val="FF0000"/>
               </a:solidFill>
               <a:latin typeface="Calibri"/>
               <a:ea typeface="Calibri"/>
@@ -13475,7 +13695,7 @@
       </p:sp>
       <p:sp>
         <p:nvSpPr>
-          <p:cNvPr id="146" name="Google Shape;146;p22"/>
+          <p:cNvPr id="148" name="Google Shape;148;p22"/>
           <p:cNvSpPr txBox="1"/>
           <p:nvPr/>
         </p:nvSpPr>
@@ -13590,14 +13810,14 @@
       </p:sp>
       <p:sp>
         <p:nvSpPr>
-          <p:cNvPr id="147" name="Google Shape;147;p22"/>
+          <p:cNvPr id="149" name="Google Shape;149;p22"/>
           <p:cNvSpPr txBox="1"/>
           <p:nvPr/>
         </p:nvSpPr>
         <p:spPr>
           <a:xfrm>
             <a:off x="4725450" y="1801038"/>
-            <a:ext cx="4341000" cy="455700"/>
+            <a:ext cx="4341000" cy="855900"/>
           </a:xfrm>
           <a:prstGeom prst="rect">
             <a:avLst/>
@@ -13621,7 +13841,10 @@
           </a:bodyPr>
           <a:lstStyle/>
           <a:p>
-            <a:pPr marL="0" lvl="0" indent="0" algn="l" rtl="0">
+            <a:pPr marL="0" marR="0" lvl="0" indent="0" algn="l" rtl="0">
+              <a:lnSpc>
+                <a:spcPct val="100000"/>
+              </a:lnSpc>
               <a:spcBef>
                 <a:spcPts val="0"/>
               </a:spcBef>
@@ -13636,13 +13859,146 @@
               <a:buNone/>
             </a:pPr>
             <a:r>
+              <a:rPr lang="en" sz="1300" b="1" i="0" u="none" strike="noStrike" cap="none">
+                <a:solidFill>
+                  <a:srgbClr val="FF0000"/>
+                </a:solidFill>
+                <a:latin typeface="Calibri"/>
+                <a:ea typeface="Calibri"/>
+                <a:cs typeface="Calibri"/>
+                <a:sym typeface="Calibri"/>
+              </a:rPr>
+              <a:t>Amazon</a:t>
+            </a:r>
+            <a:r>
+              <a:rPr lang="en" sz="1300" b="0" i="0" u="none" strike="noStrike" cap="none">
+                <a:solidFill>
+                  <a:srgbClr val="000000"/>
+                </a:solidFill>
+                <a:latin typeface="Calibri"/>
+                <a:ea typeface="Calibri"/>
+                <a:cs typeface="Calibri"/>
+                <a:sym typeface="Calibri"/>
+              </a:rPr>
+              <a:t> Invests Another </a:t>
+            </a:r>
+            <a:r>
+              <a:rPr lang="en" sz="1300" b="1" i="0" u="none" strike="noStrike" cap="none">
+                <a:solidFill>
+                  <a:srgbClr val="FF0000"/>
+                </a:solidFill>
+                <a:latin typeface="Calibri"/>
+                <a:ea typeface="Calibri"/>
+                <a:cs typeface="Calibri"/>
+                <a:sym typeface="Calibri"/>
+              </a:rPr>
+              <a:t>$2.75 Bln</a:t>
+            </a:r>
+            <a:r>
+              <a:rPr lang="en" sz="1300" b="0" i="0" u="none" strike="noStrike" cap="none">
+                <a:solidFill>
+                  <a:srgbClr val="000000"/>
+                </a:solidFill>
+                <a:latin typeface="Calibri"/>
+                <a:ea typeface="Calibri"/>
+                <a:cs typeface="Calibri"/>
+                <a:sym typeface="Calibri"/>
+              </a:rPr>
+              <a:t> In Anthropic, thus finalizing its </a:t>
+            </a:r>
+            <a:r>
+              <a:rPr lang="en" sz="1300" b="1" i="0" u="none" strike="noStrike" cap="none">
+                <a:solidFill>
+                  <a:srgbClr val="FF0000"/>
+                </a:solidFill>
+                <a:latin typeface="Calibri"/>
+                <a:ea typeface="Calibri"/>
+                <a:cs typeface="Calibri"/>
+                <a:sym typeface="Calibri"/>
+              </a:rPr>
+              <a:t>$4 Bln</a:t>
+            </a:r>
+            <a:r>
+              <a:rPr lang="en" sz="1300" b="0" i="0" u="none" strike="noStrike" cap="none">
+                <a:solidFill>
+                  <a:srgbClr val="000000"/>
+                </a:solidFill>
+                <a:latin typeface="Calibri"/>
+                <a:ea typeface="Calibri"/>
+                <a:cs typeface="Calibri"/>
+                <a:sym typeface="Calibri"/>
+              </a:rPr>
+              <a:t> investment in Anthropic.</a:t>
+            </a:r>
+            <a:endParaRPr sz="1300" b="0" i="0" u="none" strike="noStrike" cap="none">
+              <a:solidFill>
+                <a:srgbClr val="000000"/>
+              </a:solidFill>
+              <a:latin typeface="Calibri"/>
+              <a:ea typeface="Calibri"/>
+              <a:cs typeface="Calibri"/>
+              <a:sym typeface="Calibri"/>
+            </a:endParaRPr>
+          </a:p>
+          <a:p>
+            <a:pPr marL="0" marR="0" lvl="0" indent="0" algn="l" rtl="0">
+              <a:lnSpc>
+                <a:spcPct val="100000"/>
+              </a:lnSpc>
+              <a:spcBef>
+                <a:spcPts val="0"/>
+              </a:spcBef>
+              <a:spcAft>
+                <a:spcPts val="0"/>
+              </a:spcAft>
+              <a:buClr>
+                <a:schemeClr val="dk1"/>
+              </a:buClr>
+              <a:buSzPts val="1100"/>
+              <a:buFont typeface="Arial"/>
+              <a:buNone/>
+            </a:pPr>
+            <a:r>
+              <a:rPr lang="en" sz="1300" b="1">
+                <a:solidFill>
+                  <a:srgbClr val="FF0000"/>
+                </a:solidFill>
+                <a:latin typeface="Calibri"/>
+                <a:ea typeface="Calibri"/>
+                <a:cs typeface="Calibri"/>
+                <a:sym typeface="Calibri"/>
+              </a:rPr>
+              <a:t>Amazon</a:t>
+            </a:r>
+            <a:r>
               <a:rPr lang="en" sz="1300">
                 <a:latin typeface="Calibri"/>
                 <a:ea typeface="Calibri"/>
                 <a:cs typeface="Calibri"/>
                 <a:sym typeface="Calibri"/>
               </a:rPr>
-              <a:t> Amazon Invests Another $2.75B In Anthropic, thus finalizing its $4 Bln investment in Anthropic</a:t>
+              <a:t> is planning to invest </a:t>
+            </a:r>
+            <a:r>
+              <a:rPr lang="en" sz="1300" b="1">
+                <a:solidFill>
+                  <a:srgbClr val="FF0000"/>
+                </a:solidFill>
+                <a:latin typeface="Calibri"/>
+                <a:ea typeface="Calibri"/>
+                <a:cs typeface="Calibri"/>
+                <a:sym typeface="Calibri"/>
+              </a:rPr>
+              <a:t>$150 Bln</a:t>
+            </a:r>
+            <a:r>
+              <a:rPr lang="en" sz="1300">
+                <a:latin typeface="Calibri"/>
+                <a:ea typeface="Calibri"/>
+                <a:cs typeface="Calibri"/>
+                <a:sym typeface="Calibri"/>
+              </a:rPr>
+              <a:t> over the next 15 years on digital infrastructure.</a:t>
             </a:r>
             <a:endParaRPr sz="1300">
               <a:latin typeface="Calibri"/>
@@ -13655,7 +14011,7 @@
       </p:sp>
       <p:sp>
         <p:nvSpPr>
-          <p:cNvPr id="148" name="Google Shape;148;p22"/>
+          <p:cNvPr id="150" name="Google Shape;150;p22"/>
           <p:cNvSpPr txBox="1"/>
           <p:nvPr/>
         </p:nvSpPr>
@@ -13704,6 +14060,18 @@
               <a:buNone/>
             </a:pPr>
             <a:r>
+              <a:rPr lang="en" sz="1300" b="1" i="0" u="none" strike="noStrike" cap="none">
+                <a:solidFill>
+                  <a:srgbClr val="FF0000"/>
+                </a:solidFill>
+                <a:latin typeface="Calibri"/>
+                <a:ea typeface="Calibri"/>
+                <a:cs typeface="Calibri"/>
+                <a:sym typeface="Calibri"/>
+              </a:rPr>
+              <a:t>Elon Musk</a:t>
+            </a:r>
+            <a:r>
               <a:rPr lang="en" sz="1300" b="0" i="0" u="none" strike="noStrike" cap="none">
                 <a:solidFill>
                   <a:srgbClr val="000000"/>
@@ -13713,7 +14081,7 @@
                 <a:cs typeface="Calibri"/>
                 <a:sym typeface="Calibri"/>
               </a:rPr>
-              <a:t>Elon Musk - AGI may be achieved in 1-2-3 years, definitely in less than 5 years.</a:t>
+              <a:t> - AGI may be achieved in 1-2-3 years, definitely in less than 5 years.</a:t>
             </a:r>
             <a:endParaRPr sz="1000" b="0" i="0" u="none" strike="noStrike" cap="none">
               <a:solidFill>
@@ -13729,13 +14097,13 @@
       </p:sp>
       <p:sp>
         <p:nvSpPr>
-          <p:cNvPr id="149" name="Google Shape;149;p22"/>
+          <p:cNvPr id="151" name="Google Shape;151;p22"/>
           <p:cNvSpPr txBox="1"/>
           <p:nvPr/>
         </p:nvSpPr>
         <p:spPr>
           <a:xfrm>
-            <a:off x="4725450" y="2347288"/>
+            <a:off x="4725450" y="2728288"/>
             <a:ext cx="4341000" cy="1056000"/>
           </a:xfrm>
           <a:prstGeom prst="rect">
@@ -13760,7 +14128,10 @@
           </a:bodyPr>
           <a:lstStyle/>
           <a:p>
-            <a:pPr marL="0" lvl="0" indent="0" algn="l" rtl="0">
+            <a:pPr marL="0" marR="0" lvl="0" indent="0" algn="l" rtl="0">
+              <a:lnSpc>
+                <a:spcPct val="100000"/>
+              </a:lnSpc>
               <a:spcBef>
                 <a:spcPts val="0"/>
               </a:spcBef>
@@ -13775,7 +14146,19 @@
               <a:buNone/>
             </a:pPr>
             <a:r>
-              <a:rPr lang="en" sz="1300">
+              <a:rPr lang="en" sz="1300" b="1" i="0" u="none" strike="noStrike" cap="none">
+                <a:solidFill>
+                  <a:srgbClr val="FF0000"/>
+                </a:solidFill>
+                <a:latin typeface="Calibri"/>
+                <a:ea typeface="Calibri"/>
+                <a:cs typeface="Calibri"/>
+                <a:sym typeface="Calibri"/>
+              </a:rPr>
+              <a:t>Grok-1.5</a:t>
+            </a:r>
+            <a:r>
+              <a:rPr lang="en" sz="1300" b="0" i="0" u="none" strike="noStrike" cap="none">
                 <a:solidFill>
                   <a:schemeClr val="dk1"/>
                 </a:solidFill>
@@ -13784,10 +14167,13 @@
                 <a:cs typeface="Calibri"/>
                 <a:sym typeface="Calibri"/>
               </a:rPr>
-              <a:t>Grok-1.5 - will be </a:t>
-            </a:r>
-            <a:r>
-              <a:rPr lang="en" sz="1300">
+              <a:t> - will be </a:t>
+            </a:r>
+            <a:r>
+              <a:rPr lang="en" sz="1300" b="0" i="0" u="none" strike="noStrike" cap="none">
+                <a:solidFill>
+                  <a:srgbClr val="000000"/>
+                </a:solidFill>
                 <a:latin typeface="Calibri"/>
                 <a:ea typeface="Calibri"/>
                 <a:cs typeface="Calibri"/>
@@ -13795,7 +14181,10 @@
               </a:rPr>
               <a:t>available for early testers soon. This new version is has 128K context length and better reasoning and math. It is matching accuracy of Claude3 Sonnet and Gemini Pro 1.5. They didn’t say if it will be open-sourced.</a:t>
             </a:r>
-            <a:endParaRPr sz="1300">
+            <a:endParaRPr sz="1300" b="0" i="0" u="none" strike="noStrike" cap="none">
+              <a:solidFill>
+                <a:srgbClr val="000000"/>
+              </a:solidFill>
               <a:latin typeface="Calibri"/>
               <a:ea typeface="Calibri"/>
               <a:cs typeface="Calibri"/>
@@ -13803,7 +14192,10 @@
             </a:endParaRPr>
           </a:p>
           <a:p>
-            <a:pPr marL="0" lvl="0" indent="0" algn="l" rtl="0">
+            <a:pPr marL="0" marR="0" lvl="0" indent="0" algn="l" rtl="0">
+              <a:lnSpc>
+                <a:spcPct val="100000"/>
+              </a:lnSpc>
               <a:spcBef>
                 <a:spcPts val="0"/>
               </a:spcBef>
@@ -13818,7 +14210,7 @@
               <a:buNone/>
             </a:pPr>
             <a:r>
-              <a:rPr lang="en" sz="1300" u="sng">
+              <a:rPr lang="en" sz="1300" b="0" i="0" u="sng" strike="noStrike" cap="none">
                 <a:solidFill>
                   <a:schemeClr val="hlink"/>
                 </a:solidFill>
@@ -13831,7 +14223,10 @@
               <a:t>https://x.ai/blog/grok-1.5</a:t>
             </a:r>
             <a:r>
-              <a:rPr lang="en" sz="1300">
+              <a:rPr lang="en" sz="1300" b="0" i="0" u="none" strike="noStrike" cap="none">
+                <a:solidFill>
+                  <a:srgbClr val="000000"/>
+                </a:solidFill>
                 <a:latin typeface="Calibri"/>
                 <a:ea typeface="Calibri"/>
                 <a:cs typeface="Calibri"/>
@@ -13839,7 +14234,10 @@
               </a:rPr>
               <a:t> </a:t>
             </a:r>
-            <a:endParaRPr sz="1300">
+            <a:endParaRPr sz="1300" b="0" i="0" u="none" strike="noStrike" cap="none">
+              <a:solidFill>
+                <a:srgbClr val="000000"/>
+              </a:solidFill>
               <a:latin typeface="Calibri"/>
               <a:ea typeface="Calibri"/>
               <a:cs typeface="Calibri"/>
@@ -13850,13 +14248,13 @@
       </p:sp>
       <p:sp>
         <p:nvSpPr>
-          <p:cNvPr id="150" name="Google Shape;150;p22"/>
+          <p:cNvPr id="152" name="Google Shape;152;p22"/>
           <p:cNvSpPr txBox="1"/>
           <p:nvPr/>
         </p:nvSpPr>
         <p:spPr>
           <a:xfrm>
-            <a:off x="4725450" y="3458988"/>
+            <a:off x="4725450" y="3839988"/>
             <a:ext cx="4341000" cy="855900"/>
           </a:xfrm>
           <a:prstGeom prst="rect">
@@ -13881,19 +14279,25 @@
           </a:bodyPr>
           <a:lstStyle/>
           <a:p>
-            <a:pPr marL="228600" lvl="0" indent="-196850" algn="l" rtl="0">
-              <a:spcBef>
-                <a:spcPts val="0"/>
-              </a:spcBef>
-              <a:spcAft>
-                <a:spcPts val="0"/>
-              </a:spcAft>
+            <a:pPr marL="228600" marR="0" lvl="0" indent="-196850" algn="l" rtl="0">
+              <a:lnSpc>
+                <a:spcPct val="100000"/>
+              </a:lnSpc>
+              <a:spcBef>
+                <a:spcPts val="0"/>
+              </a:spcBef>
+              <a:spcAft>
+                <a:spcPts val="0"/>
+              </a:spcAft>
+              <a:buClr>
+                <a:srgbClr val="000000"/>
+              </a:buClr>
               <a:buSzPts val="1300"/>
               <a:buFont typeface="Calibri"/>
               <a:buChar char="●"/>
             </a:pPr>
             <a:r>
-              <a:rPr lang="en" sz="1300" b="1">
+              <a:rPr lang="en" sz="1300" b="1" i="0" u="none" strike="noStrike" cap="none">
                 <a:solidFill>
                   <a:srgbClr val="FF0000"/>
                 </a:solidFill>
@@ -13905,7 +14309,7 @@
               <a:t>h2o-wizardlm</a:t>
             </a:r>
             <a:r>
-              <a:rPr lang="en" sz="1300">
+              <a:rPr lang="en" sz="1300" b="0" i="0" u="none" strike="noStrike" cap="none">
                 <a:solidFill>
                   <a:schemeClr val="dk1"/>
                 </a:solidFill>
@@ -13917,7 +14321,7 @@
               <a:t> - turn documents into Q:A pairs</a:t>
             </a:r>
             <a:br>
-              <a:rPr lang="en" sz="1300">
+              <a:rPr lang="en" sz="1300" b="0" i="0" u="none" strike="noStrike" cap="none">
                 <a:solidFill>
                   <a:schemeClr val="dk1"/>
                 </a:solidFill>
@@ -13928,7 +14332,7 @@
               </a:rPr>
             </a:br>
             <a:r>
-              <a:rPr lang="en" sz="1300" u="sng">
+              <a:rPr lang="en" sz="1300" b="0" i="0" u="sng" strike="noStrike" cap="none">
                 <a:solidFill>
                   <a:schemeClr val="hlink"/>
                 </a:solidFill>
@@ -13940,7 +14344,7 @@
               </a:rPr>
               <a:t>https://github.com/h2oai/h2o-wizardlm</a:t>
             </a:r>
-            <a:endParaRPr sz="1300">
+            <a:endParaRPr sz="1300" b="0" i="0" u="none" strike="noStrike" cap="none">
               <a:solidFill>
                 <a:schemeClr val="dk1"/>
               </a:solidFill>
@@ -13951,19 +14355,25 @@
             </a:endParaRPr>
           </a:p>
           <a:p>
-            <a:pPr marL="228600" lvl="0" indent="-196850" algn="l" rtl="0">
-              <a:spcBef>
-                <a:spcPts val="0"/>
-              </a:spcBef>
-              <a:spcAft>
-                <a:spcPts val="0"/>
-              </a:spcAft>
+            <a:pPr marL="228600" marR="0" lvl="0" indent="-196850" algn="l" rtl="0">
+              <a:lnSpc>
+                <a:spcPct val="100000"/>
+              </a:lnSpc>
+              <a:spcBef>
+                <a:spcPts val="0"/>
+              </a:spcBef>
+              <a:spcAft>
+                <a:spcPts val="0"/>
+              </a:spcAft>
+              <a:buClr>
+                <a:srgbClr val="000000"/>
+              </a:buClr>
               <a:buSzPts val="1300"/>
               <a:buFont typeface="Calibri"/>
               <a:buChar char="●"/>
             </a:pPr>
             <a:r>
-              <a:rPr lang="en" sz="1300" b="1">
+              <a:rPr lang="en" sz="1300" b="1" i="0" u="none" strike="noStrike" cap="none">
                 <a:solidFill>
                   <a:srgbClr val="FF0000"/>
                 </a:solidFill>
@@ -13975,7 +14385,7 @@
               <a:t>NaLLM</a:t>
             </a:r>
             <a:r>
-              <a:rPr lang="en" sz="1300">
+              <a:rPr lang="en" sz="1300" b="0" i="0" u="none" strike="noStrike" cap="none">
                 <a:solidFill>
                   <a:schemeClr val="dk1"/>
                 </a:solidFill>
@@ -13987,7 +14397,7 @@
               <a:t> - Neo4j graph DB and LLMs</a:t>
             </a:r>
             <a:br>
-              <a:rPr lang="en" sz="1300">
+              <a:rPr lang="en" sz="1300" b="0" i="0" u="none" strike="noStrike" cap="none">
                 <a:solidFill>
                   <a:schemeClr val="dk1"/>
                 </a:solidFill>
@@ -13998,7 +14408,7 @@
               </a:rPr>
             </a:br>
             <a:r>
-              <a:rPr lang="en" sz="1300" u="sng">
+              <a:rPr lang="en" sz="1300" b="0" i="0" u="sng" strike="noStrike" cap="none">
                 <a:solidFill>
                   <a:schemeClr val="hlink"/>
                 </a:solidFill>
@@ -14011,7 +14421,7 @@
               <a:t>https://github.com/neo4j/NaLLM</a:t>
             </a:r>
             <a:r>
-              <a:rPr lang="en" sz="1300">
+              <a:rPr lang="en" sz="1300" b="0" i="0" u="none" strike="noStrike" cap="none">
                 <a:solidFill>
                   <a:schemeClr val="dk1"/>
                 </a:solidFill>
@@ -14047,7 +14457,7 @@
   <p:cSld>
     <p:spTree>
       <p:nvGrpSpPr>
-        <p:cNvPr id="1" name="Shape 154"/>
+        <p:cNvPr id="1" name="Shape 156"/>
         <p:cNvGrpSpPr/>
         <p:nvPr/>
       </p:nvGrpSpPr>
@@ -14061,7 +14471,7 @@
       </p:grpSpPr>
       <p:sp>
         <p:nvSpPr>
-          <p:cNvPr id="155" name="Google Shape;155;p23"/>
+          <p:cNvPr id="157" name="Google Shape;157;p23"/>
           <p:cNvSpPr txBox="1"/>
           <p:nvPr/>
         </p:nvSpPr>
@@ -14127,7 +14537,7 @@
       </p:sp>
       <p:sp>
         <p:nvSpPr>
-          <p:cNvPr id="156" name="Google Shape;156;p23"/>
+          <p:cNvPr id="158" name="Google Shape;158;p23"/>
           <p:cNvSpPr txBox="1"/>
           <p:nvPr/>
         </p:nvSpPr>
@@ -14473,7 +14883,7 @@
       </p:sp>
       <p:pic>
         <p:nvPicPr>
-          <p:cNvPr id="157" name="Google Shape;157;p23"/>
+          <p:cNvPr id="159" name="Google Shape;159;p23"/>
           <p:cNvPicPr preferRelativeResize="0"/>
           <p:nvPr/>
         </p:nvPicPr>
@@ -14517,7 +14927,7 @@
   <p:cSld>
     <p:spTree>
       <p:nvGrpSpPr>
-        <p:cNvPr id="1" name="Shape 161"/>
+        <p:cNvPr id="1" name="Shape 163"/>
         <p:cNvGrpSpPr/>
         <p:nvPr/>
       </p:nvGrpSpPr>
@@ -14531,7 +14941,7 @@
       </p:grpSpPr>
       <p:sp>
         <p:nvSpPr>
-          <p:cNvPr id="162" name="Google Shape;162;p24"/>
+          <p:cNvPr id="164" name="Google Shape;164;p24"/>
           <p:cNvSpPr txBox="1"/>
           <p:nvPr/>
         </p:nvSpPr>
@@ -14597,7 +15007,7 @@
       </p:sp>
       <p:sp>
         <p:nvSpPr>
-          <p:cNvPr id="163" name="Google Shape;163;p24"/>
+          <p:cNvPr id="165" name="Google Shape;165;p24"/>
           <p:cNvSpPr txBox="1"/>
           <p:nvPr/>
         </p:nvSpPr>
@@ -14843,7 +15253,7 @@
   <p:cSld>
     <p:spTree>
       <p:nvGrpSpPr>
-        <p:cNvPr id="1" name="Shape 167"/>
+        <p:cNvPr id="1" name="Shape 169"/>
         <p:cNvGrpSpPr/>
         <p:nvPr/>
       </p:nvGrpSpPr>
@@ -14857,7 +15267,7 @@
       </p:grpSpPr>
       <p:sp>
         <p:nvSpPr>
-          <p:cNvPr id="168" name="Google Shape;168;p25"/>
+          <p:cNvPr id="170" name="Google Shape;170;p25"/>
           <p:cNvSpPr txBox="1"/>
           <p:nvPr/>
         </p:nvSpPr>
@@ -14923,7 +15333,7 @@
       </p:sp>
       <p:sp>
         <p:nvSpPr>
-          <p:cNvPr id="169" name="Google Shape;169;p25"/>
+          <p:cNvPr id="171" name="Google Shape;171;p25"/>
           <p:cNvSpPr txBox="1"/>
           <p:nvPr/>
         </p:nvSpPr>
@@ -15091,7 +15501,7 @@
       </p:sp>
       <p:pic>
         <p:nvPicPr>
-          <p:cNvPr id="170" name="Google Shape;170;p25"/>
+          <p:cNvPr id="172" name="Google Shape;172;p25"/>
           <p:cNvPicPr preferRelativeResize="0"/>
           <p:nvPr/>
         </p:nvPicPr>
@@ -15129,7 +15539,7 @@
   <p:cSld>
     <p:spTree>
       <p:nvGrpSpPr>
-        <p:cNvPr id="1" name="Shape 174"/>
+        <p:cNvPr id="1" name="Shape 176"/>
         <p:cNvGrpSpPr/>
         <p:nvPr/>
       </p:nvGrpSpPr>
@@ -15143,7 +15553,7 @@
       </p:grpSpPr>
       <p:sp>
         <p:nvSpPr>
-          <p:cNvPr id="175" name="Google Shape;175;p26"/>
+          <p:cNvPr id="177" name="Google Shape;177;p26"/>
           <p:cNvSpPr txBox="1"/>
           <p:nvPr/>
         </p:nvSpPr>
@@ -15209,7 +15619,7 @@
       </p:sp>
       <p:pic>
         <p:nvPicPr>
-          <p:cNvPr id="176" name="Google Shape;176;p26"/>
+          <p:cNvPr id="178" name="Google Shape;178;p26"/>
           <p:cNvPicPr preferRelativeResize="0"/>
           <p:nvPr/>
         </p:nvPicPr>
@@ -15236,7 +15646,7 @@
       </p:pic>
       <p:sp>
         <p:nvSpPr>
-          <p:cNvPr id="177" name="Google Shape;177;p26"/>
+          <p:cNvPr id="179" name="Google Shape;179;p26"/>
           <p:cNvSpPr txBox="1"/>
           <p:nvPr/>
         </p:nvSpPr>
@@ -15947,7 +16357,7 @@
       </p:sp>
       <p:sp>
         <p:nvSpPr>
-          <p:cNvPr id="178" name="Google Shape;178;p26"/>
+          <p:cNvPr id="180" name="Google Shape;180;p26"/>
           <p:cNvSpPr txBox="1"/>
           <p:nvPr/>
         </p:nvSpPr>
@@ -16152,7 +16562,7 @@
   <p:cSld>
     <p:spTree>
       <p:nvGrpSpPr>
-        <p:cNvPr id="1" name="Shape 182"/>
+        <p:cNvPr id="1" name="Shape 184"/>
         <p:cNvGrpSpPr/>
         <p:nvPr/>
       </p:nvGrpSpPr>
@@ -16166,7 +16576,7 @@
       </p:grpSpPr>
       <p:sp>
         <p:nvSpPr>
-          <p:cNvPr id="183" name="Google Shape;183;p27"/>
+          <p:cNvPr id="185" name="Google Shape;185;p27"/>
           <p:cNvSpPr txBox="1"/>
           <p:nvPr/>
         </p:nvSpPr>
@@ -16232,7 +16642,7 @@
       </p:sp>
       <p:sp>
         <p:nvSpPr>
-          <p:cNvPr id="184" name="Google Shape;184;p27"/>
+          <p:cNvPr id="186" name="Google Shape;186;p27"/>
           <p:cNvSpPr txBox="1"/>
           <p:nvPr/>
         </p:nvSpPr>
@@ -17066,7 +17476,7 @@
   <p:cSld>
     <p:spTree>
       <p:nvGrpSpPr>
-        <p:cNvPr id="1" name="Shape 188"/>
+        <p:cNvPr id="1" name="Shape 190"/>
         <p:cNvGrpSpPr/>
         <p:nvPr/>
       </p:nvGrpSpPr>
@@ -17080,7 +17490,7 @@
       </p:grpSpPr>
       <p:sp>
         <p:nvSpPr>
-          <p:cNvPr id="189" name="Google Shape;189;p28"/>
+          <p:cNvPr id="191" name="Google Shape;191;p28"/>
           <p:cNvSpPr txBox="1"/>
           <p:nvPr/>
         </p:nvSpPr>
@@ -17146,7 +17556,7 @@
       </p:sp>
       <p:sp>
         <p:nvSpPr>
-          <p:cNvPr id="190" name="Google Shape;190;p28"/>
+          <p:cNvPr id="192" name="Google Shape;192;p28"/>
           <p:cNvSpPr txBox="1"/>
           <p:nvPr/>
         </p:nvSpPr>
@@ -17433,20 +17843,20 @@
       </p:sp>
       <p:graphicFrame>
         <p:nvGraphicFramePr>
-          <p:cNvPr id="191" name="Google Shape;191;p28"/>
+          <p:cNvPr id="193" name="Google Shape;193;p28"/>
           <p:cNvGraphicFramePr/>
           <p:nvPr/>
         </p:nvGraphicFramePr>
         <p:xfrm>
           <a:off x="4741900" y="449838"/>
-          <a:ext cx="4280950" cy="2222950"/>
+          <a:ext cx="3000000" cy="3000000"/>
         </p:xfrm>
         <a:graphic>
           <a:graphicData uri="http://schemas.openxmlformats.org/drawingml/2006/table">
             <a:tbl>
               <a:tblPr>
                 <a:noFill/>
-                <a:tableStyleId>{92D71B68-C5DD-425E-8F42-CA6E4722A4F6}</a:tableStyleId>
+                <a:tableStyleId>{C361EDC5-FE3C-444C-9064-846CE911FFB1}</a:tableStyleId>
               </a:tblPr>
               <a:tblGrid>
                 <a:gridCol w="2140475">
@@ -18523,7 +18933,7 @@
       </p:graphicFrame>
       <p:sp>
         <p:nvSpPr>
-          <p:cNvPr id="192" name="Google Shape;192;p28"/>
+          <p:cNvPr id="194" name="Google Shape;194;p28"/>
           <p:cNvSpPr txBox="1"/>
           <p:nvPr/>
         </p:nvSpPr>
@@ -18726,7 +19136,7 @@
       </p:sp>
       <p:pic>
         <p:nvPicPr>
-          <p:cNvPr id="193" name="Google Shape;193;p28"/>
+          <p:cNvPr id="195" name="Google Shape;195;p28"/>
           <p:cNvPicPr preferRelativeResize="0"/>
           <p:nvPr/>
         </p:nvPicPr>
@@ -18753,7 +19163,7 @@
       </p:pic>
       <p:sp>
         <p:nvSpPr>
-          <p:cNvPr id="194" name="Google Shape;194;p28"/>
+          <p:cNvPr id="196" name="Google Shape;196;p28"/>
           <p:cNvSpPr txBox="1"/>
           <p:nvPr/>
         </p:nvSpPr>
@@ -18850,7 +19260,7 @@
   <p:cSld>
     <p:spTree>
       <p:nvGrpSpPr>
-        <p:cNvPr id="1" name="Shape 198"/>
+        <p:cNvPr id="1" name="Shape 200"/>
         <p:cNvGrpSpPr/>
         <p:nvPr/>
       </p:nvGrpSpPr>
@@ -18864,7 +19274,7 @@
       </p:grpSpPr>
       <p:sp>
         <p:nvSpPr>
-          <p:cNvPr id="199" name="Google Shape;199;p29"/>
+          <p:cNvPr id="201" name="Google Shape;201;p29"/>
           <p:cNvSpPr txBox="1"/>
           <p:nvPr/>
         </p:nvSpPr>
@@ -18914,19 +19324,7 @@
                 <a:cs typeface="Calibri"/>
                 <a:sym typeface="Calibri"/>
               </a:rPr>
-              <a:t>RAG - </a:t>
-            </a:r>
-            <a:r>
-              <a:rPr lang="en" sz="2000" b="1">
-                <a:solidFill>
-                  <a:schemeClr val="dk1"/>
-                </a:solidFill>
-                <a:latin typeface="Calibri"/>
-                <a:ea typeface="Calibri"/>
-                <a:cs typeface="Calibri"/>
-                <a:sym typeface="Calibri"/>
-              </a:rPr>
-              <a:t>activeloop.ai, Deep Lake</a:t>
+              <a:t>RAG - activeloop.ai, Deep Lake</a:t>
             </a:r>
             <a:endParaRPr sz="2000" b="1" i="0" u="none" strike="noStrike" cap="none">
               <a:solidFill>
@@ -18942,7 +19340,7 @@
       </p:sp>
       <p:sp>
         <p:nvSpPr>
-          <p:cNvPr id="200" name="Google Shape;200;p29"/>
+          <p:cNvPr id="202" name="Google Shape;202;p29"/>
           <p:cNvSpPr txBox="1"/>
           <p:nvPr/>
         </p:nvSpPr>
@@ -18973,17 +19371,25 @@
           </a:bodyPr>
           <a:lstStyle/>
           <a:p>
-            <a:pPr marL="0" lvl="0" indent="0" algn="l" rtl="0">
-              <a:spcBef>
-                <a:spcPts val="0"/>
-              </a:spcBef>
-              <a:spcAft>
-                <a:spcPts val="0"/>
-              </a:spcAft>
-              <a:buNone/>
-            </a:pPr>
-            <a:r>
-              <a:rPr lang="en" sz="1300" b="1">
+            <a:pPr marL="0" marR="0" lvl="0" indent="0" algn="l" rtl="0">
+              <a:lnSpc>
+                <a:spcPct val="100000"/>
+              </a:lnSpc>
+              <a:spcBef>
+                <a:spcPts val="0"/>
+              </a:spcBef>
+              <a:spcAft>
+                <a:spcPts val="0"/>
+              </a:spcAft>
+              <a:buClr>
+                <a:srgbClr val="000000"/>
+              </a:buClr>
+              <a:buSzPts val="1300"/>
+              <a:buFont typeface="Arial"/>
+              <a:buNone/>
+            </a:pPr>
+            <a:r>
+              <a:rPr lang="en" sz="1300" b="1" i="0" u="none" strike="noStrike" cap="none">
                 <a:solidFill>
                   <a:srgbClr val="FF0000"/>
                 </a:solidFill>
@@ -18995,7 +19401,10 @@
               <a:t>activeloop.ai</a:t>
             </a:r>
             <a:r>
-              <a:rPr lang="en" sz="1300">
+              <a:rPr lang="en" sz="1300" b="0" i="0" u="none" strike="noStrike" cap="none">
+                <a:solidFill>
+                  <a:srgbClr val="000000"/>
+                </a:solidFill>
                 <a:latin typeface="Calibri"/>
                 <a:ea typeface="Calibri"/>
                 <a:cs typeface="Calibri"/>
@@ -19003,7 +19412,10 @@
               </a:rPr>
               <a:t> is a startup in Mountain View, CA</a:t>
             </a:r>
-            <a:endParaRPr sz="1300">
+            <a:endParaRPr sz="1300" b="0" i="0" u="none" strike="noStrike" cap="none">
+              <a:solidFill>
+                <a:srgbClr val="000000"/>
+              </a:solidFill>
               <a:latin typeface="Calibri"/>
               <a:ea typeface="Calibri"/>
               <a:cs typeface="Calibri"/>
@@ -19011,17 +19423,28 @@
             </a:endParaRPr>
           </a:p>
           <a:p>
-            <a:pPr marL="0" lvl="0" indent="0" algn="l" rtl="0">
-              <a:spcBef>
-                <a:spcPts val="0"/>
-              </a:spcBef>
-              <a:spcAft>
-                <a:spcPts val="0"/>
-              </a:spcAft>
-              <a:buNone/>
-            </a:pPr>
-            <a:r>
-              <a:rPr lang="en" sz="1300">
+            <a:pPr marL="0" marR="0" lvl="0" indent="0" algn="l" rtl="0">
+              <a:lnSpc>
+                <a:spcPct val="100000"/>
+              </a:lnSpc>
+              <a:spcBef>
+                <a:spcPts val="0"/>
+              </a:spcBef>
+              <a:spcAft>
+                <a:spcPts val="0"/>
+              </a:spcAft>
+              <a:buClr>
+                <a:srgbClr val="000000"/>
+              </a:buClr>
+              <a:buSzPts val="1300"/>
+              <a:buFont typeface="Arial"/>
+              <a:buNone/>
+            </a:pPr>
+            <a:r>
+              <a:rPr lang="en" sz="1300" b="0" i="0" u="none" strike="noStrike" cap="none">
+                <a:solidFill>
+                  <a:srgbClr val="000000"/>
+                </a:solidFill>
                 <a:latin typeface="Calibri"/>
                 <a:ea typeface="Calibri"/>
                 <a:cs typeface="Calibri"/>
@@ -19029,7 +19452,10 @@
               </a:rPr>
               <a:t>just received $11 Mln funding.</a:t>
             </a:r>
-            <a:endParaRPr sz="1300">
+            <a:endParaRPr sz="1300" b="0" i="0" u="none" strike="noStrike" cap="none">
+              <a:solidFill>
+                <a:srgbClr val="000000"/>
+              </a:solidFill>
               <a:latin typeface="Calibri"/>
               <a:ea typeface="Calibri"/>
               <a:cs typeface="Calibri"/>
@@ -19037,17 +19463,28 @@
             </a:endParaRPr>
           </a:p>
           <a:p>
-            <a:pPr marL="0" lvl="0" indent="0" algn="l" rtl="0">
-              <a:spcBef>
-                <a:spcPts val="0"/>
-              </a:spcBef>
-              <a:spcAft>
-                <a:spcPts val="0"/>
-              </a:spcAft>
-              <a:buNone/>
-            </a:pPr>
-            <a:r>
-              <a:rPr lang="en" sz="1300">
+            <a:pPr marL="0" marR="0" lvl="0" indent="0" algn="l" rtl="0">
+              <a:lnSpc>
+                <a:spcPct val="100000"/>
+              </a:lnSpc>
+              <a:spcBef>
+                <a:spcPts val="0"/>
+              </a:spcBef>
+              <a:spcAft>
+                <a:spcPts val="0"/>
+              </a:spcAft>
+              <a:buClr>
+                <a:srgbClr val="000000"/>
+              </a:buClr>
+              <a:buSzPts val="1300"/>
+              <a:buFont typeface="Arial"/>
+              <a:buNone/>
+            </a:pPr>
+            <a:r>
+              <a:rPr lang="en" sz="1300" b="0" i="0" u="none" strike="noStrike" cap="none">
+                <a:solidFill>
+                  <a:srgbClr val="000000"/>
+                </a:solidFill>
                 <a:latin typeface="Calibri"/>
                 <a:ea typeface="Calibri"/>
                 <a:cs typeface="Calibri"/>
@@ -19055,7 +19492,10 @@
               </a:rPr>
               <a:t>Main product - a "Deep Lake" database specifically designed for AI data (text, embeddings, images, ...)</a:t>
             </a:r>
-            <a:endParaRPr sz="1300">
+            <a:endParaRPr sz="1300" b="0" i="0" u="none" strike="noStrike" cap="none">
+              <a:solidFill>
+                <a:srgbClr val="000000"/>
+              </a:solidFill>
               <a:latin typeface="Calibri"/>
               <a:ea typeface="Calibri"/>
               <a:cs typeface="Calibri"/>
@@ -19063,17 +19503,28 @@
             </a:endParaRPr>
           </a:p>
           <a:p>
-            <a:pPr marL="0" lvl="0" indent="0" algn="l" rtl="0">
-              <a:spcBef>
-                <a:spcPts val="0"/>
-              </a:spcBef>
-              <a:spcAft>
-                <a:spcPts val="0"/>
-              </a:spcAft>
-              <a:buNone/>
-            </a:pPr>
-            <a:r>
-              <a:rPr lang="en" sz="1300">
+            <a:pPr marL="0" marR="0" lvl="0" indent="0" algn="l" rtl="0">
+              <a:lnSpc>
+                <a:spcPct val="100000"/>
+              </a:lnSpc>
+              <a:spcBef>
+                <a:spcPts val="0"/>
+              </a:spcBef>
+              <a:spcAft>
+                <a:spcPts val="0"/>
+              </a:spcAft>
+              <a:buClr>
+                <a:srgbClr val="000000"/>
+              </a:buClr>
+              <a:buSzPts val="1300"/>
+              <a:buFont typeface="Arial"/>
+              <a:buNone/>
+            </a:pPr>
+            <a:r>
+              <a:rPr lang="en" sz="1300" b="0" i="0" u="none" strike="noStrike" cap="none">
+                <a:solidFill>
+                  <a:srgbClr val="000000"/>
+                </a:solidFill>
                 <a:latin typeface="Calibri"/>
                 <a:ea typeface="Calibri"/>
                 <a:cs typeface="Calibri"/>
@@ -19081,7 +19532,10 @@
               </a:rPr>
               <a:t>Deep Lake can be used locally, in memory, on your cloud, or managed. </a:t>
             </a:r>
-            <a:endParaRPr sz="1300">
+            <a:endParaRPr sz="1300" b="0" i="0" u="none" strike="noStrike" cap="none">
+              <a:solidFill>
+                <a:srgbClr val="000000"/>
+              </a:solidFill>
               <a:latin typeface="Calibri"/>
               <a:ea typeface="Calibri"/>
               <a:cs typeface="Calibri"/>
@@ -19099,9 +19553,17 @@
               <a:spcAft>
                 <a:spcPts val="0"/>
               </a:spcAft>
-              <a:buNone/>
-            </a:pPr>
-            <a:endParaRPr sz="1300">
+              <a:buClr>
+                <a:srgbClr val="000000"/>
+              </a:buClr>
+              <a:buSzPts val="1300"/>
+              <a:buFont typeface="Arial"/>
+              <a:buNone/>
+            </a:pPr>
+            <a:endParaRPr sz="1300" b="0" i="0" u="none" strike="noStrike" cap="none">
+              <a:solidFill>
+                <a:srgbClr val="000000"/>
+              </a:solidFill>
               <a:latin typeface="Calibri"/>
               <a:ea typeface="Calibri"/>
               <a:cs typeface="Calibri"/>
@@ -19119,10 +19581,15 @@
               <a:spcAft>
                 <a:spcPts val="0"/>
               </a:spcAft>
-              <a:buNone/>
-            </a:pPr>
-            <a:r>
-              <a:rPr lang="en" sz="1200" b="1">
+              <a:buClr>
+                <a:srgbClr val="000000"/>
+              </a:buClr>
+              <a:buSzPts val="1200"/>
+              <a:buFont typeface="Arial"/>
+              <a:buNone/>
+            </a:pPr>
+            <a:r>
+              <a:rPr lang="en" sz="1200" b="1" i="0" u="none" strike="noStrike" cap="none">
                 <a:solidFill>
                   <a:srgbClr val="3C78D8"/>
                 </a:solidFill>
@@ -19133,7 +19600,7 @@
               </a:rPr>
               <a:t>pip3 install deeplake</a:t>
             </a:r>
-            <a:endParaRPr sz="1200" b="1">
+            <a:endParaRPr sz="1200" b="1" i="0" u="none" strike="noStrike" cap="none">
               <a:solidFill>
                 <a:srgbClr val="3C78D8"/>
               </a:solidFill>
@@ -19154,9 +19621,22 @@
               <a:spcAft>
                 <a:spcPts val="0"/>
               </a:spcAft>
-              <a:buNone/>
-            </a:pPr>
-            <a:endParaRPr/>
+              <a:buClr>
+                <a:srgbClr val="000000"/>
+              </a:buClr>
+              <a:buSzPts val="1400"/>
+              <a:buFont typeface="Arial"/>
+              <a:buNone/>
+            </a:pPr>
+            <a:endParaRPr sz="1400" b="0" i="0" u="none" strike="noStrike" cap="none">
+              <a:solidFill>
+                <a:srgbClr val="000000"/>
+              </a:solidFill>
+              <a:latin typeface="Arial"/>
+              <a:ea typeface="Arial"/>
+              <a:cs typeface="Arial"/>
+              <a:sym typeface="Arial"/>
+            </a:endParaRPr>
           </a:p>
           <a:p>
             <a:pPr marL="228600" marR="0" lvl="0" indent="-177800" algn="l" rtl="0">
@@ -19177,7 +19657,7 @@
               <a:buChar char="●"/>
             </a:pPr>
             <a:r>
-              <a:rPr lang="en" sz="1000" u="sng">
+              <a:rPr lang="en" sz="1000" b="0" i="0" u="sng" strike="noStrike" cap="none">
                 <a:solidFill>
                   <a:schemeClr val="hlink"/>
                 </a:solidFill>
@@ -19189,7 +19669,10 @@
               </a:rPr>
               <a:t>https://www.activeloop.ai</a:t>
             </a:r>
-            <a:endParaRPr sz="1000">
+            <a:endParaRPr sz="1000" b="0" i="0" u="none" strike="noStrike" cap="none">
+              <a:solidFill>
+                <a:srgbClr val="000000"/>
+              </a:solidFill>
               <a:latin typeface="Calibri"/>
               <a:ea typeface="Calibri"/>
               <a:cs typeface="Calibri"/>
@@ -19207,12 +19690,15 @@
               <a:spcAft>
                 <a:spcPts val="0"/>
               </a:spcAft>
+              <a:buClr>
+                <a:srgbClr val="000000"/>
+              </a:buClr>
               <a:buSzPts val="1000"/>
               <a:buFont typeface="Calibri"/>
               <a:buChar char="●"/>
             </a:pPr>
             <a:r>
-              <a:rPr lang="en" sz="1000" u="sng">
+              <a:rPr lang="en" sz="1000" b="0" i="0" u="sng" strike="noStrike" cap="none">
                 <a:solidFill>
                   <a:schemeClr val="hlink"/>
                 </a:solidFill>
@@ -19225,7 +19711,10 @@
               <a:t>https://www.activeloop.ai/about/</a:t>
             </a:r>
             <a:r>
-              <a:rPr lang="en" sz="1000">
+              <a:rPr lang="en" sz="1000" b="0" i="0" u="none" strike="noStrike" cap="none">
+                <a:solidFill>
+                  <a:srgbClr val="000000"/>
+                </a:solidFill>
                 <a:latin typeface="Calibri"/>
                 <a:ea typeface="Calibri"/>
                 <a:cs typeface="Calibri"/>
@@ -19233,7 +19722,10 @@
               </a:rPr>
               <a:t> </a:t>
             </a:r>
-            <a:endParaRPr sz="1000">
+            <a:endParaRPr sz="1000" b="0" i="0" u="none" strike="noStrike" cap="none">
+              <a:solidFill>
+                <a:srgbClr val="000000"/>
+              </a:solidFill>
               <a:latin typeface="Calibri"/>
               <a:ea typeface="Calibri"/>
               <a:cs typeface="Calibri"/>
@@ -19259,7 +19751,7 @@
               <a:buChar char="●"/>
             </a:pPr>
             <a:r>
-              <a:rPr lang="en" sz="1000" u="sng">
+              <a:rPr lang="en" sz="1000" b="0" i="0" u="sng" strike="noStrike" cap="none">
                 <a:solidFill>
                   <a:schemeClr val="hlink"/>
                 </a:solidFill>
@@ -19272,7 +19764,10 @@
               <a:t>https://github.com/activeloopai/deeplake/</a:t>
             </a:r>
             <a:r>
-              <a:rPr lang="en" sz="1000">
+              <a:rPr lang="en" sz="1000" b="0" i="0" u="none" strike="noStrike" cap="none">
+                <a:solidFill>
+                  <a:srgbClr val="000000"/>
+                </a:solidFill>
                 <a:latin typeface="Calibri"/>
                 <a:ea typeface="Calibri"/>
                 <a:cs typeface="Calibri"/>
@@ -19280,7 +19775,10 @@
               </a:rPr>
               <a:t> </a:t>
             </a:r>
-            <a:endParaRPr sz="1000">
+            <a:endParaRPr sz="1000" b="0" i="0" u="none" strike="noStrike" cap="none">
+              <a:solidFill>
+                <a:srgbClr val="000000"/>
+              </a:solidFill>
               <a:latin typeface="Calibri"/>
               <a:ea typeface="Calibri"/>
               <a:cs typeface="Calibri"/>
@@ -19306,7 +19804,7 @@
               <a:buChar char="●"/>
             </a:pPr>
             <a:r>
-              <a:rPr lang="en" sz="1000" u="sng">
+              <a:rPr lang="en" sz="1000" b="0" i="0" u="sng" strike="noStrike" cap="none">
                 <a:solidFill>
                   <a:schemeClr val="hlink"/>
                 </a:solidFill>
@@ -19319,7 +19817,10 @@
               <a:t>https://docs.activeloop.ai</a:t>
             </a:r>
             <a:r>
-              <a:rPr lang="en" sz="1000">
+              <a:rPr lang="en" sz="1000" b="0" i="0" u="none" strike="noStrike" cap="none">
+                <a:solidFill>
+                  <a:srgbClr val="000000"/>
+                </a:solidFill>
                 <a:latin typeface="Calibri"/>
                 <a:ea typeface="Calibri"/>
                 <a:cs typeface="Calibri"/>
@@ -19327,7 +19828,10 @@
               </a:rPr>
               <a:t> </a:t>
             </a:r>
-            <a:endParaRPr sz="1000">
+            <a:endParaRPr sz="1000" b="0" i="0" u="none" strike="noStrike" cap="none">
+              <a:solidFill>
+                <a:srgbClr val="000000"/>
+              </a:solidFill>
               <a:latin typeface="Calibri"/>
               <a:ea typeface="Calibri"/>
               <a:cs typeface="Calibri"/>
@@ -19345,12 +19849,15 @@
               <a:spcAft>
                 <a:spcPts val="0"/>
               </a:spcAft>
+              <a:buClr>
+                <a:srgbClr val="000000"/>
+              </a:buClr>
               <a:buSzPts val="1000"/>
               <a:buFont typeface="Calibri"/>
               <a:buChar char="●"/>
             </a:pPr>
             <a:r>
-              <a:rPr lang="en" sz="1000" u="sng">
+              <a:rPr lang="en" sz="1000" b="0" i="0" u="sng" strike="noStrike" cap="none">
                 <a:solidFill>
                   <a:schemeClr val="hlink"/>
                 </a:solidFill>
@@ -19363,7 +19870,10 @@
               <a:t>https://docs.activeloop.ai/quickstart</a:t>
             </a:r>
             <a:r>
-              <a:rPr lang="en" sz="1000">
+              <a:rPr lang="en" sz="1000" b="0" i="0" u="none" strike="noStrike" cap="none">
+                <a:solidFill>
+                  <a:srgbClr val="000000"/>
+                </a:solidFill>
                 <a:latin typeface="Calibri"/>
                 <a:ea typeface="Calibri"/>
                 <a:cs typeface="Calibri"/>
@@ -19371,7 +19881,10 @@
               </a:rPr>
               <a:t> </a:t>
             </a:r>
-            <a:endParaRPr sz="1000">
+            <a:endParaRPr sz="1000" b="0" i="0" u="none" strike="noStrike" cap="none">
+              <a:solidFill>
+                <a:srgbClr val="000000"/>
+              </a:solidFill>
               <a:latin typeface="Calibri"/>
               <a:ea typeface="Calibri"/>
               <a:cs typeface="Calibri"/>
@@ -19382,22 +19895,16 @@
       </p:sp>
       <p:pic>
         <p:nvPicPr>
-          <p:cNvPr id="201" name="Google Shape;201;p29"/>
+          <p:cNvPr id="203" name="Google Shape;203;p29"/>
           <p:cNvPicPr preferRelativeResize="0"/>
           <p:nvPr/>
         </p:nvPicPr>
-        <p:blipFill>
-          <a:blip r:embed="rId8" cstate="email">
+        <p:blipFill rotWithShape="1">
+          <a:blip r:embed="rId8">
             <a:alphaModFix/>
-            <a:extLst>
-              <a:ext uri="{28A0092B-C50C-407E-A947-70E740481C1C}">
-                <a14:useLocalDpi xmlns:a14="http://schemas.microsoft.com/office/drawing/2010/main"/>
-              </a:ext>
-            </a:extLst>
           </a:blip>
-          <a:stretch>
-            <a:fillRect/>
-          </a:stretch>
+          <a:srcRect/>
+          <a:stretch/>
         </p:blipFill>
         <p:spPr>
           <a:xfrm>
@@ -19415,22 +19922,16 @@
       </p:pic>
       <p:pic>
         <p:nvPicPr>
-          <p:cNvPr id="202" name="Google Shape;202;p29"/>
+          <p:cNvPr id="204" name="Google Shape;204;p29"/>
           <p:cNvPicPr preferRelativeResize="0"/>
           <p:nvPr/>
         </p:nvPicPr>
-        <p:blipFill>
-          <a:blip r:embed="rId9" cstate="email">
+        <p:blipFill rotWithShape="1">
+          <a:blip r:embed="rId9">
             <a:alphaModFix/>
-            <a:extLst>
-              <a:ext uri="{28A0092B-C50C-407E-A947-70E740481C1C}">
-                <a14:useLocalDpi xmlns:a14="http://schemas.microsoft.com/office/drawing/2010/main"/>
-              </a:ext>
-            </a:extLst>
           </a:blip>
-          <a:stretch>
-            <a:fillRect/>
-          </a:stretch>
+          <a:srcRect/>
+          <a:stretch/>
         </p:blipFill>
         <p:spPr>
           <a:xfrm>
@@ -19448,7 +19949,7 @@
       </p:pic>
       <p:sp>
         <p:nvSpPr>
-          <p:cNvPr id="203" name="Google Shape;203;p29"/>
+          <p:cNvPr id="205" name="Google Shape;205;p29"/>
           <p:cNvSpPr txBox="1"/>
           <p:nvPr/>
         </p:nvSpPr>
@@ -19471,17 +19972,28 @@
           </a:bodyPr>
           <a:lstStyle/>
           <a:p>
-            <a:pPr marL="0" lvl="0" indent="0" algn="ctr" rtl="0">
-              <a:spcBef>
-                <a:spcPts val="0"/>
-              </a:spcBef>
-              <a:spcAft>
-                <a:spcPts val="0"/>
-              </a:spcAft>
-              <a:buNone/>
-            </a:pPr>
-            <a:r>
-              <a:rPr lang="en" sz="1300">
+            <a:pPr marL="0" marR="0" lvl="0" indent="0" algn="ctr" rtl="0">
+              <a:lnSpc>
+                <a:spcPct val="100000"/>
+              </a:lnSpc>
+              <a:spcBef>
+                <a:spcPts val="0"/>
+              </a:spcBef>
+              <a:spcAft>
+                <a:spcPts val="0"/>
+              </a:spcAft>
+              <a:buClr>
+                <a:srgbClr val="000000"/>
+              </a:buClr>
+              <a:buSzPts val="1300"/>
+              <a:buFont typeface="Arial"/>
+              <a:buNone/>
+            </a:pPr>
+            <a:r>
+              <a:rPr lang="en" sz="1300" b="0" i="0" u="none" strike="noStrike" cap="none">
+                <a:solidFill>
+                  <a:srgbClr val="000000"/>
+                </a:solidFill>
                 <a:latin typeface="Calibri"/>
                 <a:ea typeface="Calibri"/>
                 <a:cs typeface="Calibri"/>
@@ -19489,7 +20001,10 @@
               </a:rPr>
               <a:t>Davit Buniatyan</a:t>
             </a:r>
-            <a:endParaRPr sz="1300">
+            <a:endParaRPr sz="1300" b="0" i="0" u="none" strike="noStrike" cap="none">
+              <a:solidFill>
+                <a:srgbClr val="000000"/>
+              </a:solidFill>
               <a:latin typeface="Calibri"/>
               <a:ea typeface="Calibri"/>
               <a:cs typeface="Calibri"/>
@@ -19497,17 +20012,28 @@
             </a:endParaRPr>
           </a:p>
           <a:p>
-            <a:pPr marL="0" lvl="0" indent="0" algn="ctr" rtl="0">
-              <a:spcBef>
-                <a:spcPts val="0"/>
-              </a:spcBef>
-              <a:spcAft>
-                <a:spcPts val="0"/>
-              </a:spcAft>
-              <a:buNone/>
-            </a:pPr>
-            <a:r>
-              <a:rPr lang="en" sz="1300">
+            <a:pPr marL="0" marR="0" lvl="0" indent="0" algn="ctr" rtl="0">
+              <a:lnSpc>
+                <a:spcPct val="100000"/>
+              </a:lnSpc>
+              <a:spcBef>
+                <a:spcPts val="0"/>
+              </a:spcBef>
+              <a:spcAft>
+                <a:spcPts val="0"/>
+              </a:spcAft>
+              <a:buClr>
+                <a:srgbClr val="000000"/>
+              </a:buClr>
+              <a:buSzPts val="1300"/>
+              <a:buFont typeface="Arial"/>
+              <a:buNone/>
+            </a:pPr>
+            <a:r>
+              <a:rPr lang="en" sz="1300" b="0" i="0" u="none" strike="noStrike" cap="none">
+                <a:solidFill>
+                  <a:srgbClr val="000000"/>
+                </a:solidFill>
                 <a:latin typeface="Calibri"/>
                 <a:ea typeface="Calibri"/>
                 <a:cs typeface="Calibri"/>
@@ -19515,7 +20041,10 @@
               </a:rPr>
               <a:t>CEO, co-founder</a:t>
             </a:r>
-            <a:endParaRPr sz="1300">
+            <a:endParaRPr sz="1300" b="0" i="0" u="none" strike="noStrike" cap="none">
+              <a:solidFill>
+                <a:srgbClr val="000000"/>
+              </a:solidFill>
               <a:latin typeface="Calibri"/>
               <a:ea typeface="Calibri"/>
               <a:cs typeface="Calibri"/>
@@ -19537,7 +20066,7 @@
   <p:cSld>
     <p:spTree>
       <p:nvGrpSpPr>
-        <p:cNvPr id="1" name="Shape 207"/>
+        <p:cNvPr id="1" name="Shape 209"/>
         <p:cNvGrpSpPr/>
         <p:nvPr/>
       </p:nvGrpSpPr>
@@ -19551,7 +20080,7 @@
       </p:grpSpPr>
       <p:sp>
         <p:nvSpPr>
-          <p:cNvPr id="208" name="Google Shape;208;p30"/>
+          <p:cNvPr id="210" name="Google Shape;210;p30"/>
           <p:cNvSpPr txBox="1"/>
           <p:nvPr/>
         </p:nvSpPr>
@@ -19617,14 +20146,14 @@
       </p:sp>
       <p:sp>
         <p:nvSpPr>
-          <p:cNvPr id="209" name="Google Shape;209;p30"/>
+          <p:cNvPr id="211" name="Google Shape;211;p30"/>
           <p:cNvSpPr txBox="1"/>
           <p:nvPr/>
         </p:nvSpPr>
         <p:spPr>
           <a:xfrm>
-            <a:off x="810675" y="2272650"/>
-            <a:ext cx="5743800" cy="2355000"/>
+            <a:off x="124875" y="2196450"/>
+            <a:ext cx="5937900" cy="2862900"/>
           </a:xfrm>
           <a:prstGeom prst="rect">
             <a:avLst/>
@@ -19870,6 +20399,54 @@
               </a:rPr>
               <a:t> - Neo4j in 10 min</a:t>
             </a:r>
+            <a:br>
+              <a:rPr lang="en" sz="1000" b="0" i="0" u="none" strike="noStrike" cap="none">
+                <a:solidFill>
+                  <a:srgbClr val="000000"/>
+                </a:solidFill>
+                <a:latin typeface="Calibri"/>
+                <a:ea typeface="Calibri"/>
+                <a:cs typeface="Calibri"/>
+                <a:sym typeface="Calibri"/>
+              </a:rPr>
+            </a:br>
+            <a:r>
+              <a:rPr lang="en" sz="1000" b="0" i="0" u="none" strike="noStrike" cap="none">
+                <a:solidFill>
+                  <a:srgbClr val="000000"/>
+                </a:solidFill>
+                <a:latin typeface="Calibri"/>
+                <a:ea typeface="Calibri"/>
+                <a:cs typeface="Calibri"/>
+                <a:sym typeface="Calibri"/>
+              </a:rPr>
+              <a:t>.. </a:t>
+            </a:r>
+            <a:r>
+              <a:rPr lang="en" sz="1000" b="0" i="0" u="sng" strike="noStrike" cap="none">
+                <a:solidFill>
+                  <a:schemeClr val="hlink"/>
+                </a:solidFill>
+                <a:latin typeface="Calibri"/>
+                <a:ea typeface="Calibri"/>
+                <a:cs typeface="Calibri"/>
+                <a:sym typeface="Calibri"/>
+                <a:hlinkClick r:id="rId7"/>
+              </a:rPr>
+              <a:t>https://medium.com/singapore-gds/from-conventional-rag-to-graph-rag-a0202a1aaca7</a:t>
+            </a:r>
+            <a:r>
+              <a:rPr lang="en" sz="1000" b="0" i="0" u="none" strike="noStrike" cap="none">
+                <a:solidFill>
+                  <a:srgbClr val="000000"/>
+                </a:solidFill>
+                <a:latin typeface="Calibri"/>
+                <a:ea typeface="Calibri"/>
+                <a:cs typeface="Calibri"/>
+                <a:sym typeface="Calibri"/>
+              </a:rPr>
+              <a:t> - DIY example</a:t>
+            </a:r>
             <a:endParaRPr sz="1000" b="0" i="0" u="none" strike="noStrike" cap="none">
               <a:solidFill>
                 <a:srgbClr val="000000"/>
@@ -19931,7 +20508,7 @@
                 <a:ea typeface="Calibri"/>
                 <a:cs typeface="Calibri"/>
                 <a:sym typeface="Calibri"/>
-                <a:hlinkClick r:id="rId7"/>
+                <a:hlinkClick r:id="rId8"/>
               </a:rPr>
               <a:t>https://aws.amazon.com/neptune/</a:t>
             </a:r>
@@ -20008,7 +20585,7 @@
                 <a:ea typeface="Calibri"/>
                 <a:cs typeface="Calibri"/>
                 <a:sym typeface="Calibri"/>
-                <a:hlinkClick r:id="rId8"/>
+                <a:hlinkClick r:id="rId9"/>
               </a:rPr>
               <a:t>https://www.stardog.com</a:t>
             </a:r>
@@ -20143,7 +20720,7 @@
                 <a:ea typeface="Calibri"/>
                 <a:cs typeface="Calibri"/>
                 <a:sym typeface="Calibri"/>
-                <a:hlinkClick r:id="rId9"/>
+                <a:hlinkClick r:id="rId10"/>
               </a:rPr>
               <a:t>https://www.ontotext.com/products/graphdb/</a:t>
             </a:r>
@@ -20188,43 +20765,42 @@
               <a:buChar char="●"/>
             </a:pPr>
             <a:r>
-              <a:rPr lang="en" sz="1300" b="1" i="0" u="none" strike="noStrike" cap="none">
-                <a:solidFill>
-                  <a:srgbClr val="3C78D8"/>
-                </a:solidFill>
-                <a:latin typeface="Calibri"/>
-                <a:ea typeface="Calibri"/>
-                <a:cs typeface="Calibri"/>
-                <a:sym typeface="Calibri"/>
-              </a:rPr>
-              <a:t>Graph Engine Service (GES) on Huawei Cloud</a:t>
-            </a:r>
-            <a:r>
-              <a:rPr lang="en" sz="1300" b="0" i="0" u="none" strike="noStrike" cap="none">
-                <a:solidFill>
-                  <a:srgbClr val="000000"/>
-                </a:solidFill>
-                <a:latin typeface="Calibri"/>
-                <a:ea typeface="Calibri"/>
-                <a:cs typeface="Calibri"/>
-                <a:sym typeface="Calibri"/>
-              </a:rPr>
-              <a:t> - distributed high scale graph DB</a:t>
-            </a:r>
-            <a:r>
-              <a:rPr lang="en" sz="1000" b="0" i="0" u="none" strike="noStrike" cap="none">
-                <a:solidFill>
-                  <a:srgbClr val="000000"/>
-                </a:solidFill>
-                <a:latin typeface="Calibri"/>
-                <a:ea typeface="Calibri"/>
-                <a:cs typeface="Calibri"/>
-                <a:sym typeface="Calibri"/>
-              </a:rPr>
-              <a:t> - </a:t>
-            </a:r>
-            <a:r>
-              <a:rPr lang="en" sz="1000" b="0" i="0" u="sng" strike="noStrike" cap="none">
+              <a:rPr lang="en" sz="1300" b="1">
+                <a:solidFill>
+                  <a:srgbClr val="FF0000"/>
+                </a:solidFill>
+                <a:latin typeface="Calibri"/>
+                <a:ea typeface="Calibri"/>
+                <a:cs typeface="Calibri"/>
+                <a:sym typeface="Calibri"/>
+              </a:rPr>
+              <a:t>NebulaGraph</a:t>
+            </a:r>
+            <a:r>
+              <a:rPr lang="en" sz="1300">
+                <a:solidFill>
+                  <a:schemeClr val="dk1"/>
+                </a:solidFill>
+                <a:latin typeface="Calibri"/>
+                <a:ea typeface="Calibri"/>
+                <a:cs typeface="Calibri"/>
+                <a:sym typeface="Calibri"/>
+              </a:rPr>
+              <a:t> - Graph RAG</a:t>
+            </a:r>
+            <a:br>
+              <a:rPr lang="en" sz="1300">
+                <a:solidFill>
+                  <a:schemeClr val="dk1"/>
+                </a:solidFill>
+                <a:latin typeface="Calibri"/>
+                <a:ea typeface="Calibri"/>
+                <a:cs typeface="Calibri"/>
+                <a:sym typeface="Calibri"/>
+              </a:rPr>
+            </a:br>
+            <a:r>
+              <a:rPr lang="en" sz="1000" u="sng">
                 <a:solidFill>
                   <a:schemeClr val="hlink"/>
                 </a:solidFill>
@@ -20232,14 +20808,14 @@
                 <a:ea typeface="Calibri"/>
                 <a:cs typeface="Calibri"/>
                 <a:sym typeface="Calibri"/>
-                <a:hlinkClick r:id="rId10"/>
-              </a:rPr>
-              <a:t>https://www.huaweicloud.com/intl/en-us/product/ges.html</a:t>
-            </a:r>
-            <a:r>
-              <a:rPr lang="en" sz="1000" b="0" i="0" u="none" strike="noStrike" cap="none">
-                <a:solidFill>
-                  <a:srgbClr val="000000"/>
+                <a:hlinkClick r:id="rId11"/>
+              </a:rPr>
+              <a:t>https://www.nebula-graph.io/posts/graph-RAG</a:t>
+            </a:r>
+            <a:r>
+              <a:rPr lang="en" sz="1000">
+                <a:solidFill>
+                  <a:schemeClr val="dk1"/>
                 </a:solidFill>
                 <a:latin typeface="Calibri"/>
                 <a:ea typeface="Calibri"/>
@@ -20248,9 +20824,9 @@
               </a:rPr>
               <a:t> </a:t>
             </a:r>
-            <a:endParaRPr sz="1000" b="0" i="0" u="none" strike="noStrike" cap="none">
+            <a:endParaRPr sz="1000">
               <a:solidFill>
-                <a:srgbClr val="000000"/>
+                <a:schemeClr val="dk1"/>
               </a:solidFill>
               <a:latin typeface="Calibri"/>
               <a:ea typeface="Calibri"/>
@@ -20258,16 +20834,105 @@
               <a:sym typeface="Calibri"/>
             </a:endParaRPr>
           </a:p>
+          <a:p>
+            <a:pPr marL="228600" marR="0" lvl="0" indent="-196850" algn="l" rtl="0">
+              <a:lnSpc>
+                <a:spcPct val="100000"/>
+              </a:lnSpc>
+              <a:spcBef>
+                <a:spcPts val="0"/>
+              </a:spcBef>
+              <a:spcAft>
+                <a:spcPts val="0"/>
+              </a:spcAft>
+              <a:buClr>
+                <a:srgbClr val="000000"/>
+              </a:buClr>
+              <a:buSzPts val="1300"/>
+              <a:buFont typeface="Calibri"/>
+              <a:buChar char="●"/>
+            </a:pPr>
+            <a:r>
+              <a:rPr lang="en" sz="1300" b="1" i="0" u="none" strike="noStrike" cap="none">
+                <a:solidFill>
+                  <a:srgbClr val="3C78D8"/>
+                </a:solidFill>
+                <a:latin typeface="Calibri"/>
+                <a:ea typeface="Calibri"/>
+                <a:cs typeface="Calibri"/>
+                <a:sym typeface="Calibri"/>
+              </a:rPr>
+              <a:t>Graph Engine Service (GES) on Huawei Cloud</a:t>
+            </a:r>
+            <a:r>
+              <a:rPr lang="en" sz="1300" b="0" i="0" u="none" strike="noStrike" cap="none">
+                <a:solidFill>
+                  <a:srgbClr val="000000"/>
+                </a:solidFill>
+                <a:latin typeface="Calibri"/>
+                <a:ea typeface="Calibri"/>
+                <a:cs typeface="Calibri"/>
+                <a:sym typeface="Calibri"/>
+              </a:rPr>
+              <a:t> - distributed high scale graph DB</a:t>
+            </a:r>
+            <a:r>
+              <a:rPr lang="en" sz="1000" b="0" i="0" u="none" strike="noStrike" cap="none">
+                <a:solidFill>
+                  <a:srgbClr val="000000"/>
+                </a:solidFill>
+                <a:latin typeface="Calibri"/>
+                <a:ea typeface="Calibri"/>
+                <a:cs typeface="Calibri"/>
+                <a:sym typeface="Calibri"/>
+              </a:rPr>
+              <a:t> - </a:t>
+            </a:r>
+            <a:r>
+              <a:rPr lang="en" sz="1000" b="0" i="0" u="sng" strike="noStrike" cap="none">
+                <a:solidFill>
+                  <a:schemeClr val="hlink"/>
+                </a:solidFill>
+                <a:latin typeface="Calibri"/>
+                <a:ea typeface="Calibri"/>
+                <a:cs typeface="Calibri"/>
+                <a:sym typeface="Calibri"/>
+                <a:hlinkClick r:id="rId12"/>
+              </a:rPr>
+              <a:t>https://www.huaweicloud.com/intl/en-us/product/ges.html</a:t>
+            </a:r>
+            <a:r>
+              <a:rPr lang="en" sz="1000" b="0" i="0" u="none" strike="noStrike" cap="none">
+                <a:solidFill>
+                  <a:srgbClr val="000000"/>
+                </a:solidFill>
+                <a:latin typeface="Calibri"/>
+                <a:ea typeface="Calibri"/>
+                <a:cs typeface="Calibri"/>
+                <a:sym typeface="Calibri"/>
+              </a:rPr>
+              <a:t> </a:t>
+            </a:r>
+            <a:endParaRPr sz="1000" b="0" i="0" u="none" strike="noStrike" cap="none">
+              <a:solidFill>
+                <a:srgbClr val="000000"/>
+              </a:solidFill>
+              <a:latin typeface="Calibri"/>
+              <a:ea typeface="Calibri"/>
+              <a:cs typeface="Calibri"/>
+              <a:sym typeface="Calibri"/>
+            </a:endParaRPr>
+          </a:p>
         </p:txBody>
       </p:sp>
       <p:pic>
         <p:nvPicPr>
-          <p:cNvPr id="210" name="Google Shape;210;p30"/>
+          <p:cNvPr id="212" name="Google Shape;212;p30"/>
           <p:cNvPicPr preferRelativeResize="0"/>
           <p:nvPr/>
         </p:nvPicPr>
         <p:blipFill rotWithShape="1">
-          <a:blip r:embed="rId11">
+          <a:blip r:embed="rId13">
             <a:alphaModFix/>
           </a:blip>
           <a:srcRect/>
@@ -20275,7 +20940,7 @@
         </p:blipFill>
         <p:spPr>
           <a:xfrm>
-            <a:off x="5468750" y="807875"/>
+            <a:off x="4782950" y="731675"/>
             <a:ext cx="1313374" cy="883849"/>
           </a:xfrm>
           <a:prstGeom prst="rect">
@@ -20289,13 +20954,13 @@
       </p:pic>
       <p:sp>
         <p:nvSpPr>
-          <p:cNvPr id="211" name="Google Shape;211;p30"/>
+          <p:cNvPr id="213" name="Google Shape;213;p30"/>
           <p:cNvSpPr txBox="1"/>
           <p:nvPr/>
         </p:nvSpPr>
         <p:spPr>
           <a:xfrm>
-            <a:off x="810675" y="506775"/>
+            <a:off x="124875" y="430575"/>
             <a:ext cx="4323600" cy="1493100"/>
           </a:xfrm>
           <a:prstGeom prst="rect">
@@ -20446,7 +21111,7 @@
                 <a:ea typeface="Calibri"/>
                 <a:cs typeface="Calibri"/>
                 <a:sym typeface="Calibri"/>
-                <a:hlinkClick r:id="rId12"/>
+                <a:hlinkClick r:id="rId14"/>
               </a:rPr>
               <a:t>https://www.microsoft.com/en-us/research/blog/graphrag-unlocking-llm-discovery-on-narrative-private-data/</a:t>
             </a:r>
@@ -20487,7 +21152,7 @@
   <p:cSld>
     <p:spTree>
       <p:nvGrpSpPr>
-        <p:cNvPr id="1" name="Shape 215"/>
+        <p:cNvPr id="1" name="Shape 217"/>
         <p:cNvGrpSpPr/>
         <p:nvPr/>
       </p:nvGrpSpPr>
@@ -20501,7 +21166,7 @@
       </p:grpSpPr>
       <p:sp>
         <p:nvSpPr>
-          <p:cNvPr id="216" name="Google Shape;216;p31"/>
+          <p:cNvPr id="218" name="Google Shape;218;p31"/>
           <p:cNvSpPr txBox="1"/>
           <p:nvPr/>
         </p:nvSpPr>
@@ -20542,7 +21207,7 @@
               <a:buNone/>
             </a:pPr>
             <a:r>
-              <a:rPr lang="en" sz="2000" b="1">
+              <a:rPr lang="en" sz="2000" b="1" i="0" u="none" strike="noStrike" cap="none">
                 <a:solidFill>
                   <a:schemeClr val="dk1"/>
                 </a:solidFill>
@@ -20567,7 +21232,7 @@
       </p:sp>
       <p:sp>
         <p:nvSpPr>
-          <p:cNvPr id="217" name="Google Shape;217;p31"/>
+          <p:cNvPr id="219" name="Google Shape;219;p31"/>
           <p:cNvSpPr txBox="1"/>
           <p:nvPr/>
         </p:nvSpPr>
@@ -20616,7 +21281,10 @@
               <a:buNone/>
             </a:pPr>
             <a:r>
-              <a:rPr lang="en" sz="1300">
+              <a:rPr lang="en" sz="1300" b="0" i="0" u="none" strike="noStrike" cap="none">
+                <a:solidFill>
+                  <a:srgbClr val="000000"/>
+                </a:solidFill>
                 <a:latin typeface="Calibri"/>
                 <a:ea typeface="Calibri"/>
                 <a:cs typeface="Calibri"/>
@@ -20624,7 +21292,10 @@
               </a:rPr>
               <a:t>Quantize the Linear layers of a language model without sacrificing performance. This can result in a 70B model running on consumer GPUs. </a:t>
             </a:r>
-            <a:endParaRPr sz="1300">
+            <a:endParaRPr sz="1300" b="0" i="0" u="none" strike="noStrike" cap="none">
+              <a:solidFill>
+                <a:srgbClr val="000000"/>
+              </a:solidFill>
               <a:latin typeface="Calibri"/>
               <a:ea typeface="Calibri"/>
               <a:cs typeface="Calibri"/>
@@ -20649,7 +21320,10 @@
               <a:buFont typeface="Arial"/>
               <a:buNone/>
             </a:pPr>
-            <a:endParaRPr sz="1300">
+            <a:endParaRPr sz="1300" b="0" i="0" u="none" strike="noStrike" cap="none">
+              <a:solidFill>
+                <a:srgbClr val="000000"/>
+              </a:solidFill>
               <a:latin typeface="Calibri"/>
               <a:ea typeface="Calibri"/>
               <a:cs typeface="Calibri"/>
@@ -20675,7 +21349,10 @@
               <a:buNone/>
             </a:pPr>
             <a:r>
-              <a:rPr lang="en" sz="1300">
+              <a:rPr lang="en" sz="1300" b="0" i="0" u="none" strike="noStrike" cap="none">
+                <a:solidFill>
+                  <a:srgbClr val="000000"/>
+                </a:solidFill>
                 <a:latin typeface="Calibri"/>
                 <a:ea typeface="Calibri"/>
                 <a:cs typeface="Calibri"/>
@@ -20683,7 +21360,10 @@
               </a:rPr>
               <a:t>Towards 1-bit Machine Learning Models</a:t>
             </a:r>
-            <a:endParaRPr sz="1300">
+            <a:endParaRPr sz="1300" b="0" i="0" u="none" strike="noStrike" cap="none">
+              <a:solidFill>
+                <a:srgbClr val="000000"/>
+              </a:solidFill>
               <a:latin typeface="Calibri"/>
               <a:ea typeface="Calibri"/>
               <a:cs typeface="Calibri"/>
@@ -20701,12 +21381,15 @@
               <a:spcAft>
                 <a:spcPts val="0"/>
               </a:spcAft>
+              <a:buClr>
+                <a:srgbClr val="000000"/>
+              </a:buClr>
               <a:buSzPts val="1000"/>
               <a:buFont typeface="Calibri"/>
               <a:buChar char="●"/>
             </a:pPr>
             <a:r>
-              <a:rPr lang="en" sz="1000" u="sng">
+              <a:rPr lang="en" sz="1000" b="0" i="0" u="sng" strike="noStrike" cap="none">
                 <a:solidFill>
                   <a:schemeClr val="hlink"/>
                 </a:solidFill>
@@ -20718,7 +21401,10 @@
               </a:rPr>
               <a:t>https://mobiusml.github.io/1bit_blog/</a:t>
             </a:r>
-            <a:endParaRPr sz="1000">
+            <a:endParaRPr sz="1000" b="0" i="0" u="none" strike="noStrike" cap="none">
+              <a:solidFill>
+                <a:srgbClr val="000000"/>
+              </a:solidFill>
               <a:latin typeface="Calibri"/>
               <a:ea typeface="Calibri"/>
               <a:cs typeface="Calibri"/>
@@ -20736,12 +21422,15 @@
               <a:spcAft>
                 <a:spcPts val="0"/>
               </a:spcAft>
+              <a:buClr>
+                <a:srgbClr val="000000"/>
+              </a:buClr>
               <a:buSzPts val="1000"/>
               <a:buFont typeface="Calibri"/>
               <a:buChar char="●"/>
             </a:pPr>
             <a:r>
-              <a:rPr lang="en" sz="1000" u="sng">
+              <a:rPr lang="en" sz="1000" b="0" i="0" u="sng" strike="noStrike" cap="none">
                 <a:solidFill>
                   <a:schemeClr val="hlink"/>
                 </a:solidFill>
@@ -20754,7 +21443,10 @@
               <a:t>https://huggingface.co/mobiuslabsgmbh/Llama-2-7b-chat-hf_1bitgs8_hqq</a:t>
             </a:r>
             <a:r>
-              <a:rPr lang="en" sz="1000">
+              <a:rPr lang="en" sz="1000" b="0" i="0" u="none" strike="noStrike" cap="none">
+                <a:solidFill>
+                  <a:srgbClr val="000000"/>
+                </a:solidFill>
                 <a:latin typeface="Calibri"/>
                 <a:ea typeface="Calibri"/>
                 <a:cs typeface="Calibri"/>
@@ -20762,7 +21454,10 @@
               </a:rPr>
               <a:t> </a:t>
             </a:r>
-            <a:endParaRPr sz="1000">
+            <a:endParaRPr sz="1000" b="0" i="0" u="none" strike="noStrike" cap="none">
+              <a:solidFill>
+                <a:srgbClr val="000000"/>
+              </a:solidFill>
               <a:latin typeface="Calibri"/>
               <a:ea typeface="Calibri"/>
               <a:cs typeface="Calibri"/>
@@ -20780,12 +21475,15 @@
               <a:spcAft>
                 <a:spcPts val="0"/>
               </a:spcAft>
+              <a:buClr>
+                <a:srgbClr val="000000"/>
+              </a:buClr>
               <a:buSzPts val="1000"/>
               <a:buFont typeface="Calibri"/>
               <a:buChar char="●"/>
             </a:pPr>
             <a:r>
-              <a:rPr lang="en" sz="1000" u="sng">
+              <a:rPr lang="en" sz="1000" b="0" i="0" u="sng" strike="noStrike" cap="none">
                 <a:solidFill>
                   <a:schemeClr val="hlink"/>
                 </a:solidFill>
@@ -20798,7 +21496,10 @@
               <a:t>https://huggingface.co/mobiuslabsgmbh/Llama-2-7b-chat-hf_2bitgs8_hqq</a:t>
             </a:r>
             <a:r>
-              <a:rPr lang="en" sz="1000">
+              <a:rPr lang="en" sz="1000" b="0" i="0" u="none" strike="noStrike" cap="none">
+                <a:solidFill>
+                  <a:srgbClr val="000000"/>
+                </a:solidFill>
                 <a:latin typeface="Calibri"/>
                 <a:ea typeface="Calibri"/>
                 <a:cs typeface="Calibri"/>
@@ -20806,7 +21507,10 @@
               </a:rPr>
               <a:t> </a:t>
             </a:r>
-            <a:endParaRPr sz="1000">
+            <a:endParaRPr sz="1000" b="0" i="0" u="none" strike="noStrike" cap="none">
+              <a:solidFill>
+                <a:srgbClr val="000000"/>
+              </a:solidFill>
               <a:latin typeface="Calibri"/>
               <a:ea typeface="Calibri"/>
               <a:cs typeface="Calibri"/>
@@ -20817,22 +21521,16 @@
       </p:sp>
       <p:pic>
         <p:nvPicPr>
-          <p:cNvPr id="218" name="Google Shape;218;p31"/>
+          <p:cNvPr id="220" name="Google Shape;220;p31"/>
           <p:cNvPicPr preferRelativeResize="0"/>
           <p:nvPr/>
         </p:nvPicPr>
-        <p:blipFill>
-          <a:blip r:embed="rId6" cstate="email">
+        <p:blipFill rotWithShape="1">
+          <a:blip r:embed="rId6">
             <a:alphaModFix/>
-            <a:extLst>
-              <a:ext uri="{28A0092B-C50C-407E-A947-70E740481C1C}">
-                <a14:useLocalDpi xmlns:a14="http://schemas.microsoft.com/office/drawing/2010/main"/>
-              </a:ext>
-            </a:extLst>
           </a:blip>
-          <a:stretch>
-            <a:fillRect/>
-          </a:stretch>
+          <a:srcRect/>
+          <a:stretch/>
         </p:blipFill>
         <p:spPr>
           <a:xfrm>
@@ -20861,7 +21559,7 @@
   <p:cSld>
     <p:spTree>
       <p:nvGrpSpPr>
-        <p:cNvPr id="1" name="Shape 60"/>
+        <p:cNvPr id="1" name="Shape 62"/>
         <p:cNvGrpSpPr/>
         <p:nvPr/>
       </p:nvGrpSpPr>
@@ -20875,7 +21573,7 @@
       </p:grpSpPr>
       <p:sp>
         <p:nvSpPr>
-          <p:cNvPr id="61" name="Google Shape;61;p14"/>
+          <p:cNvPr id="63" name="Google Shape;63;p14"/>
           <p:cNvSpPr txBox="1"/>
           <p:nvPr/>
         </p:nvSpPr>
@@ -20941,7 +21639,7 @@
       </p:sp>
       <p:sp>
         <p:nvSpPr>
-          <p:cNvPr id="62" name="Google Shape;62;p14"/>
+          <p:cNvPr id="64" name="Google Shape;64;p14"/>
           <p:cNvSpPr txBox="1"/>
           <p:nvPr/>
         </p:nvSpPr>
@@ -21336,7 +22034,7 @@
       </p:sp>
       <p:pic>
         <p:nvPicPr>
-          <p:cNvPr id="63" name="Google Shape;63;p14"/>
+          <p:cNvPr id="65" name="Google Shape;65;p14"/>
           <p:cNvPicPr preferRelativeResize="0"/>
           <p:nvPr/>
         </p:nvPicPr>
@@ -21369,7 +22067,7 @@
       </p:pic>
       <p:pic>
         <p:nvPicPr>
-          <p:cNvPr id="64" name="Google Shape;64;p14"/>
+          <p:cNvPr id="66" name="Google Shape;66;p14"/>
           <p:cNvPicPr preferRelativeResize="0"/>
           <p:nvPr/>
         </p:nvPicPr>
@@ -21402,7 +22100,7 @@
       </p:pic>
       <p:pic>
         <p:nvPicPr>
-          <p:cNvPr id="65" name="Google Shape;65;p14"/>
+          <p:cNvPr id="67" name="Google Shape;67;p14"/>
           <p:cNvPicPr preferRelativeResize="0"/>
           <p:nvPr/>
         </p:nvPicPr>
@@ -21429,7 +22127,7 @@
       </p:pic>
       <p:sp>
         <p:nvSpPr>
-          <p:cNvPr id="66" name="Google Shape;66;p14"/>
+          <p:cNvPr id="68" name="Google Shape;68;p14"/>
           <p:cNvSpPr txBox="1"/>
           <p:nvPr/>
         </p:nvSpPr>
@@ -21543,7 +22241,7 @@
       </p:sp>
       <p:sp>
         <p:nvSpPr>
-          <p:cNvPr id="67" name="Google Shape;67;p14"/>
+          <p:cNvPr id="69" name="Google Shape;69;p14"/>
           <p:cNvSpPr txBox="1"/>
           <p:nvPr/>
         </p:nvSpPr>
@@ -21668,7 +22366,7 @@
   <p:cSld>
     <p:spTree>
       <p:nvGrpSpPr>
-        <p:cNvPr id="1" name="Shape 222"/>
+        <p:cNvPr id="1" name="Shape 224"/>
         <p:cNvGrpSpPr/>
         <p:nvPr/>
       </p:nvGrpSpPr>
@@ -21682,7 +22380,7 @@
       </p:grpSpPr>
       <p:sp>
         <p:nvSpPr>
-          <p:cNvPr id="223" name="Google Shape;223;p32"/>
+          <p:cNvPr id="225" name="Google Shape;225;p32"/>
           <p:cNvSpPr txBox="1"/>
           <p:nvPr/>
         </p:nvSpPr>
@@ -21828,7 +22526,7 @@
       </p:sp>
       <p:sp>
         <p:nvSpPr>
-          <p:cNvPr id="224" name="Google Shape;224;p32"/>
+          <p:cNvPr id="226" name="Google Shape;226;p32"/>
           <p:cNvSpPr txBox="1"/>
           <p:nvPr/>
         </p:nvSpPr>
@@ -21942,7 +22640,7 @@
       </p:sp>
       <p:sp>
         <p:nvSpPr>
-          <p:cNvPr id="225" name="Google Shape;225;p32"/>
+          <p:cNvPr id="227" name="Google Shape;227;p32"/>
           <p:cNvSpPr txBox="1"/>
           <p:nvPr/>
         </p:nvSpPr>
@@ -22008,7 +22706,7 @@
       </p:sp>
       <p:sp>
         <p:nvSpPr>
-          <p:cNvPr id="226" name="Google Shape;226;p32"/>
+          <p:cNvPr id="228" name="Google Shape;228;p32"/>
           <p:cNvSpPr txBox="1"/>
           <p:nvPr/>
         </p:nvSpPr>
@@ -22087,7 +22785,7 @@
       </p:sp>
       <p:sp>
         <p:nvSpPr>
-          <p:cNvPr id="227" name="Google Shape;227;p32"/>
+          <p:cNvPr id="229" name="Google Shape;229;p32"/>
           <p:cNvSpPr txBox="1"/>
           <p:nvPr/>
         </p:nvSpPr>
@@ -22161,7 +22859,7 @@
       </p:sp>
       <p:sp>
         <p:nvSpPr>
-          <p:cNvPr id="228" name="Google Shape;228;p32"/>
+          <p:cNvPr id="230" name="Google Shape;230;p32"/>
           <p:cNvSpPr txBox="1"/>
           <p:nvPr/>
         </p:nvSpPr>
@@ -22235,7 +22933,7 @@
       </p:sp>
       <p:sp>
         <p:nvSpPr>
-          <p:cNvPr id="229" name="Google Shape;229;p32"/>
+          <p:cNvPr id="231" name="Google Shape;231;p32"/>
           <p:cNvSpPr txBox="1"/>
           <p:nvPr/>
         </p:nvSpPr>
@@ -22309,7 +23007,7 @@
       </p:sp>
       <p:pic>
         <p:nvPicPr>
-          <p:cNvPr id="230" name="Google Shape;230;p32"/>
+          <p:cNvPr id="232" name="Google Shape;232;p32"/>
           <p:cNvPicPr preferRelativeResize="0"/>
           <p:nvPr/>
         </p:nvPicPr>
@@ -22336,7 +23034,7 @@
       </p:pic>
       <p:pic>
         <p:nvPicPr>
-          <p:cNvPr id="231" name="Google Shape;231;p32"/>
+          <p:cNvPr id="233" name="Google Shape;233;p32"/>
           <p:cNvPicPr preferRelativeResize="0"/>
           <p:nvPr/>
         </p:nvPicPr>
@@ -22374,7 +23072,7 @@
   <p:cSld>
     <p:spTree>
       <p:nvGrpSpPr>
-        <p:cNvPr id="1" name="Shape 235"/>
+        <p:cNvPr id="1" name="Shape 237"/>
         <p:cNvGrpSpPr/>
         <p:nvPr/>
       </p:nvGrpSpPr>
@@ -22388,7 +23086,7 @@
       </p:grpSpPr>
       <p:sp>
         <p:nvSpPr>
-          <p:cNvPr id="236" name="Google Shape;236;p33"/>
+          <p:cNvPr id="238" name="Google Shape;238;p33"/>
           <p:cNvSpPr txBox="1"/>
           <p:nvPr/>
         </p:nvSpPr>
@@ -22454,7 +23152,7 @@
       </p:sp>
       <p:sp>
         <p:nvSpPr>
-          <p:cNvPr id="237" name="Google Shape;237;p33"/>
+          <p:cNvPr id="239" name="Google Shape;239;p33"/>
           <p:cNvSpPr txBox="1"/>
           <p:nvPr/>
         </p:nvSpPr>
@@ -22545,7 +23243,7 @@
       </p:sp>
       <p:sp>
         <p:nvSpPr>
-          <p:cNvPr id="238" name="Google Shape;238;p33"/>
+          <p:cNvPr id="240" name="Google Shape;240;p33"/>
           <p:cNvSpPr txBox="1"/>
           <p:nvPr/>
         </p:nvSpPr>
@@ -22660,12 +23358,18 @@
               <a:spcAft>
                 <a:spcPts val="0"/>
               </a:spcAft>
+              <a:buClr>
+                <a:srgbClr val="000000"/>
+              </a:buClr>
               <a:buSzPts val="1200"/>
               <a:buFont typeface="Calibri"/>
               <a:buChar char="●"/>
             </a:pPr>
             <a:r>
-              <a:rPr lang="en" sz="1200">
+              <a:rPr lang="en" sz="1200" b="0" i="0" u="none" strike="noStrike" cap="none">
+                <a:solidFill>
+                  <a:srgbClr val="000000"/>
+                </a:solidFill>
                 <a:latin typeface="Calibri"/>
                 <a:ea typeface="Calibri"/>
                 <a:cs typeface="Calibri"/>
@@ -22674,7 +23378,7 @@
               <a:t>AI has a talent shortage, meaning </a:t>
             </a:r>
             <a:r>
-              <a:rPr lang="en" sz="1200" b="1">
+              <a:rPr lang="en" sz="1200" b="1" i="0" u="none" strike="noStrike" cap="none">
                 <a:solidFill>
                   <a:srgbClr val="FF0000"/>
                 </a:solidFill>
@@ -22686,7 +23390,10 @@
               <a:t>$1 Mln salary job offers! </a:t>
             </a:r>
             <a:r>
-              <a:rPr lang="en" sz="1200">
+              <a:rPr lang="en" sz="1200" b="0" i="0" u="none" strike="noStrike" cap="none">
+                <a:solidFill>
+                  <a:srgbClr val="000000"/>
+                </a:solidFill>
                 <a:latin typeface="Calibri"/>
                 <a:ea typeface="Calibri"/>
                 <a:cs typeface="Calibri"/>
@@ -22695,7 +23402,10 @@
               <a:t>Even during tech layoffs</a:t>
             </a:r>
             <a:br>
-              <a:rPr lang="en" sz="1200">
+              <a:rPr lang="en" sz="1200" b="0" i="0" u="none" strike="noStrike" cap="none">
+                <a:solidFill>
+                  <a:srgbClr val="000000"/>
+                </a:solidFill>
                 <a:latin typeface="Calibri"/>
                 <a:ea typeface="Calibri"/>
                 <a:cs typeface="Calibri"/>
@@ -22703,7 +23413,7 @@
               </a:rPr>
             </a:br>
             <a:r>
-              <a:rPr lang="en" sz="1200" u="sng">
+              <a:rPr lang="en" sz="1200" b="0" i="0" u="sng" strike="noStrike" cap="none">
                 <a:solidFill>
                   <a:schemeClr val="hlink"/>
                 </a:solidFill>
@@ -22716,7 +23426,10 @@
               <a:t>https://qz.com/tech-layoffs-high-ai-struggling-find-talent-1851368861</a:t>
             </a:r>
             <a:r>
-              <a:rPr lang="en" sz="1200">
+              <a:rPr lang="en" sz="1200" b="0" i="0" u="none" strike="noStrike" cap="none">
+                <a:solidFill>
+                  <a:srgbClr val="000000"/>
+                </a:solidFill>
                 <a:latin typeface="Calibri"/>
                 <a:ea typeface="Calibri"/>
                 <a:cs typeface="Calibri"/>
@@ -22724,7 +23437,10 @@
               </a:rPr>
               <a:t> </a:t>
             </a:r>
-            <a:endParaRPr sz="1200">
+            <a:endParaRPr sz="1200" b="0" i="0" u="none" strike="noStrike" cap="none">
+              <a:solidFill>
+                <a:srgbClr val="000000"/>
+              </a:solidFill>
               <a:latin typeface="Calibri"/>
               <a:ea typeface="Calibri"/>
               <a:cs typeface="Calibri"/>
@@ -22735,7 +23451,7 @@
       </p:sp>
       <p:pic>
         <p:nvPicPr>
-          <p:cNvPr id="239" name="Google Shape;239;p33"/>
+          <p:cNvPr id="241" name="Google Shape;241;p33"/>
           <p:cNvPicPr preferRelativeResize="0"/>
           <p:nvPr/>
         </p:nvPicPr>
@@ -22773,7 +23489,7 @@
   <p:cSld>
     <p:spTree>
       <p:nvGrpSpPr>
-        <p:cNvPr id="1" name="Shape 243"/>
+        <p:cNvPr id="1" name="Shape 245"/>
         <p:cNvGrpSpPr/>
         <p:nvPr/>
       </p:nvGrpSpPr>
@@ -22787,7 +23503,7 @@
       </p:grpSpPr>
       <p:pic>
         <p:nvPicPr>
-          <p:cNvPr id="244" name="Google Shape;244;p34"/>
+          <p:cNvPr id="246" name="Google Shape;246;p34"/>
           <p:cNvPicPr preferRelativeResize="0"/>
           <p:nvPr/>
         </p:nvPicPr>
@@ -22814,7 +23530,7 @@
       </p:pic>
       <p:sp>
         <p:nvSpPr>
-          <p:cNvPr id="245" name="Google Shape;245;p34"/>
+          <p:cNvPr id="247" name="Google Shape;247;p34"/>
           <p:cNvSpPr txBox="1"/>
           <p:nvPr/>
         </p:nvSpPr>
@@ -22880,7 +23596,7 @@
       </p:sp>
       <p:sp>
         <p:nvSpPr>
-          <p:cNvPr id="246" name="Google Shape;246;p34"/>
+          <p:cNvPr id="248" name="Google Shape;248;p34"/>
           <p:cNvSpPr txBox="1"/>
           <p:nvPr/>
         </p:nvSpPr>
@@ -23310,7 +24026,7 @@
       </p:sp>
       <p:pic>
         <p:nvPicPr>
-          <p:cNvPr id="247" name="Google Shape;247;p34"/>
+          <p:cNvPr id="249" name="Google Shape;249;p34"/>
           <p:cNvPicPr preferRelativeResize="0"/>
           <p:nvPr/>
         </p:nvPicPr>
@@ -23342,7 +24058,7 @@
       </p:pic>
       <p:sp>
         <p:nvSpPr>
-          <p:cNvPr id="248" name="Google Shape;248;p34"/>
+          <p:cNvPr id="250" name="Google Shape;250;p34"/>
           <p:cNvSpPr txBox="1"/>
           <p:nvPr/>
         </p:nvSpPr>
@@ -23421,7 +24137,7 @@
       </p:sp>
       <p:sp>
         <p:nvSpPr>
-          <p:cNvPr id="249" name="Google Shape;249;p34"/>
+          <p:cNvPr id="251" name="Google Shape;251;p34"/>
           <p:cNvSpPr txBox="1"/>
           <p:nvPr/>
         </p:nvSpPr>
@@ -23498,7 +24214,7 @@
   <p:cSld>
     <p:spTree>
       <p:nvGrpSpPr>
-        <p:cNvPr id="1" name="Shape 253"/>
+        <p:cNvPr id="1" name="Shape 255"/>
         <p:cNvGrpSpPr/>
         <p:nvPr/>
       </p:nvGrpSpPr>
@@ -23512,7 +24228,7 @@
       </p:grpSpPr>
       <p:sp>
         <p:nvSpPr>
-          <p:cNvPr id="254" name="Google Shape;254;p35"/>
+          <p:cNvPr id="256" name="Google Shape;256;p35"/>
           <p:cNvSpPr txBox="1"/>
           <p:nvPr/>
         </p:nvSpPr>
@@ -23589,7 +24305,7 @@
   <p:cSld>
     <p:spTree>
       <p:nvGrpSpPr>
-        <p:cNvPr id="1" name="Shape 71"/>
+        <p:cNvPr id="1" name="Shape 73"/>
         <p:cNvGrpSpPr/>
         <p:nvPr/>
       </p:nvGrpSpPr>
@@ -23603,7 +24319,7 @@
       </p:grpSpPr>
       <p:sp>
         <p:nvSpPr>
-          <p:cNvPr id="72" name="Google Shape;72;p15"/>
+          <p:cNvPr id="74" name="Google Shape;74;p15"/>
           <p:cNvSpPr txBox="1"/>
           <p:nvPr/>
         </p:nvSpPr>
@@ -23669,7 +24385,7 @@
       </p:sp>
       <p:sp>
         <p:nvSpPr>
-          <p:cNvPr id="73" name="Google Shape;73;p15"/>
+          <p:cNvPr id="75" name="Google Shape;75;p15"/>
           <p:cNvSpPr txBox="1"/>
           <p:nvPr/>
         </p:nvSpPr>
@@ -24066,7 +24782,7 @@
       </p:sp>
       <p:pic>
         <p:nvPicPr>
-          <p:cNvPr id="74" name="Google Shape;74;p15"/>
+          <p:cNvPr id="76" name="Google Shape;76;p15"/>
           <p:cNvPicPr preferRelativeResize="0"/>
           <p:nvPr/>
         </p:nvPicPr>
@@ -24093,7 +24809,7 @@
       </p:pic>
       <p:pic>
         <p:nvPicPr>
-          <p:cNvPr id="75" name="Google Shape;75;p15"/>
+          <p:cNvPr id="77" name="Google Shape;77;p15"/>
           <p:cNvPicPr preferRelativeResize="0"/>
           <p:nvPr/>
         </p:nvPicPr>
@@ -24120,7 +24836,7 @@
       </p:pic>
       <p:sp>
         <p:nvSpPr>
-          <p:cNvPr id="76" name="Google Shape;76;p15"/>
+          <p:cNvPr id="78" name="Google Shape;78;p15"/>
           <p:cNvSpPr txBox="1"/>
           <p:nvPr/>
         </p:nvSpPr>
@@ -24396,7 +25112,7 @@
   <p:cSld>
     <p:spTree>
       <p:nvGrpSpPr>
-        <p:cNvPr id="1" name="Shape 80"/>
+        <p:cNvPr id="1" name="Shape 82"/>
         <p:cNvGrpSpPr/>
         <p:nvPr/>
       </p:nvGrpSpPr>
@@ -24410,7 +25126,7 @@
       </p:grpSpPr>
       <p:sp>
         <p:nvSpPr>
-          <p:cNvPr id="81" name="Google Shape;81;p16"/>
+          <p:cNvPr id="83" name="Google Shape;83;p16"/>
           <p:cNvSpPr txBox="1"/>
           <p:nvPr/>
         </p:nvSpPr>
@@ -24476,7 +25192,7 @@
       </p:sp>
       <p:sp>
         <p:nvSpPr>
-          <p:cNvPr id="82" name="Google Shape;82;p16"/>
+          <p:cNvPr id="84" name="Google Shape;84;p16"/>
           <p:cNvSpPr txBox="1"/>
           <p:nvPr/>
         </p:nvSpPr>
@@ -24976,7 +25692,7 @@
       </p:sp>
       <p:pic>
         <p:nvPicPr>
-          <p:cNvPr id="83" name="Google Shape;83;p16"/>
+          <p:cNvPr id="85" name="Google Shape;85;p16"/>
           <p:cNvPicPr preferRelativeResize="0"/>
           <p:nvPr/>
         </p:nvPicPr>
@@ -25003,7 +25719,7 @@
       </p:pic>
       <p:pic>
         <p:nvPicPr>
-          <p:cNvPr id="84" name="Google Shape;84;p16"/>
+          <p:cNvPr id="86" name="Google Shape;86;p16"/>
           <p:cNvPicPr preferRelativeResize="0"/>
           <p:nvPr/>
         </p:nvPicPr>
@@ -25030,7 +25746,7 @@
       </p:pic>
       <p:sp>
         <p:nvSpPr>
-          <p:cNvPr id="85" name="Google Shape;85;p16"/>
+          <p:cNvPr id="87" name="Google Shape;87;p16"/>
           <p:cNvSpPr txBox="1"/>
           <p:nvPr/>
         </p:nvSpPr>
@@ -25096,7 +25812,7 @@
       </p:sp>
       <p:sp>
         <p:nvSpPr>
-          <p:cNvPr id="86" name="Google Shape;86;p16"/>
+          <p:cNvPr id="88" name="Google Shape;88;p16"/>
           <p:cNvSpPr txBox="1"/>
           <p:nvPr/>
         </p:nvSpPr>
@@ -25162,7 +25878,7 @@
       </p:sp>
       <p:pic>
         <p:nvPicPr>
-          <p:cNvPr id="87" name="Google Shape;87;p16"/>
+          <p:cNvPr id="89" name="Google Shape;89;p16"/>
           <p:cNvPicPr preferRelativeResize="0"/>
           <p:nvPr/>
         </p:nvPicPr>
@@ -25189,7 +25905,7 @@
       </p:pic>
       <p:sp>
         <p:nvSpPr>
-          <p:cNvPr id="88" name="Google Shape;88;p16"/>
+          <p:cNvPr id="90" name="Google Shape;90;p16"/>
           <p:cNvSpPr txBox="1"/>
           <p:nvPr/>
         </p:nvSpPr>
@@ -25255,7 +25971,7 @@
       </p:sp>
       <p:sp>
         <p:nvSpPr>
-          <p:cNvPr id="89" name="Google Shape;89;p16"/>
+          <p:cNvPr id="91" name="Google Shape;91;p16"/>
           <p:cNvSpPr txBox="1"/>
           <p:nvPr/>
         </p:nvSpPr>
@@ -25332,7 +26048,7 @@
   <p:cSld>
     <p:spTree>
       <p:nvGrpSpPr>
-        <p:cNvPr id="1" name="Shape 93"/>
+        <p:cNvPr id="1" name="Shape 95"/>
         <p:cNvGrpSpPr/>
         <p:nvPr/>
       </p:nvGrpSpPr>
@@ -25346,7 +26062,7 @@
       </p:grpSpPr>
       <p:sp>
         <p:nvSpPr>
-          <p:cNvPr id="94" name="Google Shape;94;p17"/>
+          <p:cNvPr id="96" name="Google Shape;96;p17"/>
           <p:cNvSpPr txBox="1"/>
           <p:nvPr/>
         </p:nvSpPr>
@@ -25412,7 +26128,7 @@
       </p:sp>
       <p:sp>
         <p:nvSpPr>
-          <p:cNvPr id="95" name="Google Shape;95;p17"/>
+          <p:cNvPr id="97" name="Google Shape;97;p17"/>
           <p:cNvSpPr txBox="1"/>
           <p:nvPr/>
         </p:nvSpPr>
@@ -26139,7 +26855,7 @@
       </p:sp>
       <p:pic>
         <p:nvPicPr>
-          <p:cNvPr id="96" name="Google Shape;96;p17"/>
+          <p:cNvPr id="98" name="Google Shape;98;p17"/>
           <p:cNvPicPr preferRelativeResize="0"/>
           <p:nvPr/>
         </p:nvPicPr>
@@ -26166,7 +26882,7 @@
       </p:pic>
       <p:pic>
         <p:nvPicPr>
-          <p:cNvPr id="97" name="Google Shape;97;p17"/>
+          <p:cNvPr id="99" name="Google Shape;99;p17"/>
           <p:cNvPicPr preferRelativeResize="0"/>
           <p:nvPr/>
         </p:nvPicPr>
@@ -26193,7 +26909,7 @@
       </p:pic>
       <p:pic>
         <p:nvPicPr>
-          <p:cNvPr id="98" name="Google Shape;98;p17"/>
+          <p:cNvPr id="100" name="Google Shape;100;p17"/>
           <p:cNvPicPr preferRelativeResize="0"/>
           <p:nvPr/>
         </p:nvPicPr>
@@ -26231,7 +26947,7 @@
   <p:cSld>
     <p:spTree>
       <p:nvGrpSpPr>
-        <p:cNvPr id="1" name="Shape 102"/>
+        <p:cNvPr id="1" name="Shape 104"/>
         <p:cNvGrpSpPr/>
         <p:nvPr/>
       </p:nvGrpSpPr>
@@ -26245,7 +26961,7 @@
       </p:grpSpPr>
       <p:sp>
         <p:nvSpPr>
-          <p:cNvPr id="103" name="Google Shape;103;p18"/>
+          <p:cNvPr id="105" name="Google Shape;105;p18"/>
           <p:cNvSpPr txBox="1"/>
           <p:nvPr/>
         </p:nvSpPr>
@@ -26311,7 +27027,7 @@
       </p:sp>
       <p:sp>
         <p:nvSpPr>
-          <p:cNvPr id="104" name="Google Shape;104;p18"/>
+          <p:cNvPr id="106" name="Google Shape;106;p18"/>
           <p:cNvSpPr txBox="1"/>
           <p:nvPr/>
         </p:nvSpPr>
@@ -26505,7 +27221,7 @@
       </p:sp>
       <p:sp>
         <p:nvSpPr>
-          <p:cNvPr id="105" name="Google Shape;105;p18"/>
+          <p:cNvPr id="107" name="Google Shape;107;p18"/>
           <p:cNvSpPr txBox="1"/>
           <p:nvPr/>
         </p:nvSpPr>
@@ -26633,7 +27349,7 @@
       </p:sp>
       <p:pic>
         <p:nvPicPr>
-          <p:cNvPr id="106" name="Google Shape;106;p18"/>
+          <p:cNvPr id="108" name="Google Shape;108;p18"/>
           <p:cNvPicPr preferRelativeResize="0"/>
           <p:nvPr/>
         </p:nvPicPr>
@@ -26660,7 +27376,7 @@
       </p:pic>
       <p:pic>
         <p:nvPicPr>
-          <p:cNvPr id="107" name="Google Shape;107;p18"/>
+          <p:cNvPr id="109" name="Google Shape;109;p18"/>
           <p:cNvPicPr preferRelativeResize="0"/>
           <p:nvPr/>
         </p:nvPicPr>
@@ -26687,7 +27403,7 @@
       </p:pic>
       <p:pic>
         <p:nvPicPr>
-          <p:cNvPr id="108" name="Google Shape;108;p18"/>
+          <p:cNvPr id="110" name="Google Shape;110;p18"/>
           <p:cNvPicPr preferRelativeResize="0"/>
           <p:nvPr/>
         </p:nvPicPr>
@@ -26725,7 +27441,7 @@
   <p:cSld>
     <p:spTree>
       <p:nvGrpSpPr>
-        <p:cNvPr id="1" name="Shape 112"/>
+        <p:cNvPr id="1" name="Shape 114"/>
         <p:cNvGrpSpPr/>
         <p:nvPr/>
       </p:nvGrpSpPr>
@@ -26739,7 +27455,7 @@
       </p:grpSpPr>
       <p:sp>
         <p:nvSpPr>
-          <p:cNvPr id="113" name="Google Shape;113;p19"/>
+          <p:cNvPr id="115" name="Google Shape;115;p19"/>
           <p:cNvSpPr txBox="1"/>
           <p:nvPr/>
         </p:nvSpPr>
@@ -26805,7 +27521,7 @@
       </p:sp>
       <p:sp>
         <p:nvSpPr>
-          <p:cNvPr id="114" name="Google Shape;114;p19"/>
+          <p:cNvPr id="116" name="Google Shape;116;p19"/>
           <p:cNvSpPr txBox="1"/>
           <p:nvPr/>
         </p:nvSpPr>
@@ -26854,7 +27570,7 @@
               <a:buNone/>
             </a:pPr>
             <a:r>
-              <a:rPr lang="en" sz="1300" b="1" i="0" u="none" strike="noStrike" cap="none" dirty="0">
+              <a:rPr lang="en" sz="1300" b="1" i="0" u="none" strike="noStrike" cap="none">
                 <a:solidFill>
                   <a:srgbClr val="FF0000"/>
                 </a:solidFill>
@@ -26866,7 +27582,7 @@
               <a:t>DBRX</a:t>
             </a:r>
             <a:r>
-              <a:rPr lang="en" sz="1300" b="0" i="0" u="none" strike="noStrike" cap="none" dirty="0">
+              <a:rPr lang="en" sz="1300" b="0" i="0" u="none" strike="noStrike" cap="none">
                 <a:solidFill>
                   <a:srgbClr val="000000"/>
                 </a:solidFill>
@@ -26877,7 +27593,7 @@
               </a:rPr>
               <a:t> - new open-source LLM from Databricks' Mosaic team.</a:t>
             </a:r>
-            <a:endParaRPr sz="1300" b="0" i="0" u="none" strike="noStrike" cap="none" dirty="0">
+            <a:endParaRPr sz="1300" b="0" i="0" u="none" strike="noStrike" cap="none">
               <a:solidFill>
                 <a:srgbClr val="000000"/>
               </a:solidFill>
@@ -26905,7 +27621,7 @@
               <a:buFont typeface="Arial"/>
               <a:buNone/>
             </a:pPr>
-            <a:endParaRPr sz="1300" b="0" i="0" u="none" strike="noStrike" cap="none" dirty="0">
+            <a:endParaRPr sz="1300" b="0" i="0" u="none" strike="noStrike" cap="none">
               <a:solidFill>
                 <a:srgbClr val="000000"/>
               </a:solidFill>
@@ -26934,7 +27650,7 @@
               <a:buChar char="●"/>
             </a:pPr>
             <a:r>
-              <a:rPr lang="en" sz="1300" b="0" i="0" u="none" strike="noStrike" cap="none" dirty="0">
+              <a:rPr lang="en" sz="1300" b="0" i="0" u="none" strike="noStrike" cap="none">
                 <a:solidFill>
                   <a:schemeClr val="dk1"/>
                 </a:solidFill>
@@ -26943,21 +27659,9 @@
                 <a:cs typeface="Calibri"/>
                 <a:sym typeface="Calibri"/>
               </a:rPr>
-              <a:t>Better than Llama-2, Grok, and </a:t>
-            </a:r>
-            <a:r>
-              <a:rPr lang="en" sz="1300" b="0" i="0" u="none" strike="noStrike" cap="none" dirty="0" err="1">
-                <a:solidFill>
-                  <a:schemeClr val="dk1"/>
-                </a:solidFill>
-                <a:latin typeface="Calibri"/>
-                <a:ea typeface="Calibri"/>
-                <a:cs typeface="Calibri"/>
-                <a:sym typeface="Calibri"/>
-              </a:rPr>
-              <a:t>Mixtral</a:t>
-            </a:r>
-            <a:endParaRPr sz="1300" b="0" i="0" u="none" strike="noStrike" cap="none" dirty="0">
+              <a:t>Better than Llama-2, Grok, and Mixtral</a:t>
+            </a:r>
+            <a:endParaRPr sz="1300" b="0" i="0" u="none" strike="noStrike" cap="none">
               <a:solidFill>
                 <a:schemeClr val="dk1"/>
               </a:solidFill>
@@ -26986,7 +27690,7 @@
               <a:buChar char="●"/>
             </a:pPr>
             <a:r>
-              <a:rPr lang="en" sz="1300" b="0" i="0" u="none" strike="noStrike" cap="none" dirty="0">
+              <a:rPr lang="en" sz="1300" b="0" i="0" u="none" strike="noStrike" cap="none">
                 <a:solidFill>
                   <a:schemeClr val="dk1"/>
                 </a:solidFill>
@@ -26997,7 +27701,7 @@
               </a:rPr>
               <a:t>Open-source, 32K context length</a:t>
             </a:r>
-            <a:endParaRPr sz="1300" b="0" i="0" u="none" strike="noStrike" cap="none" dirty="0">
+            <a:endParaRPr sz="1300" b="0" i="0" u="none" strike="noStrike" cap="none">
               <a:solidFill>
                 <a:schemeClr val="dk1"/>
               </a:solidFill>
@@ -27026,7 +27730,7 @@
               <a:buChar char="●"/>
             </a:pPr>
             <a:r>
-              <a:rPr lang="en" sz="1300" b="0" i="0" u="none" strike="noStrike" cap="none" dirty="0">
+              <a:rPr lang="en" sz="1300" b="0" i="0" u="none" strike="noStrike" cap="none">
                 <a:solidFill>
                   <a:schemeClr val="dk1"/>
                 </a:solidFill>
@@ -27037,7 +27741,7 @@
               </a:rPr>
               <a:t>LLM, transformer-based, decoder-only, 132B params</a:t>
             </a:r>
-            <a:endParaRPr sz="1300" b="0" i="0" u="none" strike="noStrike" cap="none" dirty="0">
+            <a:endParaRPr sz="1300" b="0" i="0" u="none" strike="noStrike" cap="none">
               <a:solidFill>
                 <a:schemeClr val="dk1"/>
               </a:solidFill>
@@ -27066,7 +27770,7 @@
               <a:buChar char="●"/>
             </a:pPr>
             <a:r>
-              <a:rPr lang="en" sz="1300" b="0" i="0" u="none" strike="noStrike" cap="none" dirty="0">
+              <a:rPr lang="en" sz="1300" b="0" i="0" u="none" strike="noStrike" cap="none">
                 <a:solidFill>
                   <a:schemeClr val="dk1"/>
                 </a:solidFill>
@@ -27078,7 +27782,7 @@
               <a:t>M</a:t>
             </a:r>
             <a:r>
-              <a:rPr lang="en" sz="1300" b="0" i="0" u="none" strike="noStrike" cap="none" dirty="0">
+              <a:rPr lang="en" sz="1300" b="0" i="0" u="none" strike="noStrike" cap="none">
                 <a:solidFill>
                   <a:srgbClr val="000000"/>
                 </a:solidFill>
@@ -27087,33 +27791,9 @@
                 <a:cs typeface="Calibri"/>
                 <a:sym typeface="Calibri"/>
               </a:rPr>
-              <a:t>ixture-of-Experts (</a:t>
-            </a:r>
-            <a:r>
-              <a:rPr lang="en" sz="1300" b="0" i="0" u="none" strike="noStrike" cap="none" dirty="0" err="1">
-                <a:solidFill>
-                  <a:srgbClr val="000000"/>
-                </a:solidFill>
-                <a:latin typeface="Calibri"/>
-                <a:ea typeface="Calibri"/>
-                <a:cs typeface="Calibri"/>
-                <a:sym typeface="Calibri"/>
-              </a:rPr>
-              <a:t>MoE</a:t>
-            </a:r>
-            <a:r>
-              <a:rPr lang="en" sz="1300" b="0" i="0" u="none" strike="noStrike" cap="none" dirty="0">
-                <a:solidFill>
-                  <a:srgbClr val="000000"/>
-                </a:solidFill>
-                <a:latin typeface="Calibri"/>
-                <a:ea typeface="Calibri"/>
-                <a:cs typeface="Calibri"/>
-                <a:sym typeface="Calibri"/>
-              </a:rPr>
-              <a:t>) - 16 experts, chooses 4 (32B).</a:t>
-            </a:r>
-            <a:endParaRPr sz="1300" b="0" i="0" u="none" strike="noStrike" cap="none" dirty="0">
+              <a:t>ixture-of-Experts (MoE) - 16 experts, chooses 4 (32B).</a:t>
+            </a:r>
+            <a:endParaRPr sz="1300" b="0" i="0" u="none" strike="noStrike" cap="none">
               <a:solidFill>
                 <a:srgbClr val="000000"/>
               </a:solidFill>
@@ -27142,7 +27822,7 @@
               <a:buChar char="●"/>
             </a:pPr>
             <a:r>
-              <a:rPr lang="en" sz="1300" b="0" i="0" u="none" strike="noStrike" cap="none" dirty="0">
+              <a:rPr lang="en" sz="1300" b="0" i="0" u="none" strike="noStrike" cap="none">
                 <a:solidFill>
                   <a:srgbClr val="000000"/>
                 </a:solidFill>
@@ -27151,33 +27831,9 @@
                 <a:cs typeface="Calibri"/>
                 <a:sym typeface="Calibri"/>
               </a:rPr>
-              <a:t>Rotary Position Encodings (</a:t>
-            </a:r>
-            <a:r>
-              <a:rPr lang="en" sz="1300" b="0" i="0" u="none" strike="noStrike" cap="none" dirty="0" err="1">
-                <a:solidFill>
-                  <a:srgbClr val="000000"/>
-                </a:solidFill>
-                <a:latin typeface="Calibri"/>
-                <a:ea typeface="Calibri"/>
-                <a:cs typeface="Calibri"/>
-                <a:sym typeface="Calibri"/>
-              </a:rPr>
-              <a:t>RoPE</a:t>
-            </a:r>
-            <a:r>
-              <a:rPr lang="en" sz="1300" b="0" i="0" u="none" strike="noStrike" cap="none" dirty="0">
-                <a:solidFill>
-                  <a:srgbClr val="000000"/>
-                </a:solidFill>
-                <a:latin typeface="Calibri"/>
-                <a:ea typeface="Calibri"/>
-                <a:cs typeface="Calibri"/>
-                <a:sym typeface="Calibri"/>
-              </a:rPr>
-              <a:t>)</a:t>
-            </a:r>
-            <a:endParaRPr sz="1300" b="0" i="0" u="none" strike="noStrike" cap="none" dirty="0">
+              <a:t>Rotary Position Encodings (RoPE)</a:t>
+            </a:r>
+            <a:endParaRPr sz="1300" b="0" i="0" u="none" strike="noStrike" cap="none">
               <a:solidFill>
                 <a:srgbClr val="000000"/>
               </a:solidFill>
@@ -27206,7 +27862,7 @@
               <a:buChar char="●"/>
             </a:pPr>
             <a:r>
-              <a:rPr lang="en" sz="1300" b="0" i="0" u="none" strike="noStrike" cap="none" dirty="0">
+              <a:rPr lang="en" sz="1300" b="0" i="0" u="none" strike="noStrike" cap="none">
                 <a:solidFill>
                   <a:srgbClr val="000000"/>
                 </a:solidFill>
@@ -27217,7 +27873,7 @@
               </a:rPr>
               <a:t>Gated Linear Units (GLU)</a:t>
             </a:r>
-            <a:endParaRPr sz="1300" b="0" i="0" u="none" strike="noStrike" cap="none" dirty="0">
+            <a:endParaRPr sz="1300" b="0" i="0" u="none" strike="noStrike" cap="none">
               <a:solidFill>
                 <a:srgbClr val="000000"/>
               </a:solidFill>
@@ -27246,7 +27902,7 @@
               <a:buChar char="●"/>
             </a:pPr>
             <a:r>
-              <a:rPr lang="en" sz="1300" b="0" i="0" u="none" strike="noStrike" cap="none" dirty="0">
+              <a:rPr lang="en" sz="1300" b="0" i="0" u="none" strike="noStrike" cap="none">
                 <a:solidFill>
                   <a:srgbClr val="000000"/>
                 </a:solidFill>
@@ -27257,7 +27913,7 @@
               </a:rPr>
               <a:t>Grouped Query Attention (GQA)</a:t>
             </a:r>
-            <a:endParaRPr sz="1300" b="0" i="0" u="none" strike="noStrike" cap="none" dirty="0">
+            <a:endParaRPr sz="1300" b="0" i="0" u="none" strike="noStrike" cap="none">
               <a:solidFill>
                 <a:srgbClr val="000000"/>
               </a:solidFill>
@@ -27286,7 +27942,7 @@
               <a:buChar char="●"/>
             </a:pPr>
             <a:r>
-              <a:rPr lang="en" sz="1300" b="0" i="0" u="none" strike="noStrike" cap="none" dirty="0">
+              <a:rPr lang="en" sz="1300" b="0" i="0" u="none" strike="noStrike" cap="none">
                 <a:solidFill>
                   <a:srgbClr val="000000"/>
                 </a:solidFill>
@@ -27297,7 +27953,7 @@
               </a:rPr>
               <a:t>GPT-4 tokenizer</a:t>
             </a:r>
-            <a:endParaRPr sz="1300" b="0" i="0" u="none" strike="noStrike" cap="none" dirty="0">
+            <a:endParaRPr sz="1300" b="0" i="0" u="none" strike="noStrike" cap="none">
               <a:solidFill>
                 <a:srgbClr val="000000"/>
               </a:solidFill>
@@ -27318,12 +27974,18 @@
               <a:spcAft>
                 <a:spcPts val="0"/>
               </a:spcAft>
+              <a:buClr>
+                <a:srgbClr val="000000"/>
+              </a:buClr>
               <a:buSzPts val="1300"/>
               <a:buFont typeface="Calibri"/>
               <a:buChar char="●"/>
             </a:pPr>
             <a:r>
-              <a:rPr lang="en" sz="1300" dirty="0">
+              <a:rPr lang="en" sz="1300" b="0" i="0" u="none" strike="noStrike" cap="none">
+                <a:solidFill>
+                  <a:srgbClr val="000000"/>
+                </a:solidFill>
                 <a:latin typeface="Calibri"/>
                 <a:ea typeface="Calibri"/>
                 <a:cs typeface="Calibri"/>
@@ -27331,44 +27993,7 @@
               </a:rPr>
               <a:t>x2 faster than comparable models</a:t>
             </a:r>
-            <a:endParaRPr sz="1300" dirty="0">
-              <a:latin typeface="Calibri"/>
-              <a:ea typeface="Calibri"/>
-              <a:cs typeface="Calibri"/>
-              <a:sym typeface="Calibri"/>
-            </a:endParaRPr>
-          </a:p>
-          <a:p>
-            <a:pPr marL="228600" marR="0" lvl="0" indent="-196850" algn="l" rtl="0">
-              <a:lnSpc>
-                <a:spcPct val="100000"/>
-              </a:lnSpc>
-              <a:spcBef>
-                <a:spcPts val="0"/>
-              </a:spcBef>
-              <a:spcAft>
-                <a:spcPts val="0"/>
-              </a:spcAft>
-              <a:buClr>
-                <a:srgbClr val="000000"/>
-              </a:buClr>
-              <a:buSzPts val="1300"/>
-              <a:buFont typeface="Calibri"/>
-              <a:buChar char="●"/>
-            </a:pPr>
-            <a:r>
-              <a:rPr lang="en" sz="1300" b="0" i="0" u="none" strike="noStrike" cap="none" dirty="0">
-                <a:solidFill>
-                  <a:srgbClr val="000000"/>
-                </a:solidFill>
-                <a:latin typeface="Calibri"/>
-                <a:ea typeface="Calibri"/>
-                <a:cs typeface="Calibri"/>
-                <a:sym typeface="Calibri"/>
-              </a:rPr>
-              <a:t>needs 4 80GB GPUs to run inference with 16-bit precision</a:t>
-            </a:r>
-            <a:endParaRPr sz="1300" b="0" i="0" u="none" strike="noStrike" cap="none" dirty="0">
+            <a:endParaRPr sz="1300" b="0" i="0" u="none" strike="noStrike" cap="none">
               <a:solidFill>
                 <a:srgbClr val="000000"/>
               </a:solidFill>
@@ -27379,37 +28004,36 @@
             </a:endParaRPr>
           </a:p>
           <a:p>
-            <a:pPr marL="228600" marR="0" lvl="0" indent="-177800" algn="l" rtl="0">
-              <a:lnSpc>
-                <a:spcPct val="100000"/>
-              </a:lnSpc>
-              <a:spcBef>
-                <a:spcPts val="0"/>
-              </a:spcBef>
-              <a:spcAft>
-                <a:spcPts val="0"/>
-              </a:spcAft>
-              <a:buClr>
-                <a:srgbClr val="000000"/>
-              </a:buClr>
-              <a:buSzPts val="1000"/>
+            <a:pPr marL="228600" marR="0" lvl="0" indent="-196850" algn="l" rtl="0">
+              <a:lnSpc>
+                <a:spcPct val="100000"/>
+              </a:lnSpc>
+              <a:spcBef>
+                <a:spcPts val="0"/>
+              </a:spcBef>
+              <a:spcAft>
+                <a:spcPts val="0"/>
+              </a:spcAft>
+              <a:buClr>
+                <a:srgbClr val="000000"/>
+              </a:buClr>
+              <a:buSzPts val="1300"/>
               <a:buFont typeface="Calibri"/>
               <a:buChar char="●"/>
             </a:pPr>
             <a:r>
-              <a:rPr lang="en" sz="1000" b="0" i="0" u="sng" strike="noStrike" cap="none" dirty="0">
-                <a:solidFill>
-                  <a:schemeClr val="hlink"/>
-                </a:solidFill>
-                <a:latin typeface="Calibri"/>
-                <a:ea typeface="Calibri"/>
-                <a:cs typeface="Calibri"/>
-                <a:sym typeface="Calibri"/>
-                <a:hlinkClick r:id="rId3"/>
-              </a:rPr>
-              <a:t>https://www.databricks.com/blog/announcing-dbrx-new-standard-efficient-open-source-customizable-llms</a:t>
-            </a:r>
-            <a:endParaRPr sz="1000" b="0" i="0" u="none" strike="noStrike" cap="none" dirty="0">
+              <a:rPr lang="en" sz="1300" b="0" i="0" u="none" strike="noStrike" cap="none">
+                <a:solidFill>
+                  <a:srgbClr val="000000"/>
+                </a:solidFill>
+                <a:latin typeface="Calibri"/>
+                <a:ea typeface="Calibri"/>
+                <a:cs typeface="Calibri"/>
+                <a:sym typeface="Calibri"/>
+              </a:rPr>
+              <a:t>needs 4 80GB GPUs to run inference with 16-bit precision</a:t>
+            </a:r>
+            <a:endParaRPr sz="1300" b="0" i="0" u="none" strike="noStrike" cap="none">
               <a:solidFill>
                 <a:srgbClr val="000000"/>
               </a:solidFill>
@@ -27438,7 +28062,7 @@
               <a:buChar char="●"/>
             </a:pPr>
             <a:r>
-              <a:rPr lang="en" sz="1000" b="0" i="0" u="sng" strike="noStrike" cap="none" dirty="0">
+              <a:rPr lang="en" sz="1000" b="0" i="0" u="sng" strike="noStrike" cap="none">
                 <a:solidFill>
                   <a:schemeClr val="hlink"/>
                 </a:solidFill>
@@ -27446,23 +28070,11 @@
                 <a:ea typeface="Calibri"/>
                 <a:cs typeface="Calibri"/>
                 <a:sym typeface="Calibri"/>
-                <a:hlinkClick r:id="rId4"/>
-              </a:rPr>
-              <a:t>https://github.com/databricks/dbrx</a:t>
-            </a:r>
-            <a:r>
-              <a:rPr lang="en" sz="1000" b="0" i="0" u="none" strike="noStrike" cap="none" dirty="0">
-                <a:solidFill>
-                  <a:srgbClr val="000000"/>
-                </a:solidFill>
-                <a:latin typeface="Calibri"/>
-                <a:ea typeface="Calibri"/>
-                <a:cs typeface="Calibri"/>
-                <a:sym typeface="Calibri"/>
-              </a:rPr>
-              <a:t> </a:t>
-            </a:r>
-            <a:endParaRPr sz="1000" b="0" i="0" u="none" strike="noStrike" cap="none" dirty="0">
+                <a:hlinkClick r:id="rId3"/>
+              </a:rPr>
+              <a:t>https://www.databricks.com/blog/announcing-dbrx-new-standard-efficient-open-source-customizable-llms</a:t>
+            </a:r>
+            <a:endParaRPr sz="1000" b="0" i="0" u="none" strike="noStrike" cap="none">
               <a:solidFill>
                 <a:srgbClr val="000000"/>
               </a:solidFill>
@@ -27491,7 +28103,7 @@
               <a:buChar char="●"/>
             </a:pPr>
             <a:r>
-              <a:rPr lang="en" sz="1000" b="0" i="0" u="sng" strike="noStrike" cap="none" dirty="0">
+              <a:rPr lang="en" sz="1000" b="0" i="0" u="sng" strike="noStrike" cap="none">
                 <a:solidFill>
                   <a:schemeClr val="hlink"/>
                 </a:solidFill>
@@ -27499,12 +28111,12 @@
                 <a:ea typeface="Calibri"/>
                 <a:cs typeface="Calibri"/>
                 <a:sym typeface="Calibri"/>
-                <a:hlinkClick r:id="rId5"/>
-              </a:rPr>
-              <a:t>https://huggingface.co/collections/databricks/dbrx-6601c0852a0cdd3c59f71962</a:t>
-            </a:r>
-            <a:r>
-              <a:rPr lang="en" sz="1000" b="0" i="0" u="none" strike="noStrike" cap="none" dirty="0">
+                <a:hlinkClick r:id="rId4"/>
+              </a:rPr>
+              <a:t>https://github.com/databricks/dbrx</a:t>
+            </a:r>
+            <a:r>
+              <a:rPr lang="en" sz="1000" b="0" i="0" u="none" strike="noStrike" cap="none">
                 <a:solidFill>
                   <a:srgbClr val="000000"/>
                 </a:solidFill>
@@ -27515,7 +28127,7 @@
               </a:rPr>
               <a:t> </a:t>
             </a:r>
-            <a:endParaRPr sz="1000" b="0" i="0" u="none" strike="noStrike" cap="none" dirty="0">
+            <a:endParaRPr sz="1000" b="0" i="0" u="none" strike="noStrike" cap="none">
               <a:solidFill>
                 <a:srgbClr val="000000"/>
               </a:solidFill>
@@ -27544,7 +28156,7 @@
               <a:buChar char="●"/>
             </a:pPr>
             <a:r>
-              <a:rPr lang="en" sz="1000" b="0" i="0" u="sng" strike="noStrike" cap="none" dirty="0">
+              <a:rPr lang="en" sz="1000" b="0" i="0" u="sng" strike="noStrike" cap="none">
                 <a:solidFill>
                   <a:schemeClr val="hlink"/>
                 </a:solidFill>
@@ -27552,12 +28164,12 @@
                 <a:ea typeface="Calibri"/>
                 <a:cs typeface="Calibri"/>
                 <a:sym typeface="Calibri"/>
-                <a:hlinkClick r:id="rId6"/>
-              </a:rPr>
-              <a:t>https://www.databricks.com/blog/introducing-dbrx-new-state-art-open-llm</a:t>
-            </a:r>
-            <a:r>
-              <a:rPr lang="en" sz="1000" b="0" i="0" u="none" strike="noStrike" cap="none" dirty="0">
+                <a:hlinkClick r:id="rId5"/>
+              </a:rPr>
+              <a:t>https://huggingface.co/collections/databricks/dbrx-6601c0852a0cdd3c59f71962</a:t>
+            </a:r>
+            <a:r>
+              <a:rPr lang="en" sz="1000" b="0" i="0" u="none" strike="noStrike" cap="none">
                 <a:solidFill>
                   <a:srgbClr val="000000"/>
                 </a:solidFill>
@@ -27568,7 +28180,7 @@
               </a:rPr>
               <a:t> </a:t>
             </a:r>
-            <a:endParaRPr sz="1000" b="0" i="0" u="none" strike="noStrike" cap="none" dirty="0">
+            <a:endParaRPr sz="1000" b="0" i="0" u="none" strike="noStrike" cap="none">
               <a:solidFill>
                 <a:srgbClr val="000000"/>
               </a:solidFill>
@@ -27578,11 +28190,64 @@
               <a:sym typeface="Calibri"/>
             </a:endParaRPr>
           </a:p>
+          <a:p>
+            <a:pPr marL="228600" marR="0" lvl="0" indent="-177800" algn="l" rtl="0">
+              <a:lnSpc>
+                <a:spcPct val="100000"/>
+              </a:lnSpc>
+              <a:spcBef>
+                <a:spcPts val="0"/>
+              </a:spcBef>
+              <a:spcAft>
+                <a:spcPts val="0"/>
+              </a:spcAft>
+              <a:buClr>
+                <a:srgbClr val="000000"/>
+              </a:buClr>
+              <a:buSzPts val="1000"/>
+              <a:buFont typeface="Calibri"/>
+              <a:buChar char="●"/>
+            </a:pPr>
+            <a:r>
+              <a:rPr lang="en" sz="1000" b="0" i="0" u="sng" strike="noStrike" cap="none">
+                <a:solidFill>
+                  <a:schemeClr val="hlink"/>
+                </a:solidFill>
+                <a:latin typeface="Calibri"/>
+                <a:ea typeface="Calibri"/>
+                <a:cs typeface="Calibri"/>
+                <a:sym typeface="Calibri"/>
+                <a:hlinkClick r:id="rId6"/>
+              </a:rPr>
+              <a:t>https://www.databricks.com/blog/introducing-dbrx-new-state-art-open-llm</a:t>
+            </a:r>
+            <a:r>
+              <a:rPr lang="en" sz="1000" b="0" i="0" u="none" strike="noStrike" cap="none">
+                <a:solidFill>
+                  <a:srgbClr val="000000"/>
+                </a:solidFill>
+                <a:latin typeface="Calibri"/>
+                <a:ea typeface="Calibri"/>
+                <a:cs typeface="Calibri"/>
+                <a:sym typeface="Calibri"/>
+              </a:rPr>
+              <a:t> </a:t>
+            </a:r>
+            <a:endParaRPr sz="1000" b="0" i="0" u="none" strike="noStrike" cap="none">
+              <a:solidFill>
+                <a:srgbClr val="000000"/>
+              </a:solidFill>
+              <a:latin typeface="Calibri"/>
+              <a:ea typeface="Calibri"/>
+              <a:cs typeface="Calibri"/>
+              <a:sym typeface="Calibri"/>
+            </a:endParaRPr>
+          </a:p>
         </p:txBody>
       </p:sp>
       <p:pic>
         <p:nvPicPr>
-          <p:cNvPr id="115" name="Google Shape;115;p19"/>
+          <p:cNvPr id="117" name="Google Shape;117;p19"/>
           <p:cNvPicPr preferRelativeResize="0"/>
           <p:nvPr/>
         </p:nvPicPr>
@@ -27609,7 +28274,7 @@
       </p:pic>
       <p:pic>
         <p:nvPicPr>
-          <p:cNvPr id="116" name="Google Shape;116;p19"/>
+          <p:cNvPr id="118" name="Google Shape;118;p19"/>
           <p:cNvPicPr preferRelativeResize="0"/>
           <p:nvPr/>
         </p:nvPicPr>
@@ -27647,7 +28312,7 @@
   <p:cSld>
     <p:spTree>
       <p:nvGrpSpPr>
-        <p:cNvPr id="1" name="Shape 120"/>
+        <p:cNvPr id="1" name="Shape 122"/>
         <p:cNvGrpSpPr/>
         <p:nvPr/>
       </p:nvGrpSpPr>
@@ -27661,7 +28326,7 @@
       </p:grpSpPr>
       <p:sp>
         <p:nvSpPr>
-          <p:cNvPr id="121" name="Google Shape;121;p20"/>
+          <p:cNvPr id="123" name="Google Shape;123;p20"/>
           <p:cNvSpPr txBox="1"/>
           <p:nvPr/>
         </p:nvSpPr>
@@ -27727,7 +28392,7 @@
       </p:sp>
       <p:sp>
         <p:nvSpPr>
-          <p:cNvPr id="122" name="Google Shape;122;p20"/>
+          <p:cNvPr id="124" name="Google Shape;124;p20"/>
           <p:cNvSpPr txBox="1"/>
           <p:nvPr/>
         </p:nvSpPr>
@@ -27932,7 +28597,28 @@
                 <a:cs typeface="Calibri"/>
                 <a:sym typeface="Calibri"/>
               </a:rPr>
-              <a:t>(SSM = State State Model)</a:t>
+              <a:t>(SSM = State </a:t>
+            </a:r>
+            <a:r>
+              <a:rPr lang="en" sz="1300">
+                <a:latin typeface="Calibri"/>
+                <a:ea typeface="Calibri"/>
+                <a:cs typeface="Calibri"/>
+                <a:sym typeface="Calibri"/>
+              </a:rPr>
+              <a:t>Space</a:t>
+            </a:r>
+            <a:r>
+              <a:rPr lang="en" sz="1300" b="0" i="0" u="none" strike="noStrike" cap="none">
+                <a:solidFill>
+                  <a:srgbClr val="000000"/>
+                </a:solidFill>
+                <a:latin typeface="Calibri"/>
+                <a:ea typeface="Calibri"/>
+                <a:cs typeface="Calibri"/>
+                <a:sym typeface="Calibri"/>
+              </a:rPr>
+              <a:t> Model)</a:t>
             </a:r>
             <a:endParaRPr sz="1300" b="0" i="0" u="none" strike="noStrike" cap="none">
               <a:solidFill>
@@ -28280,7 +28966,10 @@
               <a:t>https://www.ai21.com/blog/announcing-jamba</a:t>
             </a:r>
             <a:br>
-              <a:rPr lang="en" sz="1000">
+              <a:rPr lang="en" sz="1000" b="0" i="0" u="none" strike="noStrike" cap="none">
+                <a:solidFill>
+                  <a:srgbClr val="000000"/>
+                </a:solidFill>
                 <a:latin typeface="Calibri"/>
                 <a:ea typeface="Calibri"/>
                 <a:cs typeface="Calibri"/>
@@ -28288,7 +28977,7 @@
               </a:rPr>
             </a:br>
             <a:r>
-              <a:rPr lang="en" sz="1000" u="sng">
+              <a:rPr lang="en" sz="1000" b="0" i="0" u="sng" strike="noStrike" cap="none">
                 <a:solidFill>
                   <a:schemeClr val="hlink"/>
                 </a:solidFill>
@@ -28301,7 +28990,10 @@
               <a:t>https://arxiv.org/pdf/2312.00752.pdf</a:t>
             </a:r>
             <a:r>
-              <a:rPr lang="en" sz="1000">
+              <a:rPr lang="en" sz="1000" b="0" i="0" u="none" strike="noStrike" cap="none">
+                <a:solidFill>
+                  <a:srgbClr val="000000"/>
+                </a:solidFill>
                 <a:latin typeface="Calibri"/>
                 <a:ea typeface="Calibri"/>
                 <a:cs typeface="Calibri"/>
@@ -28323,7 +29015,7 @@
       </p:sp>
       <p:pic>
         <p:nvPicPr>
-          <p:cNvPr id="123" name="Google Shape;123;p20"/>
+          <p:cNvPr id="125" name="Google Shape;125;p20"/>
           <p:cNvPicPr preferRelativeResize="0"/>
           <p:nvPr/>
         </p:nvPicPr>
@@ -28355,18 +29047,13 @@
       </p:pic>
       <p:pic>
         <p:nvPicPr>
-          <p:cNvPr id="124" name="Google Shape;124;p20"/>
+          <p:cNvPr id="126" name="Google Shape;126;p20"/>
           <p:cNvPicPr preferRelativeResize="0"/>
           <p:nvPr/>
         </p:nvPicPr>
         <p:blipFill rotWithShape="1">
-          <a:blip r:embed="rId7" cstate="email">
+          <a:blip r:embed="rId7">
             <a:alphaModFix/>
-            <a:extLst>
-              <a:ext uri="{28A0092B-C50C-407E-A947-70E740481C1C}">
-                <a14:useLocalDpi xmlns:a14="http://schemas.microsoft.com/office/drawing/2010/main"/>
-              </a:ext>
-            </a:extLst>
           </a:blip>
           <a:srcRect/>
           <a:stretch/>
@@ -28387,18 +29074,13 @@
       </p:pic>
       <p:pic>
         <p:nvPicPr>
-          <p:cNvPr id="125" name="Google Shape;125;p20"/>
+          <p:cNvPr id="127" name="Google Shape;127;p20"/>
           <p:cNvPicPr preferRelativeResize="0"/>
           <p:nvPr/>
         </p:nvPicPr>
         <p:blipFill rotWithShape="1">
-          <a:blip r:embed="rId8" cstate="email">
+          <a:blip r:embed="rId8">
             <a:alphaModFix/>
-            <a:extLst>
-              <a:ext uri="{28A0092B-C50C-407E-A947-70E740481C1C}">
-                <a14:useLocalDpi xmlns:a14="http://schemas.microsoft.com/office/drawing/2010/main"/>
-              </a:ext>
-            </a:extLst>
           </a:blip>
           <a:srcRect/>
           <a:stretch/>
@@ -28419,18 +29101,13 @@
       </p:pic>
       <p:pic>
         <p:nvPicPr>
-          <p:cNvPr id="126" name="Google Shape;126;p20"/>
+          <p:cNvPr id="128" name="Google Shape;128;p20"/>
           <p:cNvPicPr preferRelativeResize="0"/>
           <p:nvPr/>
         </p:nvPicPr>
         <p:blipFill rotWithShape="1">
-          <a:blip r:embed="rId9" cstate="email">
+          <a:blip r:embed="rId9">
             <a:alphaModFix/>
-            <a:extLst>
-              <a:ext uri="{28A0092B-C50C-407E-A947-70E740481C1C}">
-                <a14:useLocalDpi xmlns:a14="http://schemas.microsoft.com/office/drawing/2010/main"/>
-              </a:ext>
-            </a:extLst>
           </a:blip>
           <a:srcRect/>
           <a:stretch/>
@@ -28451,7 +29128,7 @@
       </p:pic>
       <p:sp>
         <p:nvSpPr>
-          <p:cNvPr id="127" name="Google Shape;127;p20"/>
+          <p:cNvPr id="129" name="Google Shape;129;p20"/>
           <p:cNvSpPr txBox="1"/>
           <p:nvPr/>
         </p:nvSpPr>
@@ -28474,17 +29151,28 @@
           </a:bodyPr>
           <a:lstStyle/>
           <a:p>
-            <a:pPr marL="0" lvl="0" indent="0" algn="ctr" rtl="0">
-              <a:spcBef>
-                <a:spcPts val="0"/>
-              </a:spcBef>
-              <a:spcAft>
-                <a:spcPts val="0"/>
-              </a:spcAft>
-              <a:buNone/>
-            </a:pPr>
-            <a:r>
-              <a:rPr lang="en" sz="1100">
+            <a:pPr marL="0" marR="0" lvl="0" indent="0" algn="ctr" rtl="0">
+              <a:lnSpc>
+                <a:spcPct val="100000"/>
+              </a:lnSpc>
+              <a:spcBef>
+                <a:spcPts val="0"/>
+              </a:spcBef>
+              <a:spcAft>
+                <a:spcPts val="0"/>
+              </a:spcAft>
+              <a:buClr>
+                <a:srgbClr val="000000"/>
+              </a:buClr>
+              <a:buSzPts val="1100"/>
+              <a:buFont typeface="Arial"/>
+              <a:buNone/>
+            </a:pPr>
+            <a:r>
+              <a:rPr lang="en" sz="1100" b="0" i="0" u="none" strike="noStrike" cap="none">
+                <a:solidFill>
+                  <a:srgbClr val="000000"/>
+                </a:solidFill>
                 <a:latin typeface="Calibri"/>
                 <a:ea typeface="Calibri"/>
                 <a:cs typeface="Calibri"/>
@@ -28493,7 +29181,7 @@
               <a:t>AI21 Labs founded </a:t>
             </a:r>
             <a:r>
-              <a:rPr lang="en" sz="1100">
+              <a:rPr lang="en" sz="1100" b="0" i="0" u="none" strike="noStrike" cap="none">
                 <a:solidFill>
                   <a:schemeClr val="dk1"/>
                 </a:solidFill>
@@ -28504,7 +29192,7 @@
               </a:rPr>
               <a:t>in 2017 in Israel</a:t>
             </a:r>
-            <a:endParaRPr sz="1100">
+            <a:endParaRPr sz="1100" b="0" i="0" u="none" strike="noStrike" cap="none">
               <a:solidFill>
                 <a:schemeClr val="dk1"/>
               </a:solidFill>
@@ -28515,17 +29203,28 @@
             </a:endParaRPr>
           </a:p>
           <a:p>
-            <a:pPr marL="0" lvl="0" indent="0" algn="ctr" rtl="0">
-              <a:spcBef>
-                <a:spcPts val="0"/>
-              </a:spcBef>
-              <a:spcAft>
-                <a:spcPts val="0"/>
-              </a:spcAft>
-              <a:buNone/>
-            </a:pPr>
-            <a:r>
-              <a:rPr lang="en" sz="1100">
+            <a:pPr marL="0" marR="0" lvl="0" indent="0" algn="ctr" rtl="0">
+              <a:lnSpc>
+                <a:spcPct val="100000"/>
+              </a:lnSpc>
+              <a:spcBef>
+                <a:spcPts val="0"/>
+              </a:spcBef>
+              <a:spcAft>
+                <a:spcPts val="0"/>
+              </a:spcAft>
+              <a:buClr>
+                <a:srgbClr val="000000"/>
+              </a:buClr>
+              <a:buSzPts val="1100"/>
+              <a:buFont typeface="Arial"/>
+              <a:buNone/>
+            </a:pPr>
+            <a:r>
+              <a:rPr lang="en" sz="1100" b="0" i="0" u="none" strike="noStrike" cap="none">
+                <a:solidFill>
+                  <a:srgbClr val="000000"/>
+                </a:solidFill>
                 <a:latin typeface="Calibri"/>
                 <a:ea typeface="Calibri"/>
                 <a:cs typeface="Calibri"/>
@@ -28533,7 +29232,10 @@
               </a:rPr>
               <a:t>Yoav Shoham (Stanford)</a:t>
             </a:r>
-            <a:endParaRPr sz="1100">
+            <a:endParaRPr sz="1100" b="0" i="0" u="none" strike="noStrike" cap="none">
+              <a:solidFill>
+                <a:srgbClr val="000000"/>
+              </a:solidFill>
               <a:latin typeface="Calibri"/>
               <a:ea typeface="Calibri"/>
               <a:cs typeface="Calibri"/>
@@ -28541,17 +29243,28 @@
             </a:endParaRPr>
           </a:p>
           <a:p>
-            <a:pPr marL="0" lvl="0" indent="0" algn="ctr" rtl="0">
-              <a:spcBef>
-                <a:spcPts val="0"/>
-              </a:spcBef>
-              <a:spcAft>
-                <a:spcPts val="0"/>
-              </a:spcAft>
-              <a:buNone/>
-            </a:pPr>
-            <a:r>
-              <a:rPr lang="en" sz="1100">
+            <a:pPr marL="0" marR="0" lvl="0" indent="0" algn="ctr" rtl="0">
+              <a:lnSpc>
+                <a:spcPct val="100000"/>
+              </a:lnSpc>
+              <a:spcBef>
+                <a:spcPts val="0"/>
+              </a:spcBef>
+              <a:spcAft>
+                <a:spcPts val="0"/>
+              </a:spcAft>
+              <a:buClr>
+                <a:srgbClr val="000000"/>
+              </a:buClr>
+              <a:buSzPts val="1100"/>
+              <a:buFont typeface="Arial"/>
+              <a:buNone/>
+            </a:pPr>
+            <a:r>
+              <a:rPr lang="en" sz="1100" b="0" i="0" u="none" strike="noStrike" cap="none">
+                <a:solidFill>
+                  <a:srgbClr val="000000"/>
+                </a:solidFill>
                 <a:latin typeface="Calibri"/>
                 <a:ea typeface="Calibri"/>
                 <a:cs typeface="Calibri"/>
@@ -28559,7 +29272,10 @@
               </a:rPr>
               <a:t>Ori Goshen (CrowdX)</a:t>
             </a:r>
-            <a:endParaRPr sz="1100">
+            <a:endParaRPr sz="1100" b="0" i="0" u="none" strike="noStrike" cap="none">
+              <a:solidFill>
+                <a:srgbClr val="000000"/>
+              </a:solidFill>
               <a:latin typeface="Calibri"/>
               <a:ea typeface="Calibri"/>
               <a:cs typeface="Calibri"/>
@@ -28567,17 +29283,28 @@
             </a:endParaRPr>
           </a:p>
           <a:p>
-            <a:pPr marL="0" lvl="0" indent="0" algn="ctr" rtl="0">
-              <a:spcBef>
-                <a:spcPts val="0"/>
-              </a:spcBef>
-              <a:spcAft>
-                <a:spcPts val="0"/>
-              </a:spcAft>
-              <a:buNone/>
-            </a:pPr>
-            <a:r>
-              <a:rPr lang="en" sz="1100">
+            <a:pPr marL="0" marR="0" lvl="0" indent="0" algn="ctr" rtl="0">
+              <a:lnSpc>
+                <a:spcPct val="100000"/>
+              </a:lnSpc>
+              <a:spcBef>
+                <a:spcPts val="0"/>
+              </a:spcBef>
+              <a:spcAft>
+                <a:spcPts val="0"/>
+              </a:spcAft>
+              <a:buClr>
+                <a:srgbClr val="000000"/>
+              </a:buClr>
+              <a:buSzPts val="1100"/>
+              <a:buFont typeface="Arial"/>
+              <a:buNone/>
+            </a:pPr>
+            <a:r>
+              <a:rPr lang="en" sz="1100" b="0" i="0" u="none" strike="noStrike" cap="none">
+                <a:solidFill>
+                  <a:srgbClr val="000000"/>
+                </a:solidFill>
                 <a:latin typeface="Calibri"/>
                 <a:ea typeface="Calibri"/>
                 <a:cs typeface="Calibri"/>
@@ -28585,7 +29312,10 @@
               </a:rPr>
               <a:t>Amnon Shashua (Mobileye)</a:t>
             </a:r>
-            <a:endParaRPr sz="1100">
+            <a:endParaRPr sz="1100" b="0" i="0" u="none" strike="noStrike" cap="none">
+              <a:solidFill>
+                <a:srgbClr val="000000"/>
+              </a:solidFill>
               <a:latin typeface="Calibri"/>
               <a:ea typeface="Calibri"/>
               <a:cs typeface="Calibri"/>
@@ -28596,11 +29326,11 @@
       </p:sp>
       <p:pic>
         <p:nvPicPr>
-          <p:cNvPr id="128" name="Google Shape;128;p20"/>
+          <p:cNvPr id="130" name="Google Shape;130;p20"/>
           <p:cNvPicPr preferRelativeResize="0"/>
           <p:nvPr/>
         </p:nvPicPr>
-        <p:blipFill>
+        <p:blipFill rotWithShape="1">
           <a:blip r:embed="rId10" cstate="email">
             <a:alphaModFix/>
             <a:extLst>
@@ -28609,9 +29339,8 @@
               </a:ext>
             </a:extLst>
           </a:blip>
-          <a:stretch>
-            <a:fillRect/>
-          </a:stretch>
+          <a:srcRect/>
+          <a:stretch/>
         </p:blipFill>
         <p:spPr>
           <a:xfrm>
@@ -28640,7 +29369,7 @@
   <p:cSld>
     <p:spTree>
       <p:nvGrpSpPr>
-        <p:cNvPr id="1" name="Shape 132"/>
+        <p:cNvPr id="1" name="Shape 134"/>
         <p:cNvGrpSpPr/>
         <p:nvPr/>
       </p:nvGrpSpPr>
@@ -28654,7 +29383,7 @@
       </p:grpSpPr>
       <p:sp>
         <p:nvSpPr>
-          <p:cNvPr id="133" name="Google Shape;133;p21"/>
+          <p:cNvPr id="135" name="Google Shape;135;p21"/>
           <p:cNvSpPr txBox="1"/>
           <p:nvPr/>
         </p:nvSpPr>
@@ -28695,7 +29424,7 @@
               <a:buNone/>
             </a:pPr>
             <a:r>
-              <a:rPr lang="en" sz="2000" b="1">
+              <a:rPr lang="en" sz="2000" b="1" i="0" u="none" strike="noStrike" cap="none">
                 <a:solidFill>
                   <a:schemeClr val="dk1"/>
                 </a:solidFill>
@@ -28720,13 +29449,13 @@
       </p:sp>
       <p:sp>
         <p:nvSpPr>
-          <p:cNvPr id="134" name="Google Shape;134;p21"/>
+          <p:cNvPr id="136" name="Google Shape;136;p21"/>
           <p:cNvSpPr txBox="1"/>
           <p:nvPr/>
         </p:nvSpPr>
         <p:spPr>
           <a:xfrm>
-            <a:off x="1114650" y="793600"/>
+            <a:off x="1114650" y="615813"/>
             <a:ext cx="4425600" cy="1154400"/>
           </a:xfrm>
           <a:prstGeom prst="rect">
@@ -28769,7 +29498,7 @@
               <a:buNone/>
             </a:pPr>
             <a:r>
-              <a:rPr lang="en" sz="1300" b="1">
+              <a:rPr lang="en" sz="1300" b="1" i="0" u="none" strike="noStrike" cap="none">
                 <a:solidFill>
                   <a:srgbClr val="FF0000"/>
                 </a:solidFill>
@@ -28780,7 +29509,7 @@
               </a:rPr>
               <a:t>SiMBA: Simplified Mamba-Based Architecture ... (Microsoft)</a:t>
             </a:r>
-            <a:endParaRPr sz="1300" b="1">
+            <a:endParaRPr sz="1300" b="1" i="0" u="none" strike="noStrike" cap="none">
               <a:solidFill>
                 <a:srgbClr val="FF0000"/>
               </a:solidFill>
@@ -28801,12 +29530,15 @@
               <a:spcAft>
                 <a:spcPts val="0"/>
               </a:spcAft>
+              <a:buClr>
+                <a:srgbClr val="000000"/>
+              </a:buClr>
               <a:buSzPts val="1000"/>
               <a:buFont typeface="Calibri"/>
               <a:buChar char="●"/>
             </a:pPr>
             <a:r>
-              <a:rPr lang="en" sz="1000" u="sng">
+              <a:rPr lang="en" sz="1000" b="0" i="0" u="sng" strike="noStrike" cap="none">
                 <a:solidFill>
                   <a:schemeClr val="hlink"/>
                 </a:solidFill>
@@ -28819,7 +29551,7 @@
               <a:t>https://arxiv.org/abs/2403.15360</a:t>
             </a:r>
             <a:r>
-              <a:rPr lang="en" sz="1000">
+              <a:rPr lang="en" sz="1000" b="0" i="0" u="none" strike="noStrike" cap="none">
                 <a:solidFill>
                   <a:schemeClr val="dk1"/>
                 </a:solidFill>
@@ -28830,7 +29562,7 @@
               </a:rPr>
               <a:t> </a:t>
             </a:r>
-            <a:endParaRPr sz="1000">
+            <a:endParaRPr sz="1000" b="0" i="0" u="none" strike="noStrike" cap="none">
               <a:solidFill>
                 <a:schemeClr val="dk1"/>
               </a:solidFill>
@@ -28851,12 +29583,15 @@
               <a:spcAft>
                 <a:spcPts val="0"/>
               </a:spcAft>
+              <a:buClr>
+                <a:srgbClr val="000000"/>
+              </a:buClr>
               <a:buSzPts val="1000"/>
               <a:buFont typeface="Calibri"/>
               <a:buChar char="●"/>
             </a:pPr>
             <a:r>
-              <a:rPr lang="en" sz="1000" u="sng">
+              <a:rPr lang="en" sz="1000" b="0" i="0" u="sng" strike="noStrike" cap="none">
                 <a:solidFill>
                   <a:schemeClr val="hlink"/>
                 </a:solidFill>
@@ -28869,7 +29604,7 @@
               <a:t>https://github.com/badripatro/Simba</a:t>
             </a:r>
             <a:r>
-              <a:rPr lang="en" sz="1000">
+              <a:rPr lang="en" sz="1000" b="0" i="0" u="none" strike="noStrike" cap="none">
                 <a:solidFill>
                   <a:schemeClr val="dk1"/>
                 </a:solidFill>
@@ -28880,7 +29615,7 @@
               </a:rPr>
               <a:t> </a:t>
             </a:r>
-            <a:endParaRPr sz="1000">
+            <a:endParaRPr sz="1000" b="0" i="0" u="none" strike="noStrike" cap="none">
               <a:solidFill>
                 <a:schemeClr val="dk1"/>
               </a:solidFill>
@@ -28901,12 +29636,15 @@
               <a:spcAft>
                 <a:spcPts val="0"/>
               </a:spcAft>
+              <a:buClr>
+                <a:srgbClr val="000000"/>
+              </a:buClr>
               <a:buSzPts val="1000"/>
               <a:buFont typeface="Calibri"/>
               <a:buChar char="●"/>
             </a:pPr>
             <a:r>
-              <a:rPr lang="en" sz="1000" u="sng">
+              <a:rPr lang="en" sz="1000" b="0" i="0" u="sng" strike="noStrike" cap="none">
                 <a:solidFill>
                   <a:schemeClr val="hlink"/>
                 </a:solidFill>
@@ -28919,7 +29657,7 @@
               <a:t>https://www.marktechpost.com/2024/03/27/this-ai-paper-from-microsoft-present-simba-a-simplified-mamba-based-architecture-for-vision-and-multivariate-time-series/</a:t>
             </a:r>
             <a:r>
-              <a:rPr lang="en" sz="1000">
+              <a:rPr lang="en" sz="1000" b="0" i="0" u="none" strike="noStrike" cap="none">
                 <a:solidFill>
                   <a:schemeClr val="dk1"/>
                 </a:solidFill>
@@ -28930,7 +29668,7 @@
               </a:rPr>
               <a:t> </a:t>
             </a:r>
-            <a:endParaRPr sz="1000">
+            <a:endParaRPr sz="1000" b="0" i="0" u="none" strike="noStrike" cap="none">
               <a:solidFill>
                 <a:schemeClr val="dk1"/>
               </a:solidFill>
@@ -28944,22 +29682,16 @@
       </p:sp>
       <p:pic>
         <p:nvPicPr>
-          <p:cNvPr id="135" name="Google Shape;135;p21"/>
+          <p:cNvPr id="137" name="Google Shape;137;p21"/>
           <p:cNvPicPr preferRelativeResize="0"/>
           <p:nvPr/>
         </p:nvPicPr>
-        <p:blipFill>
-          <a:blip r:embed="rId6" cstate="email">
+        <p:blipFill rotWithShape="1">
+          <a:blip r:embed="rId6">
             <a:alphaModFix/>
-            <a:extLst>
-              <a:ext uri="{28A0092B-C50C-407E-A947-70E740481C1C}">
-                <a14:useLocalDpi xmlns:a14="http://schemas.microsoft.com/office/drawing/2010/main"/>
-              </a:ext>
-            </a:extLst>
           </a:blip>
-          <a:stretch>
-            <a:fillRect/>
-          </a:stretch>
+          <a:srcRect/>
+          <a:stretch/>
         </p:blipFill>
         <p:spPr>
           <a:xfrm>
